--- a/納品レポート/ホテル別レポート/daiichi_ikebukuro_口コミ分析レポート.pptx
+++ b/納品レポート/ホテル別レポート/daiichi_ikebukuro_口コミ分析レポート.pptx
@@ -208,13 +208,13 @@
                 <c:formatCode>General</c:formatCode>
                 <c:ptCount val="6"/>
                 <c:pt idx="0">
-                  <c:v>9.46</c:v>
+                  <c:v>9.48</c:v>
                 </c:pt>
                 <c:pt idx="1">
-                  <c:v>9.2</c:v>
+                  <c:v>9.23</c:v>
                 </c:pt>
                 <c:pt idx="2">
-                  <c:v>8.62</c:v>
+                  <c:v>8.65</c:v>
                 </c:pt>
                 <c:pt idx="3">
                   <c:v>8</c:v>
@@ -566,7 +566,7 @@
               <c:numCache>
                 <c:ptCount val="3"/>
                 <c:pt idx="0">
-                  <c:v>87</c:v>
+                  <c:v>91</c:v>
                 </c:pt>
                 <c:pt idx="1">
                   <c:v>8</c:v>
@@ -809,10 +809,10 @@
                 <c:formatCode>General</c:formatCode>
                 <c:ptCount val="8"/>
                 <c:pt idx="0">
-                  <c:v>55</c:v>
+                  <c:v>58</c:v>
                 </c:pt>
                 <c:pt idx="1">
-                  <c:v>16</c:v>
+                  <c:v>17</c:v>
                 </c:pt>
                 <c:pt idx="2">
                   <c:v>16</c:v>
@@ -2781,7 +2781,7 @@
                 <a:ea typeface="Arial" pitchFamily="34" charset="-122"/>
                 <a:cs typeface="Arial" pitchFamily="34" charset="-120"/>
               </a:rPr>
-              <a:t>レビュー総数：97件（6サイト）</a:t>
+              <a:t>レビュー総数：101件（6サイト）</a:t>
             </a:r>
             <a:endParaRPr lang="en-US" sz="1000" dirty="0"/>
           </a:p>
@@ -2801,7 +2801,7 @@
                 <a:ea typeface="Arial" pitchFamily="34" charset="-122"/>
                 <a:cs typeface="Arial" pitchFamily="34" charset="-120"/>
               </a:rPr>
-              <a:t>作成日：2026年3月17日</a:t>
+              <a:t>作成日：2026年3月18日</a:t>
             </a:r>
             <a:endParaRPr lang="en-US" sz="1000" dirty="0"/>
           </a:p>
@@ -3347,7 +3347,7 @@
                           <a:ea typeface="Arial" pitchFamily="34" charset="-122"/>
                           <a:cs typeface="Arial" pitchFamily="34" charset="-120"/>
                         </a:rPr>
-                        <a:t>9.03点</a:t>
+                        <a:t>9.06点</a:t>
                       </a:r>
                       <a:endParaRPr lang="en-US" sz="1000" dirty="0">
                         <a:latin typeface="Arial" charset="0"/>
@@ -3415,7 +3415,7 @@
                           <a:ea typeface="Arial" pitchFamily="34" charset="-122"/>
                           <a:cs typeface="Arial" pitchFamily="34" charset="-120"/>
                         </a:rPr>
-                        <a:t>9.2点以上</a:t>
+                        <a:t>9.3点以上</a:t>
                       </a:r>
                       <a:endParaRPr lang="en-US" sz="1000" dirty="0">
                         <a:latin typeface="Arial" charset="0"/>
@@ -3621,7 +3621,7 @@
                           <a:ea typeface="Arial" pitchFamily="34" charset="-122"/>
                           <a:cs typeface="Arial" pitchFamily="34" charset="-120"/>
                         </a:rPr>
-                        <a:t>89.7%</a:t>
+                        <a:t>90.1%</a:t>
                       </a:r>
                       <a:endParaRPr lang="en-US" sz="1000" dirty="0">
                         <a:latin typeface="Arial" charset="0"/>
@@ -3689,7 +3689,7 @@
                           <a:ea typeface="Arial" pitchFamily="34" charset="-122"/>
                           <a:cs typeface="Arial" pitchFamily="34" charset="-120"/>
                         </a:rPr>
-                        <a:t>95%以上</a:t>
+                        <a:t>92%以上</a:t>
                       </a:r>
                       <a:endParaRPr lang="en-US" sz="1000" dirty="0">
                         <a:latin typeface="Arial" charset="0"/>
@@ -3895,7 +3895,7 @@
                           <a:ea typeface="Arial" pitchFamily="34" charset="-122"/>
                           <a:cs typeface="Arial" pitchFamily="34" charset="-120"/>
                         </a:rPr>
-                        <a:t>2.1%</a:t>
+                        <a:t>2.0%</a:t>
                       </a:r>
                       <a:endParaRPr lang="en-US" sz="1000" dirty="0">
                         <a:latin typeface="Arial" charset="0"/>
@@ -3963,7 +3963,7 @@
                           <a:ea typeface="Arial" pitchFamily="34" charset="-122"/>
                           <a:cs typeface="Arial" pitchFamily="34" charset="-120"/>
                         </a:rPr>
-                        <a:t>0%以下</a:t>
+                        <a:t>0%維持</a:t>
                       </a:r>
                       <a:endParaRPr lang="en-US" sz="1000" dirty="0">
                         <a:latin typeface="Arial" charset="0"/>
@@ -5356,7 +5356,7 @@
                 <a:ea typeface="Arial" pitchFamily="34" charset="-122"/>
                 <a:cs typeface="Arial" pitchFamily="34" charset="-120"/>
               </a:rPr>
-              <a:t>9.03</a:t>
+              <a:t>9.06</a:t>
             </a:r>
             <a:endParaRPr lang="en-US" sz="3200" dirty="0"/>
           </a:p>
@@ -5481,7 +5481,7 @@
                 <a:ea typeface="Arial" pitchFamily="34" charset="-122"/>
                 <a:cs typeface="Arial" pitchFamily="34" charset="-120"/>
               </a:rPr>
-              <a:t>89.7%</a:t>
+              <a:t>90.1%</a:t>
             </a:r>
             <a:endParaRPr lang="en-US" sz="3200" dirty="0"/>
           </a:p>
@@ -5606,7 +5606,7 @@
                 <a:ea typeface="Arial" pitchFamily="34" charset="-122"/>
                 <a:cs typeface="Arial" pitchFamily="34" charset="-120"/>
               </a:rPr>
-              <a:t>2.1%</a:t>
+              <a:t>2.0%</a:t>
             </a:r>
             <a:endParaRPr lang="en-US" sz="3200" dirty="0"/>
           </a:p>
@@ -5731,7 +5731,7 @@
                 <a:ea typeface="Arial" pitchFamily="34" charset="-122"/>
                 <a:cs typeface="Arial" pitchFamily="34" charset="-120"/>
               </a:rPr>
-              <a:t>97件</a:t>
+              <a:t>101件</a:t>
             </a:r>
             <a:endParaRPr lang="en-US" sz="3200" dirty="0"/>
           </a:p>
@@ -5879,7 +5879,7 @@
                 <a:ea typeface="Arial" pitchFamily="34" charset="-122"/>
                 <a:cs typeface="Arial" pitchFamily="34" charset="-120"/>
               </a:rPr>
-              <a:t>  地點好 服務好 有吸煙室 便利商店就在樓下 立地も良く、サービスも良く、喫煙室もあり、階下にはコンビニもあります</a:t>
+              <a:t>  ที่พักเดินทางสะดวกใกล้สถานีรถไฟ jr และ subway  แถวโรงแรมม...</a:t>
             </a:r>
             <a:endParaRPr lang="en-US" sz="1100" dirty="0"/>
           </a:p>
@@ -5919,7 +5919,7 @@
                 <a:ea typeface="Arial" pitchFamily="34" charset="-122"/>
                 <a:cs typeface="Arial" pitchFamily="34" charset="-120"/>
               </a:rPr>
-              <a:t>  地點好 服務好 有吸煙室 便利商店就在樓下 立地も良く、サービスも良く、喫煙室もあり、階下にはコンビニもあります</a:t>
+              <a:t>  ホテルの周辺には多くのレストランがあり、ファミリーマートやセブンイレブンもすぐ近くにあります</a:t>
             </a:r>
             <a:endParaRPr lang="en-US" sz="1100" dirty="0"/>
           </a:p>
@@ -6540,7 +6540,7 @@
                 <a:ea typeface="Arial" pitchFamily="34" charset="-122"/>
                 <a:cs typeface="Arial" pitchFamily="34" charset="-120"/>
               </a:rPr>
-              <a:t>9.03</a:t>
+              <a:t>9.06</a:t>
             </a:r>
             <a:endParaRPr lang="en-US" sz="3200" dirty="0"/>
           </a:p>
@@ -6665,7 +6665,7 @@
                 <a:ea typeface="Arial" pitchFamily="34" charset="-122"/>
                 <a:cs typeface="Arial" pitchFamily="34" charset="-120"/>
               </a:rPr>
-              <a:t>89.7%</a:t>
+              <a:t>90.1%</a:t>
             </a:r>
             <a:endParaRPr lang="en-US" sz="3200" dirty="0"/>
           </a:p>
@@ -6790,7 +6790,7 @@
                 <a:ea typeface="Arial" pitchFamily="34" charset="-122"/>
                 <a:cs typeface="Arial" pitchFamily="34" charset="-120"/>
               </a:rPr>
-              <a:t>2.1%</a:t>
+              <a:t>2.0%</a:t>
             </a:r>
             <a:endParaRPr lang="en-US" sz="3200" dirty="0"/>
           </a:p>
@@ -6915,7 +6915,7 @@
                 <a:ea typeface="Arial" pitchFamily="34" charset="-122"/>
                 <a:cs typeface="Arial" pitchFamily="34" charset="-120"/>
               </a:rPr>
-              <a:t>97件</a:t>
+              <a:t>101件</a:t>
             </a:r>
             <a:endParaRPr lang="en-US" sz="3200" dirty="0"/>
           </a:p>
@@ -7336,7 +7336,7 @@
                 <a:ea typeface="Arial" pitchFamily="34" charset="-122"/>
                 <a:cs typeface="Arial" pitchFamily="34" charset="-120"/>
               </a:rPr>
-              <a:t>Trip.com(9.46)が最高スコア。</a:t>
+              <a:t>Trip.com(9.48)が最高スコア。</a:t>
             </a:r>
             <a:endParaRPr lang="en-US" sz="1100" dirty="0"/>
           </a:p>
@@ -7894,7 +7894,7 @@
                           <a:ea typeface="Arial" pitchFamily="34" charset="-122"/>
                           <a:cs typeface="Arial" pitchFamily="34" charset="-120"/>
                         </a:rPr>
-                        <a:t>48</a:t>
+                        <a:t>50</a:t>
                       </a:r>
                       <a:endParaRPr lang="en-US" sz="900" dirty="0">
                         <a:latin typeface="Arial" charset="0"/>
@@ -7962,7 +7962,7 @@
                           <a:ea typeface="Arial" pitchFamily="34" charset="-122"/>
                           <a:cs typeface="Arial" pitchFamily="34" charset="-120"/>
                         </a:rPr>
-                        <a:t>9.46</a:t>
+                        <a:t>9.48</a:t>
                       </a:r>
                       <a:endParaRPr lang="en-US" sz="900" dirty="0">
                         <a:latin typeface="Arial" charset="0"/>
@@ -8098,7 +8098,7 @@
                           <a:ea typeface="Arial" pitchFamily="34" charset="-122"/>
                           <a:cs typeface="Arial" pitchFamily="34" charset="-120"/>
                         </a:rPr>
-                        <a:t>9.46</a:t>
+                        <a:t>9.48</a:t>
                       </a:r>
                       <a:endParaRPr lang="en-US" sz="900" dirty="0">
                         <a:latin typeface="Arial" charset="0"/>
@@ -8236,7 +8236,7 @@
                           <a:ea typeface="Arial" pitchFamily="34" charset="-122"/>
                           <a:cs typeface="Arial" pitchFamily="34" charset="-120"/>
                         </a:rPr>
-                        <a:t>25</a:t>
+                        <a:t>26</a:t>
                       </a:r>
                       <a:endParaRPr lang="en-US" sz="900" dirty="0">
                         <a:latin typeface="Arial" charset="0"/>
@@ -8304,7 +8304,7 @@
                           <a:ea typeface="Arial" pitchFamily="34" charset="-122"/>
                           <a:cs typeface="Arial" pitchFamily="34" charset="-120"/>
                         </a:rPr>
-                        <a:t>4.6</a:t>
+                        <a:t>4.62</a:t>
                       </a:r>
                       <a:endParaRPr lang="en-US" sz="900" dirty="0">
                         <a:latin typeface="Arial" charset="0"/>
@@ -8440,7 +8440,7 @@
                           <a:ea typeface="Arial" pitchFamily="34" charset="-122"/>
                           <a:cs typeface="Arial" pitchFamily="34" charset="-120"/>
                         </a:rPr>
-                        <a:t>9.2</a:t>
+                        <a:t>9.23</a:t>
                       </a:r>
                       <a:endParaRPr lang="en-US" sz="900" dirty="0">
                         <a:latin typeface="Arial" charset="0"/>
@@ -8578,7 +8578,7 @@
                           <a:ea typeface="Arial" pitchFamily="34" charset="-122"/>
                           <a:cs typeface="Arial" pitchFamily="34" charset="-120"/>
                         </a:rPr>
-                        <a:t>16</a:t>
+                        <a:t>17</a:t>
                       </a:r>
                       <a:endParaRPr lang="en-US" sz="900" dirty="0">
                         <a:latin typeface="Arial" charset="0"/>
@@ -8646,7 +8646,7 @@
                           <a:ea typeface="Arial" pitchFamily="34" charset="-122"/>
                           <a:cs typeface="Arial" pitchFamily="34" charset="-120"/>
                         </a:rPr>
-                        <a:t>8.62</a:t>
+                        <a:t>8.65</a:t>
                       </a:r>
                       <a:endParaRPr lang="en-US" sz="900" dirty="0">
                         <a:latin typeface="Arial" charset="0"/>
@@ -8782,7 +8782,7 @@
                           <a:ea typeface="Arial" pitchFamily="34" charset="-122"/>
                           <a:cs typeface="Arial" pitchFamily="34" charset="-120"/>
                         </a:rPr>
-                        <a:t>8.62</a:t>
+                        <a:t>8.65</a:t>
                       </a:r>
                       <a:endParaRPr lang="en-US" sz="900" dirty="0">
                         <a:latin typeface="Arial" charset="0"/>
@@ -10216,7 +10216,7 @@
                 <a:ea typeface="Arial" pitchFamily="34" charset="-122"/>
                 <a:cs typeface="Arial" pitchFamily="34" charset="-120"/>
               </a:rPr>
-              <a:t>87件（89.7%）</a:t>
+              <a:t>91件（90.1%）</a:t>
             </a:r>
             <a:endParaRPr lang="en-US" sz="1100" dirty="0"/>
           </a:p>
@@ -10314,7 +10314,7 @@
                 <a:ea typeface="Arial" pitchFamily="34" charset="-122"/>
                 <a:cs typeface="Arial" pitchFamily="34" charset="-120"/>
               </a:rPr>
-              <a:t>8件（8.2%）</a:t>
+              <a:t>8件（7.9%）</a:t>
             </a:r>
             <a:endParaRPr lang="en-US" sz="1100" dirty="0"/>
           </a:p>
@@ -10412,7 +10412,7 @@
                 <a:ea typeface="Arial" pitchFamily="34" charset="-122"/>
                 <a:cs typeface="Arial" pitchFamily="34" charset="-120"/>
               </a:rPr>
-              <a:t>2件（2.1%）</a:t>
+              <a:t>2件（2.0%）</a:t>
             </a:r>
             <a:endParaRPr lang="en-US" sz="1100" dirty="0"/>
           </a:p>
@@ -10824,7 +10824,7 @@
                 <a:ea typeface="Arial" pitchFamily="34" charset="-122"/>
                 <a:cs typeface="Arial" pitchFamily="34" charset="-120"/>
               </a:rPr>
-              <a:t>地點好 服務好 有吸煙室 便利商店就在樓下 立地も良く、サービスも良く、喫煙室もあり、階下にはコンビニもあります</a:t>
+              <a:t>ที่พักเดินทางสะดวกใกล้สถานีรถไฟ jr และ subway  แถวโรงแรมม...</a:t>
             </a:r>
             <a:endParaRPr lang="en-US" sz="900" dirty="0"/>
           </a:p>
@@ -10863,7 +10863,7 @@
                 <a:ea typeface="Arial" pitchFamily="34" charset="-122"/>
                 <a:cs typeface="Arial" pitchFamily="34" charset="-120"/>
               </a:rPr>
-              <a:t>「樓上有便利店及食店 立地はJR駅近くでとても便利です」</a:t>
+              <a:t>「居心地が良く清潔で、池袋という便利な場所にあり、地下鉄で東京ハリー・ポッターエリアへも簡単にアクセスできました」</a:t>
             </a:r>
             <a:endParaRPr lang="en-US" sz="900" dirty="0"/>
           </a:p>
@@ -11047,7 +11047,7 @@
                 <a:ea typeface="Arial" pitchFamily="34" charset="-122"/>
                 <a:cs typeface="Arial" pitchFamily="34" charset="-120"/>
               </a:rPr>
-              <a:t>地點好 服務好 有吸煙室 便利商店就在樓下 立地も良く、サービスも良く、喫煙室もあり、階下にはコンビニもあります</a:t>
+              <a:t>ホテルの周辺には多くのレストランがあり、ファミリーマートやセブンイレブンもすぐ近くにあります</a:t>
             </a:r>
             <a:endParaRPr lang="en-US" sz="900" dirty="0"/>
           </a:p>
@@ -11086,7 +11086,7 @@
                 <a:ea typeface="Arial" pitchFamily="34" charset="-122"/>
                 <a:cs typeface="Arial" pitchFamily="34" charset="-120"/>
               </a:rPr>
-              <a:t>「上の階にはコンビニやレストランがあります」</a:t>
+              <a:t>「階下には一蘭のラーメン店とコンビニもありました」</a:t>
             </a:r>
             <a:endParaRPr lang="en-US" sz="900" dirty="0"/>
           </a:p>
@@ -11309,7 +11309,7 @@
                 <a:ea typeface="Arial" pitchFamily="34" charset="-122"/>
                 <a:cs typeface="Arial" pitchFamily="34" charset="-120"/>
               </a:rPr>
-              <a:t>「同じタイプの部屋を1泊と3泊別々に予約したのですが、スタッフの方が部屋を変えることなく手配してくれました」</a:t>
+              <a:t>「1泊と3泊を別々に予約しましたが、スタッフの方が部屋を変えることなく対応してくれました」</a:t>
             </a:r>
             <a:endParaRPr lang="en-US" sz="900" dirty="0"/>
           </a:p>
@@ -11493,7 +11493,7 @@
                 <a:ea typeface="Arial" pitchFamily="34" charset="-122"/>
                 <a:cs typeface="Arial" pitchFamily="34" charset="-120"/>
               </a:rPr>
-              <a:t>部屋は広々としていて、バスルームも広くて清潔、ベッドは柔らかくてとても快適に眠れました</a:t>
+              <a:t>居心地が良く清潔で、池袋という便利な場所にあり、地下鉄で東京ハリー・ポッターエリアへも簡単にアクセスできました</a:t>
             </a:r>
             <a:endParaRPr lang="en-US" sz="900" dirty="0"/>
           </a:p>
@@ -11532,7 +11532,7 @@
                 <a:ea typeface="Arial" pitchFamily="34" charset="-122"/>
                 <a:cs typeface="Arial" pitchFamily="34" charset="-120"/>
               </a:rPr>
-              <a:t>「部屋は居心地が良く快適で、毎日清掃され、ミネラルウォーターも毎日2本提供されていたので、とてもありがたかったです」</a:t>
+              <a:t>「部屋は広々としていて、バスルームも広くて清潔、ベッドは柔らかくてとても快適に眠れました」</a:t>
             </a:r>
             <a:endParaRPr lang="en-US" sz="900" dirty="0"/>
           </a:p>
@@ -11716,7 +11716,7 @@
                 <a:ea typeface="Arial" pitchFamily="34" charset="-122"/>
                 <a:cs typeface="Arial" pitchFamily="34" charset="-120"/>
               </a:rPr>
-              <a:t>房間三张床也宽阔 部屋は広々としており、ベッドが3台あります</a:t>
+              <a:t>房間挺大的，有四張床，每張床還挺大，房間温馨且衞生，地處池袋去東京哈利波特園區可地鐵直達也很方便，樓下就是一蘭拉麪...</a:t>
             </a:r>
             <a:endParaRPr lang="en-US" sz="900" dirty="0"/>
           </a:p>
@@ -11755,7 +11755,7 @@
                 <a:ea typeface="Arial" pitchFamily="34" charset="-122"/>
                 <a:cs typeface="Arial" pitchFamily="34" charset="-120"/>
               </a:rPr>
-              <a:t>「ห้องพักสะดวกสบายดีค่ะ หาของกินง่าย อยู่ใจกลางศูนย์การค้า ...」</a:t>
+              <a:t>「房間三张床也宽阔 部屋は広々としており、ベッドが3台あります」</a:t>
             </a:r>
             <a:endParaRPr lang="en-US" sz="900" dirty="0"/>
           </a:p>

--- a/納品レポート/ホテル別レポート/daiichi_ikebukuro_口コミ分析レポート.pptx
+++ b/納品レポート/ホテル別レポート/daiichi_ikebukuro_口コミ分析レポート.pptx
@@ -208,13 +208,13 @@
                 <c:formatCode>General</c:formatCode>
                 <c:ptCount val="6"/>
                 <c:pt idx="0">
-                  <c:v>9.48</c:v>
+                  <c:v>9.49</c:v>
                 </c:pt>
                 <c:pt idx="1">
-                  <c:v>9.23</c:v>
+                  <c:v>9.26</c:v>
                 </c:pt>
                 <c:pt idx="2">
-                  <c:v>8.65</c:v>
+                  <c:v>8.68</c:v>
                 </c:pt>
                 <c:pt idx="3">
                   <c:v>8</c:v>
@@ -566,7 +566,7 @@
               <c:numCache>
                 <c:ptCount val="3"/>
                 <c:pt idx="0">
-                  <c:v>91</c:v>
+                  <c:v>97</c:v>
                 </c:pt>
                 <c:pt idx="1">
                   <c:v>8</c:v>
@@ -809,13 +809,13 @@
                 <c:formatCode>General</c:formatCode>
                 <c:ptCount val="8"/>
                 <c:pt idx="0">
-                  <c:v>58</c:v>
+                  <c:v>62</c:v>
                 </c:pt>
                 <c:pt idx="1">
-                  <c:v>17</c:v>
+                  <c:v>18</c:v>
                 </c:pt>
                 <c:pt idx="2">
-                  <c:v>16</c:v>
+                  <c:v>17</c:v>
                 </c:pt>
                 <c:pt idx="3">
                   <c:v>3</c:v>
@@ -2781,7 +2781,7 @@
                 <a:ea typeface="Arial" pitchFamily="34" charset="-122"/>
                 <a:cs typeface="Arial" pitchFamily="34" charset="-120"/>
               </a:rPr>
-              <a:t>レビュー総数：101件（6サイト）</a:t>
+              <a:t>レビュー総数：107件（6サイト）</a:t>
             </a:r>
             <a:endParaRPr lang="en-US" sz="1000" dirty="0"/>
           </a:p>
@@ -2801,7 +2801,7 @@
                 <a:ea typeface="Arial" pitchFamily="34" charset="-122"/>
                 <a:cs typeface="Arial" pitchFamily="34" charset="-120"/>
               </a:rPr>
-              <a:t>作成日：2026年3月18日</a:t>
+              <a:t>作成日：2026年3月19日</a:t>
             </a:r>
             <a:endParaRPr lang="en-US" sz="1000" dirty="0"/>
           </a:p>
@@ -3347,7 +3347,7 @@
                           <a:ea typeface="Arial" pitchFamily="34" charset="-122"/>
                           <a:cs typeface="Arial" pitchFamily="34" charset="-120"/>
                         </a:rPr>
-                        <a:t>9.06点</a:t>
+                        <a:t>9.08点</a:t>
                       </a:r>
                       <a:endParaRPr lang="en-US" sz="1000" dirty="0">
                         <a:latin typeface="Arial" charset="0"/>
@@ -3621,7 +3621,7 @@
                           <a:ea typeface="Arial" pitchFamily="34" charset="-122"/>
                           <a:cs typeface="Arial" pitchFamily="34" charset="-120"/>
                         </a:rPr>
-                        <a:t>90.1%</a:t>
+                        <a:t>90.7%</a:t>
                       </a:r>
                       <a:endParaRPr lang="en-US" sz="1000" dirty="0">
                         <a:latin typeface="Arial" charset="0"/>
@@ -3689,7 +3689,7 @@
                           <a:ea typeface="Arial" pitchFamily="34" charset="-122"/>
                           <a:cs typeface="Arial" pitchFamily="34" charset="-120"/>
                         </a:rPr>
-                        <a:t>92%以上</a:t>
+                        <a:t>93%以上</a:t>
                       </a:r>
                       <a:endParaRPr lang="en-US" sz="1000" dirty="0">
                         <a:latin typeface="Arial" charset="0"/>
@@ -3895,7 +3895,7 @@
                           <a:ea typeface="Arial" pitchFamily="34" charset="-122"/>
                           <a:cs typeface="Arial" pitchFamily="34" charset="-120"/>
                         </a:rPr>
-                        <a:t>2.0%</a:t>
+                        <a:t>1.9%</a:t>
                       </a:r>
                       <a:endParaRPr lang="en-US" sz="1000" dirty="0">
                         <a:latin typeface="Arial" charset="0"/>
@@ -4717,7 +4717,7 @@
                           <a:ea typeface="Arial" pitchFamily="34" charset="-122"/>
                           <a:cs typeface="Arial" pitchFamily="34" charset="-120"/>
                         </a:rPr>
-                        <a:t>約12件/期間</a:t>
+                        <a:t>約13件/期間</a:t>
                       </a:r>
                       <a:endParaRPr lang="en-US" sz="1000" dirty="0">
                         <a:latin typeface="Arial" charset="0"/>
@@ -5356,7 +5356,7 @@
                 <a:ea typeface="Arial" pitchFamily="34" charset="-122"/>
                 <a:cs typeface="Arial" pitchFamily="34" charset="-120"/>
               </a:rPr>
-              <a:t>9.06</a:t>
+              <a:t>9.08</a:t>
             </a:r>
             <a:endParaRPr lang="en-US" sz="3200" dirty="0"/>
           </a:p>
@@ -5481,7 +5481,7 @@
                 <a:ea typeface="Arial" pitchFamily="34" charset="-122"/>
                 <a:cs typeface="Arial" pitchFamily="34" charset="-120"/>
               </a:rPr>
-              <a:t>90.1%</a:t>
+              <a:t>90.7%</a:t>
             </a:r>
             <a:endParaRPr lang="en-US" sz="3200" dirty="0"/>
           </a:p>
@@ -5606,7 +5606,7 @@
                 <a:ea typeface="Arial" pitchFamily="34" charset="-122"/>
                 <a:cs typeface="Arial" pitchFamily="34" charset="-120"/>
               </a:rPr>
-              <a:t>2.0%</a:t>
+              <a:t>1.9%</a:t>
             </a:r>
             <a:endParaRPr lang="en-US" sz="3200" dirty="0"/>
           </a:p>
@@ -5731,7 +5731,7 @@
                 <a:ea typeface="Arial" pitchFamily="34" charset="-122"/>
                 <a:cs typeface="Arial" pitchFamily="34" charset="-120"/>
               </a:rPr>
-              <a:t>101件</a:t>
+              <a:t>107件</a:t>
             </a:r>
             <a:endParaRPr lang="en-US" sz="3200" dirty="0"/>
           </a:p>
@@ -5879,7 +5879,7 @@
                 <a:ea typeface="Arial" pitchFamily="34" charset="-122"/>
                 <a:cs typeface="Arial" pitchFamily="34" charset="-120"/>
               </a:rPr>
-              <a:t>  ที่พักเดินทางสะดวกใกล้สถานีรถไฟ jr และ subway  แถวโรงแรมม...</a:t>
+              <a:t>  在池袋東出口非常的方便 隔壁就是一蘭拉麵 如果第一次來行李有點多不太建議 因為離出口站沒有電梯可以搭乘房間如果一個...</a:t>
             </a:r>
             <a:endParaRPr lang="en-US" sz="1100" dirty="0"/>
           </a:p>
@@ -5919,7 +5919,7 @@
                 <a:ea typeface="Arial" pitchFamily="34" charset="-122"/>
                 <a:cs typeface="Arial" pitchFamily="34" charset="-120"/>
               </a:rPr>
-              <a:t>  ホテルの周辺には多くのレストランがあり、ファミリーマートやセブンイレブンもすぐ近くにあります</a:t>
+              <a:t>  ทำเลดีมาก ใกล้ทุกอย่าง ใกล้รถไฟฟ้า แอร์พอตบัส ใกล้ร้านอาห...</a:t>
             </a:r>
             <a:endParaRPr lang="en-US" sz="1100" dirty="0"/>
           </a:p>
@@ -5959,7 +5959,7 @@
                 <a:ea typeface="Arial" pitchFamily="34" charset="-122"/>
                 <a:cs typeface="Arial" pitchFamily="34" charset="-120"/>
               </a:rPr>
-              <a:t>  地點好 服務好 有吸煙室 便利商店就在樓下 立地も良く、サービスも良く、喫煙室もあり、階下にはコンビニもあります</a:t>
+              <a:t>  ロビーのスタッフはとても丁寧で、荷物預かりサービスもあるので大変便利です</a:t>
             </a:r>
             <a:endParaRPr lang="en-US" sz="1100" dirty="0"/>
           </a:p>
@@ -6107,7 +6107,7 @@
                 <a:ea typeface="Arial" pitchFamily="34" charset="-122"/>
                 <a:cs typeface="Arial" pitchFamily="34" charset="-120"/>
               </a:rPr>
-              <a:t>  ที่พักโอเค ทำเลดี แอร์ไม่ใช่แบบรวม เริ่ดเลยล่ะ แต่เตียงแอ...</a:t>
+              <a:t>  proximité du metro, konbini au pied de l'hotel, proximité...</a:t>
             </a:r>
             <a:endParaRPr lang="en-US" sz="1100" dirty="0"/>
           </a:p>
@@ -6127,7 +6127,7 @@
                 <a:ea typeface="Arial" pitchFamily="34" charset="-122"/>
                 <a:cs typeface="Arial" pitchFamily="34" charset="-120"/>
               </a:rPr>
-              <a:t>設備の老朽化 </a:t>
+              <a:t>部屋の狭さ </a:t>
             </a:r>
             <a:endParaRPr lang="en-US" sz="1100" dirty="0"/>
           </a:p>
@@ -6147,7 +6147,7 @@
                 <a:ea typeface="Arial" pitchFamily="34" charset="-122"/>
                 <a:cs typeface="Arial" pitchFamily="34" charset="-120"/>
               </a:rPr>
-              <a:t>  部屋は古いですが、とても清潔です</a:t>
+              <a:t>  部屋は一人なら十分な広さですが、二人だと少し狭いかもしれません</a:t>
             </a:r>
             <a:endParaRPr lang="en-US" sz="1100" dirty="0"/>
           </a:p>
@@ -6167,7 +6167,7 @@
                 <a:ea typeface="Arial" pitchFamily="34" charset="-122"/>
                 <a:cs typeface="Arial" pitchFamily="34" charset="-120"/>
               </a:rPr>
-              <a:t>防音性能 </a:t>
+              <a:t>浴室・水回り </a:t>
             </a:r>
             <a:endParaRPr lang="en-US" sz="1100" dirty="0"/>
           </a:p>
@@ -6187,7 +6187,7 @@
                 <a:ea typeface="Arial" pitchFamily="34" charset="-122"/>
                 <a:cs typeface="Arial" pitchFamily="34" charset="-120"/>
               </a:rPr>
-              <a:t>  夜はそんなに騒々しいとは思いませんでしたが、電車の音が小さく聞こえることは残念でした</a:t>
+              <a:t>  ทำเลดีมาก ใกล้ทุกอย่าง ใกล้รถไฟฟ้า แอร์พอตบัส ใกล้ร้านอาห...</a:t>
             </a:r>
             <a:endParaRPr lang="en-US" sz="1100" dirty="0"/>
           </a:p>
@@ -6540,7 +6540,7 @@
                 <a:ea typeface="Arial" pitchFamily="34" charset="-122"/>
                 <a:cs typeface="Arial" pitchFamily="34" charset="-120"/>
               </a:rPr>
-              <a:t>9.06</a:t>
+              <a:t>9.08</a:t>
             </a:r>
             <a:endParaRPr lang="en-US" sz="3200" dirty="0"/>
           </a:p>
@@ -6665,7 +6665,7 @@
                 <a:ea typeface="Arial" pitchFamily="34" charset="-122"/>
                 <a:cs typeface="Arial" pitchFamily="34" charset="-120"/>
               </a:rPr>
-              <a:t>90.1%</a:t>
+              <a:t>90.7%</a:t>
             </a:r>
             <a:endParaRPr lang="en-US" sz="3200" dirty="0"/>
           </a:p>
@@ -6790,7 +6790,7 @@
                 <a:ea typeface="Arial" pitchFamily="34" charset="-122"/>
                 <a:cs typeface="Arial" pitchFamily="34" charset="-120"/>
               </a:rPr>
-              <a:t>2.0%</a:t>
+              <a:t>1.9%</a:t>
             </a:r>
             <a:endParaRPr lang="en-US" sz="3200" dirty="0"/>
           </a:p>
@@ -6915,7 +6915,7 @@
                 <a:ea typeface="Arial" pitchFamily="34" charset="-122"/>
                 <a:cs typeface="Arial" pitchFamily="34" charset="-120"/>
               </a:rPr>
-              <a:t>101件</a:t>
+              <a:t>107件</a:t>
             </a:r>
             <a:endParaRPr lang="en-US" sz="3200" dirty="0"/>
           </a:p>
@@ -7336,7 +7336,7 @@
                 <a:ea typeface="Arial" pitchFamily="34" charset="-122"/>
                 <a:cs typeface="Arial" pitchFamily="34" charset="-120"/>
               </a:rPr>
-              <a:t>Trip.com(9.48)が最高スコア。</a:t>
+              <a:t>Trip.com(9.49)が最高スコア。</a:t>
             </a:r>
             <a:endParaRPr lang="en-US" sz="1100" dirty="0"/>
           </a:p>
@@ -7894,7 +7894,7 @@
                           <a:ea typeface="Arial" pitchFamily="34" charset="-122"/>
                           <a:cs typeface="Arial" pitchFamily="34" charset="-120"/>
                         </a:rPr>
-                        <a:t>50</a:t>
+                        <a:t>53</a:t>
                       </a:r>
                       <a:endParaRPr lang="en-US" sz="900" dirty="0">
                         <a:latin typeface="Arial" charset="0"/>
@@ -7962,7 +7962,7 @@
                           <a:ea typeface="Arial" pitchFamily="34" charset="-122"/>
                           <a:cs typeface="Arial" pitchFamily="34" charset="-120"/>
                         </a:rPr>
-                        <a:t>9.48</a:t>
+                        <a:t>9.49</a:t>
                       </a:r>
                       <a:endParaRPr lang="en-US" sz="900" dirty="0">
                         <a:latin typeface="Arial" charset="0"/>
@@ -8098,7 +8098,7 @@
                           <a:ea typeface="Arial" pitchFamily="34" charset="-122"/>
                           <a:cs typeface="Arial" pitchFamily="34" charset="-120"/>
                         </a:rPr>
-                        <a:t>9.48</a:t>
+                        <a:t>9.49</a:t>
                       </a:r>
                       <a:endParaRPr lang="en-US" sz="900" dirty="0">
                         <a:latin typeface="Arial" charset="0"/>
@@ -8236,7 +8236,7 @@
                           <a:ea typeface="Arial" pitchFamily="34" charset="-122"/>
                           <a:cs typeface="Arial" pitchFamily="34" charset="-120"/>
                         </a:rPr>
-                        <a:t>26</a:t>
+                        <a:t>27</a:t>
                       </a:r>
                       <a:endParaRPr lang="en-US" sz="900" dirty="0">
                         <a:latin typeface="Arial" charset="0"/>
@@ -8304,7 +8304,7 @@
                           <a:ea typeface="Arial" pitchFamily="34" charset="-122"/>
                           <a:cs typeface="Arial" pitchFamily="34" charset="-120"/>
                         </a:rPr>
-                        <a:t>4.62</a:t>
+                        <a:t>4.63</a:t>
                       </a:r>
                       <a:endParaRPr lang="en-US" sz="900" dirty="0">
                         <a:latin typeface="Arial" charset="0"/>
@@ -8440,7 +8440,7 @@
                           <a:ea typeface="Arial" pitchFamily="34" charset="-122"/>
                           <a:cs typeface="Arial" pitchFamily="34" charset="-120"/>
                         </a:rPr>
-                        <a:t>9.23</a:t>
+                        <a:t>9.26</a:t>
                       </a:r>
                       <a:endParaRPr lang="en-US" sz="900" dirty="0">
                         <a:latin typeface="Arial" charset="0"/>
@@ -8578,7 +8578,7 @@
                           <a:ea typeface="Arial" pitchFamily="34" charset="-122"/>
                           <a:cs typeface="Arial" pitchFamily="34" charset="-120"/>
                         </a:rPr>
-                        <a:t>17</a:t>
+                        <a:t>19</a:t>
                       </a:r>
                       <a:endParaRPr lang="en-US" sz="900" dirty="0">
                         <a:latin typeface="Arial" charset="0"/>
@@ -8646,7 +8646,7 @@
                           <a:ea typeface="Arial" pitchFamily="34" charset="-122"/>
                           <a:cs typeface="Arial" pitchFamily="34" charset="-120"/>
                         </a:rPr>
-                        <a:t>8.65</a:t>
+                        <a:t>8.68</a:t>
                       </a:r>
                       <a:endParaRPr lang="en-US" sz="900" dirty="0">
                         <a:latin typeface="Arial" charset="0"/>
@@ -8782,7 +8782,7 @@
                           <a:ea typeface="Arial" pitchFamily="34" charset="-122"/>
                           <a:cs typeface="Arial" pitchFamily="34" charset="-120"/>
                         </a:rPr>
-                        <a:t>8.65</a:t>
+                        <a:t>8.68</a:t>
                       </a:r>
                       <a:endParaRPr lang="en-US" sz="900" dirty="0">
                         <a:latin typeface="Arial" charset="0"/>
@@ -10216,7 +10216,7 @@
                 <a:ea typeface="Arial" pitchFamily="34" charset="-122"/>
                 <a:cs typeface="Arial" pitchFamily="34" charset="-120"/>
               </a:rPr>
-              <a:t>91件（90.1%）</a:t>
+              <a:t>97件（90.7%）</a:t>
             </a:r>
             <a:endParaRPr lang="en-US" sz="1100" dirty="0"/>
           </a:p>
@@ -10314,7 +10314,7 @@
                 <a:ea typeface="Arial" pitchFamily="34" charset="-122"/>
                 <a:cs typeface="Arial" pitchFamily="34" charset="-120"/>
               </a:rPr>
-              <a:t>8件（7.9%）</a:t>
+              <a:t>8件（7.5%）</a:t>
             </a:r>
             <a:endParaRPr lang="en-US" sz="1100" dirty="0"/>
           </a:p>
@@ -10412,7 +10412,7 @@
                 <a:ea typeface="Arial" pitchFamily="34" charset="-122"/>
                 <a:cs typeface="Arial" pitchFamily="34" charset="-120"/>
               </a:rPr>
-              <a:t>2件（2.0%）</a:t>
+              <a:t>2件（1.9%）</a:t>
             </a:r>
             <a:endParaRPr lang="en-US" sz="1100" dirty="0"/>
           </a:p>
@@ -10824,7 +10824,7 @@
                 <a:ea typeface="Arial" pitchFamily="34" charset="-122"/>
                 <a:cs typeface="Arial" pitchFamily="34" charset="-120"/>
               </a:rPr>
-              <a:t>ที่พักเดินทางสะดวกใกล้สถานีรถไฟ jr และ subway  แถวโรงแรมม...</a:t>
+              <a:t>在池袋東出口非常的方便 隔壁就是一蘭拉麵 如果第一次來行李有點多不太建議 因為離出口站沒有電梯可以搭乘房間如果一個...</a:t>
             </a:r>
             <a:endParaRPr lang="en-US" sz="900" dirty="0"/>
           </a:p>
@@ -10839,6 +10839,675 @@
         <p:spPr>
           <a:xfrm>
             <a:off x="594360" y="1828800"/>
+            <a:ext cx="2377440" cy="640080"/>
+          </a:xfrm>
+          <a:prstGeom prst="rect">
+            <a:avLst/>
+          </a:prstGeom>
+          <a:noFill/>
+          <a:ln/>
+        </p:spPr>
+        <p:txBody>
+          <a:bodyPr wrap="square" lIns="0" tIns="0" rIns="0" bIns="0" rtlCol="0" anchor="ctr"/>
+          <a:lstStyle/>
+          <a:p>
+            <a:pPr indent="0" marL="0">
+              <a:buNone/>
+            </a:pPr>
+            <a:r>
+              <a:rPr lang="en-US" sz="900" i="1" dirty="0">
+                <a:solidFill>
+                  <a:srgbClr val="3B7DD8"/>
+                </a:solidFill>
+                <a:latin typeface="Arial" pitchFamily="34" charset="0"/>
+                <a:ea typeface="Arial" pitchFamily="34" charset="-122"/>
+                <a:cs typeface="Arial" pitchFamily="34" charset="-120"/>
+              </a:rPr>
+              <a:t>「proximité du metro, konbini au pied de l'hotel, proximité...」</a:t>
+            </a:r>
+            <a:endParaRPr lang="en-US" sz="900" dirty="0"/>
+          </a:p>
+        </p:txBody>
+      </p:sp>
+      <p:sp>
+        <p:nvSpPr>
+          <p:cNvPr id="12" name="Shape 10"/>
+          <p:cNvSpPr/>
+          <p:nvPr/>
+        </p:nvSpPr>
+        <p:spPr>
+          <a:xfrm>
+            <a:off x="3291840" y="1051560"/>
+            <a:ext cx="2651760" cy="1600200"/>
+          </a:xfrm>
+          <a:prstGeom prst="rect">
+            <a:avLst/>
+          </a:prstGeom>
+          <a:solidFill>
+            <a:srgbClr val="FFFFFF"/>
+          </a:solidFill>
+          <a:ln/>
+          <a:effectLst>
+            <a:outerShdw sx="100000" sy="100000" kx="0" ky="0" algn="bl" rotWithShape="0" blurRad="50800" dist="25400" dir="8100000">
+              <a:srgbClr val="000000">
+                <a:alpha val="10000"/>
+              </a:srgbClr>
+            </a:outerShdw>
+          </a:effectLst>
+        </p:spPr>
+      </p:sp>
+      <p:sp>
+        <p:nvSpPr>
+          <p:cNvPr id="13" name="Shape 11"/>
+          <p:cNvSpPr/>
+          <p:nvPr/>
+        </p:nvSpPr>
+        <p:spPr>
+          <a:xfrm>
+            <a:off x="3291840" y="1051560"/>
+            <a:ext cx="54864" cy="1600200"/>
+          </a:xfrm>
+          <a:prstGeom prst="rect">
+            <a:avLst/>
+          </a:prstGeom>
+          <a:solidFill>
+            <a:srgbClr val="16A34A"/>
+          </a:solidFill>
+          <a:ln/>
+        </p:spPr>
+      </p:sp>
+      <p:sp>
+        <p:nvSpPr>
+          <p:cNvPr id="14" name="Shape 12"/>
+          <p:cNvSpPr/>
+          <p:nvPr/>
+        </p:nvSpPr>
+        <p:spPr>
+          <a:xfrm>
+            <a:off x="5120640" y="1124712"/>
+            <a:ext cx="658368" cy="228600"/>
+          </a:xfrm>
+          <a:prstGeom prst="rect">
+            <a:avLst/>
+          </a:prstGeom>
+          <a:solidFill>
+            <a:srgbClr val="DCFCE7"/>
+          </a:solidFill>
+          <a:ln/>
+        </p:spPr>
+      </p:sp>
+      <p:sp>
+        <p:nvSpPr>
+          <p:cNvPr id="15" name="Text 13"/>
+          <p:cNvSpPr/>
+          <p:nvPr/>
+        </p:nvSpPr>
+        <p:spPr>
+          <a:xfrm>
+            <a:off x="5120640" y="1124712"/>
+            <a:ext cx="658368" cy="228600"/>
+          </a:xfrm>
+          <a:prstGeom prst="rect">
+            <a:avLst/>
+          </a:prstGeom>
+          <a:noFill/>
+          <a:ln/>
+        </p:spPr>
+        <p:txBody>
+          <a:bodyPr wrap="square" lIns="0" tIns="0" rIns="0" bIns="0" rtlCol="0" anchor="ctr"/>
+          <a:lstStyle/>
+          <a:p>
+            <a:pPr algn="ctr" indent="0" marL="0">
+              <a:buNone/>
+            </a:pPr>
+            <a:r>
+              <a:rPr lang="en-US" sz="900" b="1" dirty="0">
+                <a:solidFill>
+                  <a:srgbClr val="16A34A"/>
+                </a:solidFill>
+                <a:latin typeface="Arial" pitchFamily="34" charset="0"/>
+                <a:ea typeface="Arial" pitchFamily="34" charset="-122"/>
+                <a:cs typeface="Arial" pitchFamily="34" charset="-120"/>
+              </a:rPr>
+              <a:t>20件+</a:t>
+            </a:r>
+            <a:endParaRPr lang="en-US" sz="900" dirty="0"/>
+          </a:p>
+        </p:txBody>
+      </p:sp>
+      <p:sp>
+        <p:nvSpPr>
+          <p:cNvPr id="16" name="Text 14"/>
+          <p:cNvSpPr/>
+          <p:nvPr/>
+        </p:nvSpPr>
+        <p:spPr>
+          <a:xfrm>
+            <a:off x="3429000" y="1124712"/>
+            <a:ext cx="1645920" cy="274320"/>
+          </a:xfrm>
+          <a:prstGeom prst="rect">
+            <a:avLst/>
+          </a:prstGeom>
+          <a:noFill/>
+          <a:ln/>
+        </p:spPr>
+        <p:txBody>
+          <a:bodyPr wrap="square" lIns="0" tIns="0" rIns="0" bIns="0" rtlCol="0" anchor="ctr"/>
+          <a:lstStyle/>
+          <a:p>
+            <a:pPr indent="0" marL="0">
+              <a:buNone/>
+            </a:pPr>
+            <a:r>
+              <a:rPr lang="en-US" sz="1300" b="1" dirty="0">
+                <a:solidFill>
+                  <a:srgbClr val="1A2744"/>
+                </a:solidFill>
+                <a:latin typeface="Arial" pitchFamily="34" charset="0"/>
+                <a:ea typeface="Arial" pitchFamily="34" charset="-122"/>
+                <a:cs typeface="Arial" pitchFamily="34" charset="-120"/>
+              </a:rPr>
+              <a:t>コンビニ・周辺施設</a:t>
+            </a:r>
+            <a:endParaRPr lang="en-US" sz="1300" dirty="0"/>
+          </a:p>
+        </p:txBody>
+      </p:sp>
+      <p:sp>
+        <p:nvSpPr>
+          <p:cNvPr id="17" name="Text 15"/>
+          <p:cNvSpPr/>
+          <p:nvPr/>
+        </p:nvSpPr>
+        <p:spPr>
+          <a:xfrm>
+            <a:off x="3429000" y="1417320"/>
+            <a:ext cx="2377440" cy="365760"/>
+          </a:xfrm>
+          <a:prstGeom prst="rect">
+            <a:avLst/>
+          </a:prstGeom>
+          <a:noFill/>
+          <a:ln/>
+        </p:spPr>
+        <p:txBody>
+          <a:bodyPr wrap="square" lIns="0" tIns="0" rIns="0" bIns="0" rtlCol="0" anchor="ctr"/>
+          <a:lstStyle/>
+          <a:p>
+            <a:pPr indent="0" marL="0">
+              <a:buNone/>
+            </a:pPr>
+            <a:r>
+              <a:rPr lang="en-US" sz="900" dirty="0">
+                <a:solidFill>
+                  <a:srgbClr val="64748B"/>
+                </a:solidFill>
+                <a:latin typeface="Arial" pitchFamily="34" charset="0"/>
+                <a:ea typeface="Arial" pitchFamily="34" charset="-122"/>
+                <a:cs typeface="Arial" pitchFamily="34" charset="-120"/>
+              </a:rPr>
+              <a:t>ทำเลดีมาก ใกล้ทุกอย่าง ใกล้รถไฟฟ้า แอร์พอตบัส ใกล้ร้านอาห...</a:t>
+            </a:r>
+            <a:endParaRPr lang="en-US" sz="900" dirty="0"/>
+          </a:p>
+        </p:txBody>
+      </p:sp>
+      <p:sp>
+        <p:nvSpPr>
+          <p:cNvPr id="18" name="Text 16"/>
+          <p:cNvSpPr/>
+          <p:nvPr/>
+        </p:nvSpPr>
+        <p:spPr>
+          <a:xfrm>
+            <a:off x="3429000" y="1828800"/>
+            <a:ext cx="2377440" cy="640080"/>
+          </a:xfrm>
+          <a:prstGeom prst="rect">
+            <a:avLst/>
+          </a:prstGeom>
+          <a:noFill/>
+          <a:ln/>
+        </p:spPr>
+        <p:txBody>
+          <a:bodyPr wrap="square" lIns="0" tIns="0" rIns="0" bIns="0" rtlCol="0" anchor="ctr"/>
+          <a:lstStyle/>
+          <a:p>
+            <a:pPr indent="0" marL="0">
+              <a:buNone/>
+            </a:pPr>
+            <a:r>
+              <a:rPr lang="en-US" sz="900" i="1" dirty="0">
+                <a:solidFill>
+                  <a:srgbClr val="3B7DD8"/>
+                </a:solidFill>
+                <a:latin typeface="Arial" pitchFamily="34" charset="0"/>
+                <a:ea typeface="Arial" pitchFamily="34" charset="-122"/>
+                <a:cs typeface="Arial" pitchFamily="34" charset="-120"/>
+              </a:rPr>
+              <a:t>「ホテルの周辺には多くのレストランがあり、ファミリーマートやセブンイレブンもすぐ近くにあります」</a:t>
+            </a:r>
+            <a:endParaRPr lang="en-US" sz="900" dirty="0"/>
+          </a:p>
+        </p:txBody>
+      </p:sp>
+      <p:sp>
+        <p:nvSpPr>
+          <p:cNvPr id="19" name="Shape 17"/>
+          <p:cNvSpPr/>
+          <p:nvPr/>
+        </p:nvSpPr>
+        <p:spPr>
+          <a:xfrm>
+            <a:off x="6126480" y="1051560"/>
+            <a:ext cx="2651760" cy="1600200"/>
+          </a:xfrm>
+          <a:prstGeom prst="rect">
+            <a:avLst/>
+          </a:prstGeom>
+          <a:solidFill>
+            <a:srgbClr val="FFFFFF"/>
+          </a:solidFill>
+          <a:ln/>
+          <a:effectLst>
+            <a:outerShdw sx="100000" sy="100000" kx="0" ky="0" algn="bl" rotWithShape="0" blurRad="50800" dist="25400" dir="8100000">
+              <a:srgbClr val="000000">
+                <a:alpha val="10000"/>
+              </a:srgbClr>
+            </a:outerShdw>
+          </a:effectLst>
+        </p:spPr>
+      </p:sp>
+      <p:sp>
+        <p:nvSpPr>
+          <p:cNvPr id="20" name="Shape 18"/>
+          <p:cNvSpPr/>
+          <p:nvPr/>
+        </p:nvSpPr>
+        <p:spPr>
+          <a:xfrm>
+            <a:off x="6126480" y="1051560"/>
+            <a:ext cx="54864" cy="1600200"/>
+          </a:xfrm>
+          <a:prstGeom prst="rect">
+            <a:avLst/>
+          </a:prstGeom>
+          <a:solidFill>
+            <a:srgbClr val="16A34A"/>
+          </a:solidFill>
+          <a:ln/>
+        </p:spPr>
+      </p:sp>
+      <p:sp>
+        <p:nvSpPr>
+          <p:cNvPr id="21" name="Shape 19"/>
+          <p:cNvSpPr/>
+          <p:nvPr/>
+        </p:nvSpPr>
+        <p:spPr>
+          <a:xfrm>
+            <a:off x="7955280" y="1124712"/>
+            <a:ext cx="658368" cy="228600"/>
+          </a:xfrm>
+          <a:prstGeom prst="rect">
+            <a:avLst/>
+          </a:prstGeom>
+          <a:solidFill>
+            <a:srgbClr val="DCFCE7"/>
+          </a:solidFill>
+          <a:ln/>
+        </p:spPr>
+      </p:sp>
+      <p:sp>
+        <p:nvSpPr>
+          <p:cNvPr id="22" name="Text 20"/>
+          <p:cNvSpPr/>
+          <p:nvPr/>
+        </p:nvSpPr>
+        <p:spPr>
+          <a:xfrm>
+            <a:off x="7955280" y="1124712"/>
+            <a:ext cx="658368" cy="228600"/>
+          </a:xfrm>
+          <a:prstGeom prst="rect">
+            <a:avLst/>
+          </a:prstGeom>
+          <a:noFill/>
+          <a:ln/>
+        </p:spPr>
+        <p:txBody>
+          <a:bodyPr wrap="square" lIns="0" tIns="0" rIns="0" bIns="0" rtlCol="0" anchor="ctr"/>
+          <a:lstStyle/>
+          <a:p>
+            <a:pPr algn="ctr" indent="0" marL="0">
+              <a:buNone/>
+            </a:pPr>
+            <a:r>
+              <a:rPr lang="en-US" sz="900" b="1" dirty="0">
+                <a:solidFill>
+                  <a:srgbClr val="16A34A"/>
+                </a:solidFill>
+                <a:latin typeface="Arial" pitchFamily="34" charset="0"/>
+                <a:ea typeface="Arial" pitchFamily="34" charset="-122"/>
+                <a:cs typeface="Arial" pitchFamily="34" charset="-120"/>
+              </a:rPr>
+              <a:t>20件+</a:t>
+            </a:r>
+            <a:endParaRPr lang="en-US" sz="900" dirty="0"/>
+          </a:p>
+        </p:txBody>
+      </p:sp>
+      <p:sp>
+        <p:nvSpPr>
+          <p:cNvPr id="23" name="Text 21"/>
+          <p:cNvSpPr/>
+          <p:nvPr/>
+        </p:nvSpPr>
+        <p:spPr>
+          <a:xfrm>
+            <a:off x="6263640" y="1124712"/>
+            <a:ext cx="1645920" cy="274320"/>
+          </a:xfrm>
+          <a:prstGeom prst="rect">
+            <a:avLst/>
+          </a:prstGeom>
+          <a:noFill/>
+          <a:ln/>
+        </p:spPr>
+        <p:txBody>
+          <a:bodyPr wrap="square" lIns="0" tIns="0" rIns="0" bIns="0" rtlCol="0" anchor="ctr"/>
+          <a:lstStyle/>
+          <a:p>
+            <a:pPr indent="0" marL="0">
+              <a:buNone/>
+            </a:pPr>
+            <a:r>
+              <a:rPr lang="en-US" sz="1300" b="1" dirty="0">
+                <a:solidFill>
+                  <a:srgbClr val="1A2744"/>
+                </a:solidFill>
+                <a:latin typeface="Arial" pitchFamily="34" charset="0"/>
+                <a:ea typeface="Arial" pitchFamily="34" charset="-122"/>
+                <a:cs typeface="Arial" pitchFamily="34" charset="-120"/>
+              </a:rPr>
+              <a:t>スタッフの対応</a:t>
+            </a:r>
+            <a:endParaRPr lang="en-US" sz="1300" dirty="0"/>
+          </a:p>
+        </p:txBody>
+      </p:sp>
+      <p:sp>
+        <p:nvSpPr>
+          <p:cNvPr id="24" name="Text 22"/>
+          <p:cNvSpPr/>
+          <p:nvPr/>
+        </p:nvSpPr>
+        <p:spPr>
+          <a:xfrm>
+            <a:off x="6263640" y="1417320"/>
+            <a:ext cx="2377440" cy="365760"/>
+          </a:xfrm>
+          <a:prstGeom prst="rect">
+            <a:avLst/>
+          </a:prstGeom>
+          <a:noFill/>
+          <a:ln/>
+        </p:spPr>
+        <p:txBody>
+          <a:bodyPr wrap="square" lIns="0" tIns="0" rIns="0" bIns="0" rtlCol="0" anchor="ctr"/>
+          <a:lstStyle/>
+          <a:p>
+            <a:pPr indent="0" marL="0">
+              <a:buNone/>
+            </a:pPr>
+            <a:r>
+              <a:rPr lang="en-US" sz="900" dirty="0">
+                <a:solidFill>
+                  <a:srgbClr val="64748B"/>
+                </a:solidFill>
+                <a:latin typeface="Arial" pitchFamily="34" charset="0"/>
+                <a:ea typeface="Arial" pitchFamily="34" charset="-122"/>
+                <a:cs typeface="Arial" pitchFamily="34" charset="-120"/>
+              </a:rPr>
+              <a:t>ロビーのスタッフはとても丁寧で、荷物預かりサービスもあるので大変便利です</a:t>
+            </a:r>
+            <a:endParaRPr lang="en-US" sz="900" dirty="0"/>
+          </a:p>
+        </p:txBody>
+      </p:sp>
+      <p:sp>
+        <p:nvSpPr>
+          <p:cNvPr id="25" name="Text 23"/>
+          <p:cNvSpPr/>
+          <p:nvPr/>
+        </p:nvSpPr>
+        <p:spPr>
+          <a:xfrm>
+            <a:off x="6263640" y="1828800"/>
+            <a:ext cx="2377440" cy="640080"/>
+          </a:xfrm>
+          <a:prstGeom prst="rect">
+            <a:avLst/>
+          </a:prstGeom>
+          <a:noFill/>
+          <a:ln/>
+        </p:spPr>
+        <p:txBody>
+          <a:bodyPr wrap="square" lIns="0" tIns="0" rIns="0" bIns="0" rtlCol="0" anchor="ctr"/>
+          <a:lstStyle/>
+          <a:p>
+            <a:pPr indent="0" marL="0">
+              <a:buNone/>
+            </a:pPr>
+            <a:r>
+              <a:rPr lang="en-US" sz="900" i="1" dirty="0">
+                <a:solidFill>
+                  <a:srgbClr val="3B7DD8"/>
+                </a:solidFill>
+                <a:latin typeface="Arial" pitchFamily="34" charset="0"/>
+                <a:ea typeface="Arial" pitchFamily="34" charset="-122"/>
+                <a:cs typeface="Arial" pitchFamily="34" charset="-120"/>
+              </a:rPr>
+              <a:t>「スタッフは親切で協力的です」</a:t>
+            </a:r>
+            <a:endParaRPr lang="en-US" sz="900" dirty="0"/>
+          </a:p>
+        </p:txBody>
+      </p:sp>
+      <p:sp>
+        <p:nvSpPr>
+          <p:cNvPr id="26" name="Shape 24"/>
+          <p:cNvSpPr/>
+          <p:nvPr/>
+        </p:nvSpPr>
+        <p:spPr>
+          <a:xfrm>
+            <a:off x="457200" y="2880360"/>
+            <a:ext cx="2651760" cy="1600200"/>
+          </a:xfrm>
+          <a:prstGeom prst="rect">
+            <a:avLst/>
+          </a:prstGeom>
+          <a:solidFill>
+            <a:srgbClr val="FFFFFF"/>
+          </a:solidFill>
+          <a:ln/>
+          <a:effectLst>
+            <a:outerShdw sx="100000" sy="100000" kx="0" ky="0" algn="bl" rotWithShape="0" blurRad="50800" dist="25400" dir="8100000">
+              <a:srgbClr val="000000">
+                <a:alpha val="10000"/>
+              </a:srgbClr>
+            </a:outerShdw>
+          </a:effectLst>
+        </p:spPr>
+      </p:sp>
+      <p:sp>
+        <p:nvSpPr>
+          <p:cNvPr id="27" name="Shape 25"/>
+          <p:cNvSpPr/>
+          <p:nvPr/>
+        </p:nvSpPr>
+        <p:spPr>
+          <a:xfrm>
+            <a:off x="457200" y="2880360"/>
+            <a:ext cx="54864" cy="1600200"/>
+          </a:xfrm>
+          <a:prstGeom prst="rect">
+            <a:avLst/>
+          </a:prstGeom>
+          <a:solidFill>
+            <a:srgbClr val="16A34A"/>
+          </a:solidFill>
+          <a:ln/>
+        </p:spPr>
+      </p:sp>
+      <p:sp>
+        <p:nvSpPr>
+          <p:cNvPr id="28" name="Shape 26"/>
+          <p:cNvSpPr/>
+          <p:nvPr/>
+        </p:nvSpPr>
+        <p:spPr>
+          <a:xfrm>
+            <a:off x="2286000" y="2953512"/>
+            <a:ext cx="658368" cy="228600"/>
+          </a:xfrm>
+          <a:prstGeom prst="rect">
+            <a:avLst/>
+          </a:prstGeom>
+          <a:solidFill>
+            <a:srgbClr val="DCFCE7"/>
+          </a:solidFill>
+          <a:ln/>
+        </p:spPr>
+      </p:sp>
+      <p:sp>
+        <p:nvSpPr>
+          <p:cNvPr id="29" name="Text 27"/>
+          <p:cNvSpPr/>
+          <p:nvPr/>
+        </p:nvSpPr>
+        <p:spPr>
+          <a:xfrm>
+            <a:off x="2286000" y="2953512"/>
+            <a:ext cx="658368" cy="228600"/>
+          </a:xfrm>
+          <a:prstGeom prst="rect">
+            <a:avLst/>
+          </a:prstGeom>
+          <a:noFill/>
+          <a:ln/>
+        </p:spPr>
+        <p:txBody>
+          <a:bodyPr wrap="square" lIns="0" tIns="0" rIns="0" bIns="0" rtlCol="0" anchor="ctr"/>
+          <a:lstStyle/>
+          <a:p>
+            <a:pPr algn="ctr" indent="0" marL="0">
+              <a:buNone/>
+            </a:pPr>
+            <a:r>
+              <a:rPr lang="en-US" sz="900" b="1" dirty="0">
+                <a:solidFill>
+                  <a:srgbClr val="16A34A"/>
+                </a:solidFill>
+                <a:latin typeface="Arial" pitchFamily="34" charset="0"/>
+                <a:ea typeface="Arial" pitchFamily="34" charset="-122"/>
+                <a:cs typeface="Arial" pitchFamily="34" charset="-120"/>
+              </a:rPr>
+              <a:t>10件+</a:t>
+            </a:r>
+            <a:endParaRPr lang="en-US" sz="900" dirty="0"/>
+          </a:p>
+        </p:txBody>
+      </p:sp>
+      <p:sp>
+        <p:nvSpPr>
+          <p:cNvPr id="30" name="Text 28"/>
+          <p:cNvSpPr/>
+          <p:nvPr/>
+        </p:nvSpPr>
+        <p:spPr>
+          <a:xfrm>
+            <a:off x="594360" y="2953512"/>
+            <a:ext cx="1645920" cy="274320"/>
+          </a:xfrm>
+          <a:prstGeom prst="rect">
+            <a:avLst/>
+          </a:prstGeom>
+          <a:noFill/>
+          <a:ln/>
+        </p:spPr>
+        <p:txBody>
+          <a:bodyPr wrap="square" lIns="0" tIns="0" rIns="0" bIns="0" rtlCol="0" anchor="ctr"/>
+          <a:lstStyle/>
+          <a:p>
+            <a:pPr indent="0" marL="0">
+              <a:buNone/>
+            </a:pPr>
+            <a:r>
+              <a:rPr lang="en-US" sz="1300" b="1" dirty="0">
+                <a:solidFill>
+                  <a:srgbClr val="1A2744"/>
+                </a:solidFill>
+                <a:latin typeface="Arial" pitchFamily="34" charset="0"/>
+                <a:ea typeface="Arial" pitchFamily="34" charset="-122"/>
+                <a:cs typeface="Arial" pitchFamily="34" charset="-120"/>
+              </a:rPr>
+              <a:t>清潔さ・清掃</a:t>
+            </a:r>
+            <a:endParaRPr lang="en-US" sz="1300" dirty="0"/>
+          </a:p>
+        </p:txBody>
+      </p:sp>
+      <p:sp>
+        <p:nvSpPr>
+          <p:cNvPr id="31" name="Text 29"/>
+          <p:cNvSpPr/>
+          <p:nvPr/>
+        </p:nvSpPr>
+        <p:spPr>
+          <a:xfrm>
+            <a:off x="594360" y="3246120"/>
+            <a:ext cx="2377440" cy="365760"/>
+          </a:xfrm>
+          <a:prstGeom prst="rect">
+            <a:avLst/>
+          </a:prstGeom>
+          <a:noFill/>
+          <a:ln/>
+        </p:spPr>
+        <p:txBody>
+          <a:bodyPr wrap="square" lIns="0" tIns="0" rIns="0" bIns="0" rtlCol="0" anchor="ctr"/>
+          <a:lstStyle/>
+          <a:p>
+            <a:pPr indent="0" marL="0">
+              <a:buNone/>
+            </a:pPr>
+            <a:r>
+              <a:rPr lang="en-US" sz="900" dirty="0">
+                <a:solidFill>
+                  <a:srgbClr val="64748B"/>
+                </a:solidFill>
+                <a:latin typeface="Arial" pitchFamily="34" charset="0"/>
+                <a:ea typeface="Arial" pitchFamily="34" charset="-122"/>
+                <a:cs typeface="Arial" pitchFamily="34" charset="-120"/>
+              </a:rPr>
+              <a:t>周辺の観光スポットにとても近く、警備員の方々も非常に規律正しく、常に清掃や備品の補充を欠かしません</a:t>
+            </a:r>
+            <a:endParaRPr lang="en-US" sz="900" dirty="0"/>
+          </a:p>
+        </p:txBody>
+      </p:sp>
+      <p:sp>
+        <p:nvSpPr>
+          <p:cNvPr id="32" name="Text 30"/>
+          <p:cNvSpPr/>
+          <p:nvPr/>
+        </p:nvSpPr>
+        <p:spPr>
+          <a:xfrm>
+            <a:off x="594360" y="3657600"/>
             <a:ext cx="2377440" cy="640080"/>
           </a:xfrm>
           <a:prstGeom prst="rect">
@@ -10871,13 +11540,13 @@
       </p:sp>
       <p:sp>
         <p:nvSpPr>
-          <p:cNvPr id="12" name="Shape 10"/>
-          <p:cNvSpPr/>
-          <p:nvPr/>
-        </p:nvSpPr>
-        <p:spPr>
-          <a:xfrm>
-            <a:off x="3291840" y="1051560"/>
+          <p:cNvPr id="33" name="Shape 31"/>
+          <p:cNvSpPr/>
+          <p:nvPr/>
+        </p:nvSpPr>
+        <p:spPr>
+          <a:xfrm>
+            <a:off x="3291840" y="2880360"/>
             <a:ext cx="2651760" cy="1600200"/>
           </a:xfrm>
           <a:prstGeom prst="rect">
@@ -10898,13 +11567,13 @@
       </p:sp>
       <p:sp>
         <p:nvSpPr>
-          <p:cNvPr id="13" name="Shape 11"/>
-          <p:cNvSpPr/>
-          <p:nvPr/>
-        </p:nvSpPr>
-        <p:spPr>
-          <a:xfrm>
-            <a:off x="3291840" y="1051560"/>
+          <p:cNvPr id="34" name="Shape 32"/>
+          <p:cNvSpPr/>
+          <p:nvPr/>
+        </p:nvSpPr>
+        <p:spPr>
+          <a:xfrm>
+            <a:off x="3291840" y="2880360"/>
             <a:ext cx="54864" cy="1600200"/>
           </a:xfrm>
           <a:prstGeom prst="rect">
@@ -10918,13 +11587,13 @@
       </p:sp>
       <p:sp>
         <p:nvSpPr>
-          <p:cNvPr id="14" name="Shape 12"/>
-          <p:cNvSpPr/>
-          <p:nvPr/>
-        </p:nvSpPr>
-        <p:spPr>
-          <a:xfrm>
-            <a:off x="5120640" y="1124712"/>
+          <p:cNvPr id="35" name="Shape 33"/>
+          <p:cNvSpPr/>
+          <p:nvPr/>
+        </p:nvSpPr>
+        <p:spPr>
+          <a:xfrm>
+            <a:off x="5120640" y="2953512"/>
             <a:ext cx="658368" cy="228600"/>
           </a:xfrm>
           <a:prstGeom prst="rect">
@@ -10938,459 +11607,13 @@
       </p:sp>
       <p:sp>
         <p:nvSpPr>
-          <p:cNvPr id="15" name="Text 13"/>
-          <p:cNvSpPr/>
-          <p:nvPr/>
-        </p:nvSpPr>
-        <p:spPr>
-          <a:xfrm>
-            <a:off x="5120640" y="1124712"/>
-            <a:ext cx="658368" cy="228600"/>
-          </a:xfrm>
-          <a:prstGeom prst="rect">
-            <a:avLst/>
-          </a:prstGeom>
-          <a:noFill/>
-          <a:ln/>
-        </p:spPr>
-        <p:txBody>
-          <a:bodyPr wrap="square" lIns="0" tIns="0" rIns="0" bIns="0" rtlCol="0" anchor="ctr"/>
-          <a:lstStyle/>
-          <a:p>
-            <a:pPr algn="ctr" indent="0" marL="0">
-              <a:buNone/>
-            </a:pPr>
-            <a:r>
-              <a:rPr lang="en-US" sz="900" b="1" dirty="0">
-                <a:solidFill>
-                  <a:srgbClr val="16A34A"/>
-                </a:solidFill>
-                <a:latin typeface="Arial" pitchFamily="34" charset="0"/>
-                <a:ea typeface="Arial" pitchFamily="34" charset="-122"/>
-                <a:cs typeface="Arial" pitchFamily="34" charset="-120"/>
-              </a:rPr>
-              <a:t>20件+</a:t>
-            </a:r>
-            <a:endParaRPr lang="en-US" sz="900" dirty="0"/>
-          </a:p>
-        </p:txBody>
-      </p:sp>
-      <p:sp>
-        <p:nvSpPr>
-          <p:cNvPr id="16" name="Text 14"/>
-          <p:cNvSpPr/>
-          <p:nvPr/>
-        </p:nvSpPr>
-        <p:spPr>
-          <a:xfrm>
-            <a:off x="3429000" y="1124712"/>
-            <a:ext cx="1645920" cy="274320"/>
-          </a:xfrm>
-          <a:prstGeom prst="rect">
-            <a:avLst/>
-          </a:prstGeom>
-          <a:noFill/>
-          <a:ln/>
-        </p:spPr>
-        <p:txBody>
-          <a:bodyPr wrap="square" lIns="0" tIns="0" rIns="0" bIns="0" rtlCol="0" anchor="ctr"/>
-          <a:lstStyle/>
-          <a:p>
-            <a:pPr indent="0" marL="0">
-              <a:buNone/>
-            </a:pPr>
-            <a:r>
-              <a:rPr lang="en-US" sz="1300" b="1" dirty="0">
-                <a:solidFill>
-                  <a:srgbClr val="1A2744"/>
-                </a:solidFill>
-                <a:latin typeface="Arial" pitchFamily="34" charset="0"/>
-                <a:ea typeface="Arial" pitchFamily="34" charset="-122"/>
-                <a:cs typeface="Arial" pitchFamily="34" charset="-120"/>
-              </a:rPr>
-              <a:t>コンビニ・周辺施設</a:t>
-            </a:r>
-            <a:endParaRPr lang="en-US" sz="1300" dirty="0"/>
-          </a:p>
-        </p:txBody>
-      </p:sp>
-      <p:sp>
-        <p:nvSpPr>
-          <p:cNvPr id="17" name="Text 15"/>
-          <p:cNvSpPr/>
-          <p:nvPr/>
-        </p:nvSpPr>
-        <p:spPr>
-          <a:xfrm>
-            <a:off x="3429000" y="1417320"/>
-            <a:ext cx="2377440" cy="365760"/>
-          </a:xfrm>
-          <a:prstGeom prst="rect">
-            <a:avLst/>
-          </a:prstGeom>
-          <a:noFill/>
-          <a:ln/>
-        </p:spPr>
-        <p:txBody>
-          <a:bodyPr wrap="square" lIns="0" tIns="0" rIns="0" bIns="0" rtlCol="0" anchor="ctr"/>
-          <a:lstStyle/>
-          <a:p>
-            <a:pPr indent="0" marL="0">
-              <a:buNone/>
-            </a:pPr>
-            <a:r>
-              <a:rPr lang="en-US" sz="900" dirty="0">
-                <a:solidFill>
-                  <a:srgbClr val="64748B"/>
-                </a:solidFill>
-                <a:latin typeface="Arial" pitchFamily="34" charset="0"/>
-                <a:ea typeface="Arial" pitchFamily="34" charset="-122"/>
-                <a:cs typeface="Arial" pitchFamily="34" charset="-120"/>
-              </a:rPr>
-              <a:t>ホテルの周辺には多くのレストランがあり、ファミリーマートやセブンイレブンもすぐ近くにあります</a:t>
-            </a:r>
-            <a:endParaRPr lang="en-US" sz="900" dirty="0"/>
-          </a:p>
-        </p:txBody>
-      </p:sp>
-      <p:sp>
-        <p:nvSpPr>
-          <p:cNvPr id="18" name="Text 16"/>
-          <p:cNvSpPr/>
-          <p:nvPr/>
-        </p:nvSpPr>
-        <p:spPr>
-          <a:xfrm>
-            <a:off x="3429000" y="1828800"/>
-            <a:ext cx="2377440" cy="640080"/>
-          </a:xfrm>
-          <a:prstGeom prst="rect">
-            <a:avLst/>
-          </a:prstGeom>
-          <a:noFill/>
-          <a:ln/>
-        </p:spPr>
-        <p:txBody>
-          <a:bodyPr wrap="square" lIns="0" tIns="0" rIns="0" bIns="0" rtlCol="0" anchor="ctr"/>
-          <a:lstStyle/>
-          <a:p>
-            <a:pPr indent="0" marL="0">
-              <a:buNone/>
-            </a:pPr>
-            <a:r>
-              <a:rPr lang="en-US" sz="900" i="1" dirty="0">
-                <a:solidFill>
-                  <a:srgbClr val="3B7DD8"/>
-                </a:solidFill>
-                <a:latin typeface="Arial" pitchFamily="34" charset="0"/>
-                <a:ea typeface="Arial" pitchFamily="34" charset="-122"/>
-                <a:cs typeface="Arial" pitchFamily="34" charset="-120"/>
-              </a:rPr>
-              <a:t>「階下には一蘭のラーメン店とコンビニもありました」</a:t>
-            </a:r>
-            <a:endParaRPr lang="en-US" sz="900" dirty="0"/>
-          </a:p>
-        </p:txBody>
-      </p:sp>
-      <p:sp>
-        <p:nvSpPr>
-          <p:cNvPr id="19" name="Shape 17"/>
-          <p:cNvSpPr/>
-          <p:nvPr/>
-        </p:nvSpPr>
-        <p:spPr>
-          <a:xfrm>
-            <a:off x="6126480" y="1051560"/>
-            <a:ext cx="2651760" cy="1600200"/>
-          </a:xfrm>
-          <a:prstGeom prst="rect">
-            <a:avLst/>
-          </a:prstGeom>
-          <a:solidFill>
-            <a:srgbClr val="FFFFFF"/>
-          </a:solidFill>
-          <a:ln/>
-          <a:effectLst>
-            <a:outerShdw sx="100000" sy="100000" kx="0" ky="0" algn="bl" rotWithShape="0" blurRad="50800" dist="25400" dir="8100000">
-              <a:srgbClr val="000000">
-                <a:alpha val="10000"/>
-              </a:srgbClr>
-            </a:outerShdw>
-          </a:effectLst>
-        </p:spPr>
-      </p:sp>
-      <p:sp>
-        <p:nvSpPr>
-          <p:cNvPr id="20" name="Shape 18"/>
-          <p:cNvSpPr/>
-          <p:nvPr/>
-        </p:nvSpPr>
-        <p:spPr>
-          <a:xfrm>
-            <a:off x="6126480" y="1051560"/>
-            <a:ext cx="54864" cy="1600200"/>
-          </a:xfrm>
-          <a:prstGeom prst="rect">
-            <a:avLst/>
-          </a:prstGeom>
-          <a:solidFill>
-            <a:srgbClr val="16A34A"/>
-          </a:solidFill>
-          <a:ln/>
-        </p:spPr>
-      </p:sp>
-      <p:sp>
-        <p:nvSpPr>
-          <p:cNvPr id="21" name="Shape 19"/>
-          <p:cNvSpPr/>
-          <p:nvPr/>
-        </p:nvSpPr>
-        <p:spPr>
-          <a:xfrm>
-            <a:off x="7955280" y="1124712"/>
-            <a:ext cx="658368" cy="228600"/>
-          </a:xfrm>
-          <a:prstGeom prst="rect">
-            <a:avLst/>
-          </a:prstGeom>
-          <a:solidFill>
-            <a:srgbClr val="DCFCE7"/>
-          </a:solidFill>
-          <a:ln/>
-        </p:spPr>
-      </p:sp>
-      <p:sp>
-        <p:nvSpPr>
-          <p:cNvPr id="22" name="Text 20"/>
-          <p:cNvSpPr/>
-          <p:nvPr/>
-        </p:nvSpPr>
-        <p:spPr>
-          <a:xfrm>
-            <a:off x="7955280" y="1124712"/>
-            <a:ext cx="658368" cy="228600"/>
-          </a:xfrm>
-          <a:prstGeom prst="rect">
-            <a:avLst/>
-          </a:prstGeom>
-          <a:noFill/>
-          <a:ln/>
-        </p:spPr>
-        <p:txBody>
-          <a:bodyPr wrap="square" lIns="0" tIns="0" rIns="0" bIns="0" rtlCol="0" anchor="ctr"/>
-          <a:lstStyle/>
-          <a:p>
-            <a:pPr algn="ctr" indent="0" marL="0">
-              <a:buNone/>
-            </a:pPr>
-            <a:r>
-              <a:rPr lang="en-US" sz="900" b="1" dirty="0">
-                <a:solidFill>
-                  <a:srgbClr val="16A34A"/>
-                </a:solidFill>
-                <a:latin typeface="Arial" pitchFamily="34" charset="0"/>
-                <a:ea typeface="Arial" pitchFamily="34" charset="-122"/>
-                <a:cs typeface="Arial" pitchFamily="34" charset="-120"/>
-              </a:rPr>
-              <a:t>20件+</a:t>
-            </a:r>
-            <a:endParaRPr lang="en-US" sz="900" dirty="0"/>
-          </a:p>
-        </p:txBody>
-      </p:sp>
-      <p:sp>
-        <p:nvSpPr>
-          <p:cNvPr id="23" name="Text 21"/>
-          <p:cNvSpPr/>
-          <p:nvPr/>
-        </p:nvSpPr>
-        <p:spPr>
-          <a:xfrm>
-            <a:off x="6263640" y="1124712"/>
-            <a:ext cx="1645920" cy="274320"/>
-          </a:xfrm>
-          <a:prstGeom prst="rect">
-            <a:avLst/>
-          </a:prstGeom>
-          <a:noFill/>
-          <a:ln/>
-        </p:spPr>
-        <p:txBody>
-          <a:bodyPr wrap="square" lIns="0" tIns="0" rIns="0" bIns="0" rtlCol="0" anchor="ctr"/>
-          <a:lstStyle/>
-          <a:p>
-            <a:pPr indent="0" marL="0">
-              <a:buNone/>
-            </a:pPr>
-            <a:r>
-              <a:rPr lang="en-US" sz="1300" b="1" dirty="0">
-                <a:solidFill>
-                  <a:srgbClr val="1A2744"/>
-                </a:solidFill>
-                <a:latin typeface="Arial" pitchFamily="34" charset="0"/>
-                <a:ea typeface="Arial" pitchFamily="34" charset="-122"/>
-                <a:cs typeface="Arial" pitchFamily="34" charset="-120"/>
-              </a:rPr>
-              <a:t>スタッフの対応</a:t>
-            </a:r>
-            <a:endParaRPr lang="en-US" sz="1300" dirty="0"/>
-          </a:p>
-        </p:txBody>
-      </p:sp>
-      <p:sp>
-        <p:nvSpPr>
-          <p:cNvPr id="24" name="Text 22"/>
-          <p:cNvSpPr/>
-          <p:nvPr/>
-        </p:nvSpPr>
-        <p:spPr>
-          <a:xfrm>
-            <a:off x="6263640" y="1417320"/>
-            <a:ext cx="2377440" cy="365760"/>
-          </a:xfrm>
-          <a:prstGeom prst="rect">
-            <a:avLst/>
-          </a:prstGeom>
-          <a:noFill/>
-          <a:ln/>
-        </p:spPr>
-        <p:txBody>
-          <a:bodyPr wrap="square" lIns="0" tIns="0" rIns="0" bIns="0" rtlCol="0" anchor="ctr"/>
-          <a:lstStyle/>
-          <a:p>
-            <a:pPr indent="0" marL="0">
-              <a:buNone/>
-            </a:pPr>
-            <a:r>
-              <a:rPr lang="en-US" sz="900" dirty="0">
-                <a:solidFill>
-                  <a:srgbClr val="64748B"/>
-                </a:solidFill>
-                <a:latin typeface="Arial" pitchFamily="34" charset="0"/>
-                <a:ea typeface="Arial" pitchFamily="34" charset="-122"/>
-                <a:cs typeface="Arial" pitchFamily="34" charset="-120"/>
-              </a:rPr>
-              <a:t>地點好 服務好 有吸煙室 便利商店就在樓下 立地も良く、サービスも良く、喫煙室もあり、階下にはコンビニもあります</a:t>
-            </a:r>
-            <a:endParaRPr lang="en-US" sz="900" dirty="0"/>
-          </a:p>
-        </p:txBody>
-      </p:sp>
-      <p:sp>
-        <p:nvSpPr>
-          <p:cNvPr id="25" name="Text 23"/>
-          <p:cNvSpPr/>
-          <p:nvPr/>
-        </p:nvSpPr>
-        <p:spPr>
-          <a:xfrm>
-            <a:off x="6263640" y="1828800"/>
-            <a:ext cx="2377440" cy="640080"/>
-          </a:xfrm>
-          <a:prstGeom prst="rect">
-            <a:avLst/>
-          </a:prstGeom>
-          <a:noFill/>
-          <a:ln/>
-        </p:spPr>
-        <p:txBody>
-          <a:bodyPr wrap="square" lIns="0" tIns="0" rIns="0" bIns="0" rtlCol="0" anchor="ctr"/>
-          <a:lstStyle/>
-          <a:p>
-            <a:pPr indent="0" marL="0">
-              <a:buNone/>
-            </a:pPr>
-            <a:r>
-              <a:rPr lang="en-US" sz="900" i="1" dirty="0">
-                <a:solidFill>
-                  <a:srgbClr val="3B7DD8"/>
-                </a:solidFill>
-                <a:latin typeface="Arial" pitchFamily="34" charset="0"/>
-                <a:ea typeface="Arial" pitchFamily="34" charset="-122"/>
-                <a:cs typeface="Arial" pitchFamily="34" charset="-120"/>
-              </a:rPr>
-              <a:t>「1泊と3泊を別々に予約しましたが、スタッフの方が部屋を変えることなく対応してくれました」</a:t>
-            </a:r>
-            <a:endParaRPr lang="en-US" sz="900" dirty="0"/>
-          </a:p>
-        </p:txBody>
-      </p:sp>
-      <p:sp>
-        <p:nvSpPr>
-          <p:cNvPr id="26" name="Shape 24"/>
-          <p:cNvSpPr/>
-          <p:nvPr/>
-        </p:nvSpPr>
-        <p:spPr>
-          <a:xfrm>
-            <a:off x="457200" y="2880360"/>
-            <a:ext cx="2651760" cy="1600200"/>
-          </a:xfrm>
-          <a:prstGeom prst="rect">
-            <a:avLst/>
-          </a:prstGeom>
-          <a:solidFill>
-            <a:srgbClr val="FFFFFF"/>
-          </a:solidFill>
-          <a:ln/>
-          <a:effectLst>
-            <a:outerShdw sx="100000" sy="100000" kx="0" ky="0" algn="bl" rotWithShape="0" blurRad="50800" dist="25400" dir="8100000">
-              <a:srgbClr val="000000">
-                <a:alpha val="10000"/>
-              </a:srgbClr>
-            </a:outerShdw>
-          </a:effectLst>
-        </p:spPr>
-      </p:sp>
-      <p:sp>
-        <p:nvSpPr>
-          <p:cNvPr id="27" name="Shape 25"/>
-          <p:cNvSpPr/>
-          <p:nvPr/>
-        </p:nvSpPr>
-        <p:spPr>
-          <a:xfrm>
-            <a:off x="457200" y="2880360"/>
-            <a:ext cx="54864" cy="1600200"/>
-          </a:xfrm>
-          <a:prstGeom prst="rect">
-            <a:avLst/>
-          </a:prstGeom>
-          <a:solidFill>
-            <a:srgbClr val="16A34A"/>
-          </a:solidFill>
-          <a:ln/>
-        </p:spPr>
-      </p:sp>
-      <p:sp>
-        <p:nvSpPr>
-          <p:cNvPr id="28" name="Shape 26"/>
-          <p:cNvSpPr/>
-          <p:nvPr/>
-        </p:nvSpPr>
-        <p:spPr>
-          <a:xfrm>
-            <a:off x="2286000" y="2953512"/>
-            <a:ext cx="658368" cy="228600"/>
-          </a:xfrm>
-          <a:prstGeom prst="rect">
-            <a:avLst/>
-          </a:prstGeom>
-          <a:solidFill>
-            <a:srgbClr val="DCFCE7"/>
-          </a:solidFill>
-          <a:ln/>
-        </p:spPr>
-      </p:sp>
-      <p:sp>
-        <p:nvSpPr>
-          <p:cNvPr id="29" name="Text 27"/>
-          <p:cNvSpPr/>
-          <p:nvPr/>
-        </p:nvSpPr>
-        <p:spPr>
-          <a:xfrm>
-            <a:off x="2286000" y="2953512"/>
+          <p:cNvPr id="36" name="Text 34"/>
+          <p:cNvSpPr/>
+          <p:nvPr/>
+        </p:nvSpPr>
+        <p:spPr>
+          <a:xfrm>
+            <a:off x="5120640" y="2953512"/>
             <a:ext cx="658368" cy="228600"/>
           </a:xfrm>
           <a:prstGeom prst="rect">
@@ -11423,229 +11646,6 @@
       </p:sp>
       <p:sp>
         <p:nvSpPr>
-          <p:cNvPr id="30" name="Text 28"/>
-          <p:cNvSpPr/>
-          <p:nvPr/>
-        </p:nvSpPr>
-        <p:spPr>
-          <a:xfrm>
-            <a:off x="594360" y="2953512"/>
-            <a:ext cx="1645920" cy="274320"/>
-          </a:xfrm>
-          <a:prstGeom prst="rect">
-            <a:avLst/>
-          </a:prstGeom>
-          <a:noFill/>
-          <a:ln/>
-        </p:spPr>
-        <p:txBody>
-          <a:bodyPr wrap="square" lIns="0" tIns="0" rIns="0" bIns="0" rtlCol="0" anchor="ctr"/>
-          <a:lstStyle/>
-          <a:p>
-            <a:pPr indent="0" marL="0">
-              <a:buNone/>
-            </a:pPr>
-            <a:r>
-              <a:rPr lang="en-US" sz="1300" b="1" dirty="0">
-                <a:solidFill>
-                  <a:srgbClr val="1A2744"/>
-                </a:solidFill>
-                <a:latin typeface="Arial" pitchFamily="34" charset="0"/>
-                <a:ea typeface="Arial" pitchFamily="34" charset="-122"/>
-                <a:cs typeface="Arial" pitchFamily="34" charset="-120"/>
-              </a:rPr>
-              <a:t>清潔さ・清掃</a:t>
-            </a:r>
-            <a:endParaRPr lang="en-US" sz="1300" dirty="0"/>
-          </a:p>
-        </p:txBody>
-      </p:sp>
-      <p:sp>
-        <p:nvSpPr>
-          <p:cNvPr id="31" name="Text 29"/>
-          <p:cNvSpPr/>
-          <p:nvPr/>
-        </p:nvSpPr>
-        <p:spPr>
-          <a:xfrm>
-            <a:off x="594360" y="3246120"/>
-            <a:ext cx="2377440" cy="365760"/>
-          </a:xfrm>
-          <a:prstGeom prst="rect">
-            <a:avLst/>
-          </a:prstGeom>
-          <a:noFill/>
-          <a:ln/>
-        </p:spPr>
-        <p:txBody>
-          <a:bodyPr wrap="square" lIns="0" tIns="0" rIns="0" bIns="0" rtlCol="0" anchor="ctr"/>
-          <a:lstStyle/>
-          <a:p>
-            <a:pPr indent="0" marL="0">
-              <a:buNone/>
-            </a:pPr>
-            <a:r>
-              <a:rPr lang="en-US" sz="900" dirty="0">
-                <a:solidFill>
-                  <a:srgbClr val="64748B"/>
-                </a:solidFill>
-                <a:latin typeface="Arial" pitchFamily="34" charset="0"/>
-                <a:ea typeface="Arial" pitchFamily="34" charset="-122"/>
-                <a:cs typeface="Arial" pitchFamily="34" charset="-120"/>
-              </a:rPr>
-              <a:t>居心地が良く清潔で、池袋という便利な場所にあり、地下鉄で東京ハリー・ポッターエリアへも簡単にアクセスできました</a:t>
-            </a:r>
-            <a:endParaRPr lang="en-US" sz="900" dirty="0"/>
-          </a:p>
-        </p:txBody>
-      </p:sp>
-      <p:sp>
-        <p:nvSpPr>
-          <p:cNvPr id="32" name="Text 30"/>
-          <p:cNvSpPr/>
-          <p:nvPr/>
-        </p:nvSpPr>
-        <p:spPr>
-          <a:xfrm>
-            <a:off x="594360" y="3657600"/>
-            <a:ext cx="2377440" cy="640080"/>
-          </a:xfrm>
-          <a:prstGeom prst="rect">
-            <a:avLst/>
-          </a:prstGeom>
-          <a:noFill/>
-          <a:ln/>
-        </p:spPr>
-        <p:txBody>
-          <a:bodyPr wrap="square" lIns="0" tIns="0" rIns="0" bIns="0" rtlCol="0" anchor="ctr"/>
-          <a:lstStyle/>
-          <a:p>
-            <a:pPr indent="0" marL="0">
-              <a:buNone/>
-            </a:pPr>
-            <a:r>
-              <a:rPr lang="en-US" sz="900" i="1" dirty="0">
-                <a:solidFill>
-                  <a:srgbClr val="3B7DD8"/>
-                </a:solidFill>
-                <a:latin typeface="Arial" pitchFamily="34" charset="0"/>
-                <a:ea typeface="Arial" pitchFamily="34" charset="-122"/>
-                <a:cs typeface="Arial" pitchFamily="34" charset="-120"/>
-              </a:rPr>
-              <a:t>「部屋は広々としていて、バスルームも広くて清潔、ベッドは柔らかくてとても快適に眠れました」</a:t>
-            </a:r>
-            <a:endParaRPr lang="en-US" sz="900" dirty="0"/>
-          </a:p>
-        </p:txBody>
-      </p:sp>
-      <p:sp>
-        <p:nvSpPr>
-          <p:cNvPr id="33" name="Shape 31"/>
-          <p:cNvSpPr/>
-          <p:nvPr/>
-        </p:nvSpPr>
-        <p:spPr>
-          <a:xfrm>
-            <a:off x="3291840" y="2880360"/>
-            <a:ext cx="2651760" cy="1600200"/>
-          </a:xfrm>
-          <a:prstGeom prst="rect">
-            <a:avLst/>
-          </a:prstGeom>
-          <a:solidFill>
-            <a:srgbClr val="FFFFFF"/>
-          </a:solidFill>
-          <a:ln/>
-          <a:effectLst>
-            <a:outerShdw sx="100000" sy="100000" kx="0" ky="0" algn="bl" rotWithShape="0" blurRad="50800" dist="25400" dir="8100000">
-              <a:srgbClr val="000000">
-                <a:alpha val="10000"/>
-              </a:srgbClr>
-            </a:outerShdw>
-          </a:effectLst>
-        </p:spPr>
-      </p:sp>
-      <p:sp>
-        <p:nvSpPr>
-          <p:cNvPr id="34" name="Shape 32"/>
-          <p:cNvSpPr/>
-          <p:nvPr/>
-        </p:nvSpPr>
-        <p:spPr>
-          <a:xfrm>
-            <a:off x="3291840" y="2880360"/>
-            <a:ext cx="54864" cy="1600200"/>
-          </a:xfrm>
-          <a:prstGeom prst="rect">
-            <a:avLst/>
-          </a:prstGeom>
-          <a:solidFill>
-            <a:srgbClr val="16A34A"/>
-          </a:solidFill>
-          <a:ln/>
-        </p:spPr>
-      </p:sp>
-      <p:sp>
-        <p:nvSpPr>
-          <p:cNvPr id="35" name="Shape 33"/>
-          <p:cNvSpPr/>
-          <p:nvPr/>
-        </p:nvSpPr>
-        <p:spPr>
-          <a:xfrm>
-            <a:off x="5120640" y="2953512"/>
-            <a:ext cx="658368" cy="228600"/>
-          </a:xfrm>
-          <a:prstGeom prst="rect">
-            <a:avLst/>
-          </a:prstGeom>
-          <a:solidFill>
-            <a:srgbClr val="DCFCE7"/>
-          </a:solidFill>
-          <a:ln/>
-        </p:spPr>
-      </p:sp>
-      <p:sp>
-        <p:nvSpPr>
-          <p:cNvPr id="36" name="Text 34"/>
-          <p:cNvSpPr/>
-          <p:nvPr/>
-        </p:nvSpPr>
-        <p:spPr>
-          <a:xfrm>
-            <a:off x="5120640" y="2953512"/>
-            <a:ext cx="658368" cy="228600"/>
-          </a:xfrm>
-          <a:prstGeom prst="rect">
-            <a:avLst/>
-          </a:prstGeom>
-          <a:noFill/>
-          <a:ln/>
-        </p:spPr>
-        <p:txBody>
-          <a:bodyPr wrap="square" lIns="0" tIns="0" rIns="0" bIns="0" rtlCol="0" anchor="ctr"/>
-          <a:lstStyle/>
-          <a:p>
-            <a:pPr algn="ctr" indent="0" marL="0">
-              <a:buNone/>
-            </a:pPr>
-            <a:r>
-              <a:rPr lang="en-US" sz="900" b="1" dirty="0">
-                <a:solidFill>
-                  <a:srgbClr val="16A34A"/>
-                </a:solidFill>
-                <a:latin typeface="Arial" pitchFamily="34" charset="0"/>
-                <a:ea typeface="Arial" pitchFamily="34" charset="-122"/>
-                <a:cs typeface="Arial" pitchFamily="34" charset="-120"/>
-              </a:rPr>
-              <a:t>10件+</a:t>
-            </a:r>
-            <a:endParaRPr lang="en-US" sz="900" dirty="0"/>
-          </a:p>
-        </p:txBody>
-      </p:sp>
-      <p:sp>
-        <p:nvSpPr>
           <p:cNvPr id="37" name="Text 35"/>
           <p:cNvSpPr/>
           <p:nvPr/>
@@ -11716,7 +11716,7 @@
                 <a:ea typeface="Arial" pitchFamily="34" charset="-122"/>
                 <a:cs typeface="Arial" pitchFamily="34" charset="-120"/>
               </a:rPr>
-              <a:t>房間挺大的，有四張床，每張床還挺大，房間温馨且衞生，地處池袋去東京哈利波特園區可地鐵直達也很方便，樓下就是一蘭拉麪...</a:t>
+              <a:t>シャワーキャップ以外のアメニティはすべて揃っています</a:t>
             </a:r>
             <a:endParaRPr lang="en-US" sz="900" dirty="0"/>
           </a:p>
@@ -11755,7 +11755,7 @@
                 <a:ea typeface="Arial" pitchFamily="34" charset="-122"/>
                 <a:cs typeface="Arial" pitchFamily="34" charset="-120"/>
               </a:rPr>
-              <a:t>「房間三张床也宽阔 部屋は広々としており、ベッドが3台あります」</a:t>
+              <a:t>「房間挺大的，有四張床，每張床還挺大，房間温馨且衞生，地處池袋去東京哈利波特園區可地鐵直達也很方便，樓下就是一蘭拉麪...」</a:t>
             </a:r>
             <a:endParaRPr lang="en-US" sz="900" dirty="0"/>
           </a:p>
@@ -12668,7 +12668,7 @@
                           <a:ea typeface="Arial" pitchFamily="34" charset="-122"/>
                           <a:cs typeface="Arial" pitchFamily="34" charset="-120"/>
                         </a:rPr>
-                        <a:t>ที่พักโอเค ทำเลดี แอร์ไม่ใช่แบบรวม เริ่ดเลยล่ะ แต่เตียงแอ...</a:t>
+                        <a:t>proximité du metro, konbini au pied de l'hotel, proximité...</a:t>
                       </a:r>
                       <a:endParaRPr lang="en-US" sz="900" dirty="0">
                         <a:latin typeface="Arial" charset="0"/>
@@ -12736,7 +12736,7 @@
                           <a:ea typeface="Arial" pitchFamily="34" charset="-122"/>
                           <a:cs typeface="Arial" pitchFamily="34" charset="-120"/>
                         </a:rPr>
-                        <a:t>12件</a:t>
+                        <a:t>13件</a:t>
                       </a:r>
                       <a:endParaRPr lang="en-US" sz="900" dirty="0">
                         <a:latin typeface="Arial" charset="0"/>
@@ -12874,7 +12874,7 @@
                           <a:ea typeface="Arial" pitchFamily="34" charset="-122"/>
                           <a:cs typeface="Arial" pitchFamily="34" charset="-120"/>
                         </a:rPr>
-                        <a:t>設備の老朽化</a:t>
+                        <a:t>部屋の狭さ</a:t>
                       </a:r>
                       <a:endParaRPr lang="en-US" sz="900" dirty="0">
                         <a:latin typeface="Arial" charset="0"/>
@@ -12942,7 +12942,7 @@
                           <a:ea typeface="Arial" pitchFamily="34" charset="-122"/>
                           <a:cs typeface="Arial" pitchFamily="34" charset="-120"/>
                         </a:rPr>
-                        <a:t>部屋は古いですが、とても清潔です</a:t>
+                        <a:t>部屋は一人なら十分な広さですが、二人だと少し狭いかもしれません</a:t>
                       </a:r>
                       <a:endParaRPr lang="en-US" sz="900" dirty="0">
                         <a:latin typeface="Arial" charset="0"/>
@@ -13010,7 +13010,7 @@
                           <a:ea typeface="Arial" pitchFamily="34" charset="-122"/>
                           <a:cs typeface="Arial" pitchFamily="34" charset="-120"/>
                         </a:rPr>
-                        <a:t>6件</a:t>
+                        <a:t>7件</a:t>
                       </a:r>
                       <a:endParaRPr lang="en-US" sz="900" dirty="0">
                         <a:latin typeface="Arial" charset="0"/>
@@ -13148,7 +13148,7 @@
                           <a:ea typeface="Arial" pitchFamily="34" charset="-122"/>
                           <a:cs typeface="Arial" pitchFamily="34" charset="-120"/>
                         </a:rPr>
-                        <a:t>防音性能</a:t>
+                        <a:t>浴室・水回り</a:t>
                       </a:r>
                       <a:endParaRPr lang="en-US" sz="900" dirty="0">
                         <a:latin typeface="Arial" charset="0"/>
@@ -13216,7 +13216,7 @@
                           <a:ea typeface="Arial" pitchFamily="34" charset="-122"/>
                           <a:cs typeface="Arial" pitchFamily="34" charset="-120"/>
                         </a:rPr>
-                        <a:t>夜はそんなに騒々しいとは思いませんでしたが、電車の音が小さく聞こえることは残念でした</a:t>
+                        <a:t>ทำเลดีมาก ใกล้ทุกอย่าง ใกล้รถไฟฟ้า แอร์พอตบัส ใกล้ร้านอาห...</a:t>
                       </a:r>
                       <a:endParaRPr lang="en-US" sz="900" dirty="0">
                         <a:latin typeface="Arial" charset="0"/>
@@ -13284,7 +13284,7 @@
                           <a:ea typeface="Arial" pitchFamily="34" charset="-122"/>
                           <a:cs typeface="Arial" pitchFamily="34" charset="-120"/>
                         </a:rPr>
-                        <a:t>6件</a:t>
+                        <a:t>7件</a:t>
                       </a:r>
                       <a:endParaRPr lang="en-US" sz="900" dirty="0">
                         <a:latin typeface="Arial" charset="0"/>
@@ -13422,7 +13422,7 @@
                           <a:ea typeface="Arial" pitchFamily="34" charset="-122"/>
                           <a:cs typeface="Arial" pitchFamily="34" charset="-120"/>
                         </a:rPr>
-                        <a:t>浴室・水回り</a:t>
+                        <a:t>設備の老朽化</a:t>
                       </a:r>
                       <a:endParaRPr lang="en-US" sz="900" dirty="0">
                         <a:latin typeface="Arial" charset="0"/>
@@ -13490,7 +13490,7 @@
                           <a:ea typeface="Arial" pitchFamily="34" charset="-122"/>
                           <a:cs typeface="Arial" pitchFamily="34" charset="-120"/>
                         </a:rPr>
-                        <a:t>前台服務好 房間大 浴室大 衞生整潔 床柔軟 睡得相當舒服 景觀好 位置好 距地鐵站步行3分鐘 附近有大商場 超市...</a:t>
+                        <a:t>部屋は古いですが、とても清潔です</a:t>
                       </a:r>
                       <a:endParaRPr lang="en-US" sz="900" dirty="0">
                         <a:latin typeface="Arial" charset="0"/>
@@ -13696,7 +13696,7 @@
                           <a:ea typeface="Arial" pitchFamily="34" charset="-122"/>
                           <a:cs typeface="Arial" pitchFamily="34" charset="-120"/>
                         </a:rPr>
-                        <a:t>部屋の狭さ</a:t>
+                        <a:t>防音性能</a:t>
                       </a:r>
                       <a:endParaRPr lang="en-US" sz="900" dirty="0">
                         <a:latin typeface="Arial" charset="0"/>
@@ -13764,7 +13764,7 @@
                           <a:ea typeface="Arial" pitchFamily="34" charset="-122"/>
                           <a:cs typeface="Arial" pitchFamily="34" charset="-120"/>
                         </a:rPr>
-                        <a:t>部屋が少し狭いことを除けば、それ以外はすべて問題ありませんでした</a:t>
+                        <a:t>夜はそんなに騒々しいとは思いませんでしたが、電車の音が小さく聞こえることは残念でした</a:t>
                       </a:r>
                       <a:endParaRPr lang="en-US" sz="900" dirty="0">
                         <a:latin typeface="Arial" charset="0"/>
@@ -13832,7 +13832,7 @@
                           <a:ea typeface="Arial" pitchFamily="34" charset="-122"/>
                           <a:cs typeface="Arial" pitchFamily="34" charset="-120"/>
                         </a:rPr>
-                        <a:t>5件</a:t>
+                        <a:t>6件</a:t>
                       </a:r>
                       <a:endParaRPr lang="en-US" sz="900" dirty="0">
                         <a:latin typeface="Arial" charset="0"/>

--- a/納品レポート/ホテル別レポート/daiichi_ikebukuro_口コミ分析レポート.pptx
+++ b/納品レポート/ホテル別レポート/daiichi_ikebukuro_口コミ分析レポート.pptx
@@ -189,10 +189,10 @@
                     <c:v>Booking.com</c:v>
                   </c:pt>
                   <c:pt idx="3">
-                    <c:v>じゃらん</c:v>
+                    <c:v>楽天トラベル</c:v>
                   </c:pt>
                   <c:pt idx="4">
-                    <c:v>楽天トラベル</c:v>
+                    <c:v>じゃらん</c:v>
                   </c:pt>
                   <c:pt idx="5">
                     <c:v>Agoda</c:v>
@@ -208,16 +208,16 @@
                 <c:formatCode>General</c:formatCode>
                 <c:ptCount val="6"/>
                 <c:pt idx="0">
-                  <c:v>9.49</c:v>
+                  <c:v>9.5</c:v>
                 </c:pt>
                 <c:pt idx="1">
-                  <c:v>9.26</c:v>
+                  <c:v>9.1</c:v>
                 </c:pt>
                 <c:pt idx="2">
-                  <c:v>8.68</c:v>
+                  <c:v>8.7</c:v>
                 </c:pt>
                 <c:pt idx="3">
-                  <c:v>8</c:v>
+                  <c:v>8.5</c:v>
                 </c:pt>
                 <c:pt idx="4">
                   <c:v>8</c:v>
@@ -566,13 +566,13 @@
               <c:numCache>
                 <c:ptCount val="3"/>
                 <c:pt idx="0">
-                  <c:v>97</c:v>
+                  <c:v>101</c:v>
                 </c:pt>
                 <c:pt idx="1">
                   <c:v>8</c:v>
                 </c:pt>
                 <c:pt idx="2">
-                  <c:v>2</c:v>
+                  <c:v>3</c:v>
                 </c:pt>
               </c:numCache>
             </c:numRef>
@@ -809,10 +809,10 @@
                 <c:formatCode>General</c:formatCode>
                 <c:ptCount val="8"/>
                 <c:pt idx="0">
-                  <c:v>62</c:v>
+                  <c:v>65</c:v>
                 </c:pt>
                 <c:pt idx="1">
-                  <c:v>18</c:v>
+                  <c:v>19</c:v>
                 </c:pt>
                 <c:pt idx="2">
                   <c:v>17</c:v>
@@ -827,7 +827,7 @@
                   <c:v>3</c:v>
                 </c:pt>
                 <c:pt idx="6">
-                  <c:v>1</c:v>
+                  <c:v>2</c:v>
                 </c:pt>
                 <c:pt idx="7">
                   <c:v>1</c:v>
@@ -2781,7 +2781,7 @@
                 <a:ea typeface="Arial" pitchFamily="34" charset="-122"/>
                 <a:cs typeface="Arial" pitchFamily="34" charset="-120"/>
               </a:rPr>
-              <a:t>レビュー総数：107件（6サイト）</a:t>
+              <a:t>レビュー総数：112件（6サイト）</a:t>
             </a:r>
             <a:endParaRPr lang="en-US" sz="1000" dirty="0"/>
           </a:p>
@@ -2801,7 +2801,7 @@
                 <a:ea typeface="Arial" pitchFamily="34" charset="-122"/>
                 <a:cs typeface="Arial" pitchFamily="34" charset="-120"/>
               </a:rPr>
-              <a:t>作成日：2026年3月19日</a:t>
+              <a:t>作成日：2026年3月20日</a:t>
             </a:r>
             <a:endParaRPr lang="en-US" sz="1000" dirty="0"/>
           </a:p>
@@ -3347,7 +3347,7 @@
                           <a:ea typeface="Arial" pitchFamily="34" charset="-122"/>
                           <a:cs typeface="Arial" pitchFamily="34" charset="-120"/>
                         </a:rPr>
-                        <a:t>9.08点</a:t>
+                        <a:t>9.06点</a:t>
                       </a:r>
                       <a:endParaRPr lang="en-US" sz="1000" dirty="0">
                         <a:latin typeface="Arial" charset="0"/>
@@ -3621,7 +3621,7 @@
                           <a:ea typeface="Arial" pitchFamily="34" charset="-122"/>
                           <a:cs typeface="Arial" pitchFamily="34" charset="-120"/>
                         </a:rPr>
-                        <a:t>90.7%</a:t>
+                        <a:t>90.2%</a:t>
                       </a:r>
                       <a:endParaRPr lang="en-US" sz="1000" dirty="0">
                         <a:latin typeface="Arial" charset="0"/>
@@ -3689,7 +3689,7 @@
                           <a:ea typeface="Arial" pitchFamily="34" charset="-122"/>
                           <a:cs typeface="Arial" pitchFamily="34" charset="-120"/>
                         </a:rPr>
-                        <a:t>93%以上</a:t>
+                        <a:t>92%以上</a:t>
                       </a:r>
                       <a:endParaRPr lang="en-US" sz="1000" dirty="0">
                         <a:latin typeface="Arial" charset="0"/>
@@ -3895,7 +3895,7 @@
                           <a:ea typeface="Arial" pitchFamily="34" charset="-122"/>
                           <a:cs typeface="Arial" pitchFamily="34" charset="-120"/>
                         </a:rPr>
-                        <a:t>1.9%</a:t>
+                        <a:t>2.7%</a:t>
                       </a:r>
                       <a:endParaRPr lang="en-US" sz="1000" dirty="0">
                         <a:latin typeface="Arial" charset="0"/>
@@ -3963,7 +3963,7 @@
                           <a:ea typeface="Arial" pitchFamily="34" charset="-122"/>
                           <a:cs typeface="Arial" pitchFamily="34" charset="-120"/>
                         </a:rPr>
-                        <a:t>0%維持</a:t>
+                        <a:t>0%以下</a:t>
                       </a:r>
                       <a:endParaRPr lang="en-US" sz="1000" dirty="0">
                         <a:latin typeface="Arial" charset="0"/>
@@ -4717,7 +4717,7 @@
                           <a:ea typeface="Arial" pitchFamily="34" charset="-122"/>
                           <a:cs typeface="Arial" pitchFamily="34" charset="-120"/>
                         </a:rPr>
-                        <a:t>約13件/期間</a:t>
+                        <a:t>約14件/期間</a:t>
                       </a:r>
                       <a:endParaRPr lang="en-US" sz="1000" dirty="0">
                         <a:latin typeface="Arial" charset="0"/>
@@ -4785,7 +4785,7 @@
                           <a:ea typeface="Arial" pitchFamily="34" charset="-122"/>
                           <a:cs typeface="Arial" pitchFamily="34" charset="-120"/>
                         </a:rPr>
-                        <a:t>6件以下</a:t>
+                        <a:t>7件以下</a:t>
                       </a:r>
                       <a:endParaRPr lang="en-US" sz="1000" dirty="0">
                         <a:latin typeface="Arial" charset="0"/>
@@ -5356,7 +5356,7 @@
                 <a:ea typeface="Arial" pitchFamily="34" charset="-122"/>
                 <a:cs typeface="Arial" pitchFamily="34" charset="-120"/>
               </a:rPr>
-              <a:t>9.08</a:t>
+              <a:t>9.06</a:t>
             </a:r>
             <a:endParaRPr lang="en-US" sz="3200" dirty="0"/>
           </a:p>
@@ -5481,7 +5481,7 @@
                 <a:ea typeface="Arial" pitchFamily="34" charset="-122"/>
                 <a:cs typeface="Arial" pitchFamily="34" charset="-120"/>
               </a:rPr>
-              <a:t>90.7%</a:t>
+              <a:t>90.2%</a:t>
             </a:r>
             <a:endParaRPr lang="en-US" sz="3200" dirty="0"/>
           </a:p>
@@ -5606,7 +5606,7 @@
                 <a:ea typeface="Arial" pitchFamily="34" charset="-122"/>
                 <a:cs typeface="Arial" pitchFamily="34" charset="-120"/>
               </a:rPr>
-              <a:t>1.9%</a:t>
+              <a:t>2.7%</a:t>
             </a:r>
             <a:endParaRPr lang="en-US" sz="3200" dirty="0"/>
           </a:p>
@@ -5731,7 +5731,7 @@
                 <a:ea typeface="Arial" pitchFamily="34" charset="-122"/>
                 <a:cs typeface="Arial" pitchFamily="34" charset="-120"/>
               </a:rPr>
-              <a:t>107件</a:t>
+              <a:t>112件</a:t>
             </a:r>
             <a:endParaRPr lang="en-US" sz="3200" dirty="0"/>
           </a:p>
@@ -6107,7 +6107,7 @@
                 <a:ea typeface="Arial" pitchFamily="34" charset="-122"/>
                 <a:cs typeface="Arial" pitchFamily="34" charset="-120"/>
               </a:rPr>
-              <a:t>  proximité du metro, konbini au pied de l'hotel, proximité...</a:t>
+              <a:t>  It’s my third time staying in this hotel</a:t>
             </a:r>
             <a:endParaRPr lang="en-US" sz="1100" dirty="0"/>
           </a:p>
@@ -6167,7 +6167,7 @@
                 <a:ea typeface="Arial" pitchFamily="34" charset="-122"/>
                 <a:cs typeface="Arial" pitchFamily="34" charset="-120"/>
               </a:rPr>
-              <a:t>浴室・水回り </a:t>
+              <a:t>防音性能 </a:t>
             </a:r>
             <a:endParaRPr lang="en-US" sz="1100" dirty="0"/>
           </a:p>
@@ -6187,7 +6187,7 @@
                 <a:ea typeface="Arial" pitchFamily="34" charset="-122"/>
                 <a:cs typeface="Arial" pitchFamily="34" charset="-120"/>
               </a:rPr>
-              <a:t>  ทำเลดีมาก ใกล้ทุกอย่าง ใกล้รถไฟฟ้า แอร์พอตบัส ใกล้ร้านอาห...</a:t>
+              <a:t>  窓からの音がうるさかった</a:t>
             </a:r>
             <a:endParaRPr lang="en-US" sz="1100" dirty="0"/>
           </a:p>
@@ -6540,7 +6540,7 @@
                 <a:ea typeface="Arial" pitchFamily="34" charset="-122"/>
                 <a:cs typeface="Arial" pitchFamily="34" charset="-120"/>
               </a:rPr>
-              <a:t>9.08</a:t>
+              <a:t>9.06</a:t>
             </a:r>
             <a:endParaRPr lang="en-US" sz="3200" dirty="0"/>
           </a:p>
@@ -6665,7 +6665,7 @@
                 <a:ea typeface="Arial" pitchFamily="34" charset="-122"/>
                 <a:cs typeface="Arial" pitchFamily="34" charset="-120"/>
               </a:rPr>
-              <a:t>90.7%</a:t>
+              <a:t>90.2%</a:t>
             </a:r>
             <a:endParaRPr lang="en-US" sz="3200" dirty="0"/>
           </a:p>
@@ -6790,7 +6790,7 @@
                 <a:ea typeface="Arial" pitchFamily="34" charset="-122"/>
                 <a:cs typeface="Arial" pitchFamily="34" charset="-120"/>
               </a:rPr>
-              <a:t>1.9%</a:t>
+              <a:t>2.7%</a:t>
             </a:r>
             <a:endParaRPr lang="en-US" sz="3200" dirty="0"/>
           </a:p>
@@ -6915,7 +6915,7 @@
                 <a:ea typeface="Arial" pitchFamily="34" charset="-122"/>
                 <a:cs typeface="Arial" pitchFamily="34" charset="-120"/>
               </a:rPr>
-              <a:t>107件</a:t>
+              <a:t>112件</a:t>
             </a:r>
             <a:endParaRPr lang="en-US" sz="3200" dirty="0"/>
           </a:p>
@@ -7336,7 +7336,7 @@
                 <a:ea typeface="Arial" pitchFamily="34" charset="-122"/>
                 <a:cs typeface="Arial" pitchFamily="34" charset="-120"/>
               </a:rPr>
-              <a:t>Trip.com(9.49)が最高スコア。</a:t>
+              <a:t>Trip.com(9.50)が最高スコア。</a:t>
             </a:r>
             <a:endParaRPr lang="en-US" sz="1100" dirty="0"/>
           </a:p>
@@ -7894,7 +7894,7 @@
                           <a:ea typeface="Arial" pitchFamily="34" charset="-122"/>
                           <a:cs typeface="Arial" pitchFamily="34" charset="-120"/>
                         </a:rPr>
-                        <a:t>53</a:t>
+                        <a:t>54</a:t>
                       </a:r>
                       <a:endParaRPr lang="en-US" sz="900" dirty="0">
                         <a:latin typeface="Arial" charset="0"/>
@@ -7962,7 +7962,7 @@
                           <a:ea typeface="Arial" pitchFamily="34" charset="-122"/>
                           <a:cs typeface="Arial" pitchFamily="34" charset="-120"/>
                         </a:rPr>
-                        <a:t>9.49</a:t>
+                        <a:t>9.5</a:t>
                       </a:r>
                       <a:endParaRPr lang="en-US" sz="900" dirty="0">
                         <a:latin typeface="Arial" charset="0"/>
@@ -8098,7 +8098,7 @@
                           <a:ea typeface="Arial" pitchFamily="34" charset="-122"/>
                           <a:cs typeface="Arial" pitchFamily="34" charset="-120"/>
                         </a:rPr>
-                        <a:t>9.49</a:t>
+                        <a:t>9.5</a:t>
                       </a:r>
                       <a:endParaRPr lang="en-US" sz="900" dirty="0">
                         <a:latin typeface="Arial" charset="0"/>
@@ -8236,7 +8236,7 @@
                           <a:ea typeface="Arial" pitchFamily="34" charset="-122"/>
                           <a:cs typeface="Arial" pitchFamily="34" charset="-120"/>
                         </a:rPr>
-                        <a:t>27</a:t>
+                        <a:t>29</a:t>
                       </a:r>
                       <a:endParaRPr lang="en-US" sz="900" dirty="0">
                         <a:latin typeface="Arial" charset="0"/>
@@ -8304,7 +8304,7 @@
                           <a:ea typeface="Arial" pitchFamily="34" charset="-122"/>
                           <a:cs typeface="Arial" pitchFamily="34" charset="-120"/>
                         </a:rPr>
-                        <a:t>4.63</a:t>
+                        <a:t>4.55</a:t>
                       </a:r>
                       <a:endParaRPr lang="en-US" sz="900" dirty="0">
                         <a:latin typeface="Arial" charset="0"/>
@@ -8440,7 +8440,7 @@
                           <a:ea typeface="Arial" pitchFamily="34" charset="-122"/>
                           <a:cs typeface="Arial" pitchFamily="34" charset="-120"/>
                         </a:rPr>
-                        <a:t>9.26</a:t>
+                        <a:t>9.1</a:t>
                       </a:r>
                       <a:endParaRPr lang="en-US" sz="900" dirty="0">
                         <a:latin typeface="Arial" charset="0"/>
@@ -8578,7 +8578,7 @@
                           <a:ea typeface="Arial" pitchFamily="34" charset="-122"/>
                           <a:cs typeface="Arial" pitchFamily="34" charset="-120"/>
                         </a:rPr>
-                        <a:t>19</a:t>
+                        <a:t>20</a:t>
                       </a:r>
                       <a:endParaRPr lang="en-US" sz="900" dirty="0">
                         <a:latin typeface="Arial" charset="0"/>
@@ -8646,7 +8646,7 @@
                           <a:ea typeface="Arial" pitchFamily="34" charset="-122"/>
                           <a:cs typeface="Arial" pitchFamily="34" charset="-120"/>
                         </a:rPr>
-                        <a:t>8.68</a:t>
+                        <a:t>8.7</a:t>
                       </a:r>
                       <a:endParaRPr lang="en-US" sz="900" dirty="0">
                         <a:latin typeface="Arial" charset="0"/>
@@ -8782,7 +8782,7 @@
                           <a:ea typeface="Arial" pitchFamily="34" charset="-122"/>
                           <a:cs typeface="Arial" pitchFamily="34" charset="-120"/>
                         </a:rPr>
-                        <a:t>8.68</a:t>
+                        <a:t>8.7</a:t>
                       </a:r>
                       <a:endParaRPr lang="en-US" sz="900" dirty="0">
                         <a:latin typeface="Arial" charset="0"/>
@@ -8852,75 +8852,7 @@
                           <a:ea typeface="Arial" pitchFamily="34" charset="-122"/>
                           <a:cs typeface="Arial" pitchFamily="34" charset="-120"/>
                         </a:rPr>
-                        <a:t>じゃらん</a:t>
-                      </a:r>
-                      <a:endParaRPr lang="en-US" sz="900" dirty="0">
-                        <a:latin typeface="Arial" charset="0"/>
-                        <a:ea typeface="Arial" charset="0"/>
-                        <a:cs typeface="Arial" charset="0"/>
-                      </a:endParaRPr>
-                    </a:p>
-                  </a:txBody>
-                  <a:tcPr marL="91440" marR="91440" marT="45720" marB="45720">
-                    <a:lnL w="6350" cap="flat" cmpd="sng" algn="ctr">
-                      <a:solidFill>
-                        <a:srgbClr val="CBD5E1"/>
-                      </a:solidFill>
-                      <a:prstDash val="solid"/>
-                      <a:round/>
-                      <a:headEnd type="none" w="med" len="med"/>
-                      <a:tailEnd type="none" w="med" len="med"/>
-                    </a:lnL>
-                    <a:lnR w="6350" cap="flat" cmpd="sng" algn="ctr">
-                      <a:solidFill>
-                        <a:srgbClr val="CBD5E1"/>
-                      </a:solidFill>
-                      <a:prstDash val="solid"/>
-                      <a:round/>
-                      <a:headEnd type="none" w="med" len="med"/>
-                      <a:tailEnd type="none" w="med" len="med"/>
-                    </a:lnR>
-                    <a:lnT w="6350" cap="flat" cmpd="sng" algn="ctr">
-                      <a:solidFill>
-                        <a:srgbClr val="CBD5E1"/>
-                      </a:solidFill>
-                      <a:prstDash val="solid"/>
-                      <a:round/>
-                      <a:headEnd type="none" w="med" len="med"/>
-                      <a:tailEnd type="none" w="med" len="med"/>
-                    </a:lnT>
-                    <a:lnB w="6350" cap="flat" cmpd="sng" algn="ctr">
-                      <a:solidFill>
-                        <a:srgbClr val="CBD5E1"/>
-                      </a:solidFill>
-                      <a:prstDash val="solid"/>
-                      <a:round/>
-                      <a:headEnd type="none" w="med" len="med"/>
-                      <a:tailEnd type="none" w="med" len="med"/>
-                    </a:lnB>
-                    <a:solidFill>
-                      <a:srgbClr val="FFFFFF"/>
-                    </a:solidFill>
-                  </a:tcPr>
-                </a:tc>
-                <a:tc>
-                  <a:txBody>
-                    <a:bodyPr/>
-                    <a:lstStyle/>
-                    <a:p>
-                      <a:pPr algn="ctr" indent="0" marL="0">
-                        <a:buNone/>
-                      </a:pPr>
-                      <a:r>
-                        <a:rPr lang="en-US" sz="900" dirty="0">
-                          <a:solidFill>
-                            <a:srgbClr val="000000"/>
-                          </a:solidFill>
-                          <a:latin typeface="Arial" pitchFamily="34" charset="0"/>
-                          <a:ea typeface="Arial" pitchFamily="34" charset="-122"/>
-                          <a:cs typeface="Arial" pitchFamily="34" charset="-120"/>
-                        </a:rPr>
-                        <a:t>1</a:t>
+                        <a:t>楽天トラベル</a:t>
                       </a:r>
                       <a:endParaRPr lang="en-US" sz="900" dirty="0">
                         <a:latin typeface="Arial" charset="0"/>
@@ -9056,7 +8988,7 @@
                           <a:ea typeface="Arial" pitchFamily="34" charset="-122"/>
                           <a:cs typeface="Arial" pitchFamily="34" charset="-120"/>
                         </a:rPr>
-                        <a:t>/5 (×2)</a:t>
+                        <a:t>4.25</a:t>
                       </a:r>
                       <a:endParaRPr lang="en-US" sz="900" dirty="0">
                         <a:latin typeface="Arial" charset="0"/>
@@ -9124,7 +9056,75 @@
                           <a:ea typeface="Arial" pitchFamily="34" charset="-122"/>
                           <a:cs typeface="Arial" pitchFamily="34" charset="-120"/>
                         </a:rPr>
-                        <a:t>8</a:t>
+                        <a:t>/5 (×2)</a:t>
+                      </a:r>
+                      <a:endParaRPr lang="en-US" sz="900" dirty="0">
+                        <a:latin typeface="Arial" charset="0"/>
+                        <a:ea typeface="Arial" charset="0"/>
+                        <a:cs typeface="Arial" charset="0"/>
+                      </a:endParaRPr>
+                    </a:p>
+                  </a:txBody>
+                  <a:tcPr marL="91440" marR="91440" marT="45720" marB="45720">
+                    <a:lnL w="6350" cap="flat" cmpd="sng" algn="ctr">
+                      <a:solidFill>
+                        <a:srgbClr val="CBD5E1"/>
+                      </a:solidFill>
+                      <a:prstDash val="solid"/>
+                      <a:round/>
+                      <a:headEnd type="none" w="med" len="med"/>
+                      <a:tailEnd type="none" w="med" len="med"/>
+                    </a:lnL>
+                    <a:lnR w="6350" cap="flat" cmpd="sng" algn="ctr">
+                      <a:solidFill>
+                        <a:srgbClr val="CBD5E1"/>
+                      </a:solidFill>
+                      <a:prstDash val="solid"/>
+                      <a:round/>
+                      <a:headEnd type="none" w="med" len="med"/>
+                      <a:tailEnd type="none" w="med" len="med"/>
+                    </a:lnR>
+                    <a:lnT w="6350" cap="flat" cmpd="sng" algn="ctr">
+                      <a:solidFill>
+                        <a:srgbClr val="CBD5E1"/>
+                      </a:solidFill>
+                      <a:prstDash val="solid"/>
+                      <a:round/>
+                      <a:headEnd type="none" w="med" len="med"/>
+                      <a:tailEnd type="none" w="med" len="med"/>
+                    </a:lnT>
+                    <a:lnB w="6350" cap="flat" cmpd="sng" algn="ctr">
+                      <a:solidFill>
+                        <a:srgbClr val="CBD5E1"/>
+                      </a:solidFill>
+                      <a:prstDash val="solid"/>
+                      <a:round/>
+                      <a:headEnd type="none" w="med" len="med"/>
+                      <a:tailEnd type="none" w="med" len="med"/>
+                    </a:lnB>
+                    <a:solidFill>
+                      <a:srgbClr val="FFFFFF"/>
+                    </a:solidFill>
+                  </a:tcPr>
+                </a:tc>
+                <a:tc>
+                  <a:txBody>
+                    <a:bodyPr/>
+                    <a:lstStyle/>
+                    <a:p>
+                      <a:pPr algn="ctr" indent="0" marL="0">
+                        <a:buNone/>
+                      </a:pPr>
+                      <a:r>
+                        <a:rPr lang="en-US" sz="900" dirty="0">
+                          <a:solidFill>
+                            <a:srgbClr val="000000"/>
+                          </a:solidFill>
+                          <a:latin typeface="Arial" pitchFamily="34" charset="0"/>
+                          <a:ea typeface="Arial" pitchFamily="34" charset="-122"/>
+                          <a:cs typeface="Arial" pitchFamily="34" charset="-120"/>
+                        </a:rPr>
+                        <a:t>8.5</a:t>
                       </a:r>
                       <a:endParaRPr lang="en-US" sz="900" dirty="0">
                         <a:latin typeface="Arial" charset="0"/>
@@ -9194,7 +9194,7 @@
                           <a:ea typeface="Arial" pitchFamily="34" charset="-122"/>
                           <a:cs typeface="Arial" pitchFamily="34" charset="-120"/>
                         </a:rPr>
-                        <a:t>楽天トラベル</a:t>
+                        <a:t>じゃらん</a:t>
                       </a:r>
                       <a:endParaRPr lang="en-US" sz="900" dirty="0">
                         <a:latin typeface="Arial" charset="0"/>
@@ -9262,7 +9262,7 @@
                           <a:ea typeface="Arial" pitchFamily="34" charset="-122"/>
                           <a:cs typeface="Arial" pitchFamily="34" charset="-120"/>
                         </a:rPr>
-                        <a:t>3</a:t>
+                        <a:t>1</a:t>
                       </a:r>
                       <a:endParaRPr lang="en-US" sz="900" dirty="0">
                         <a:latin typeface="Arial" charset="0"/>
@@ -10216,7 +10216,7 @@
                 <a:ea typeface="Arial" pitchFamily="34" charset="-122"/>
                 <a:cs typeface="Arial" pitchFamily="34" charset="-120"/>
               </a:rPr>
-              <a:t>97件（90.7%）</a:t>
+              <a:t>101件（90.2%）</a:t>
             </a:r>
             <a:endParaRPr lang="en-US" sz="1100" dirty="0"/>
           </a:p>
@@ -10314,7 +10314,7 @@
                 <a:ea typeface="Arial" pitchFamily="34" charset="-122"/>
                 <a:cs typeface="Arial" pitchFamily="34" charset="-120"/>
               </a:rPr>
-              <a:t>8件（7.5%）</a:t>
+              <a:t>8件（7.1%）</a:t>
             </a:r>
             <a:endParaRPr lang="en-US" sz="1100" dirty="0"/>
           </a:p>
@@ -10412,7 +10412,7 @@
                 <a:ea typeface="Arial" pitchFamily="34" charset="-122"/>
                 <a:cs typeface="Arial" pitchFamily="34" charset="-120"/>
               </a:rPr>
-              <a:t>2件（1.9%）</a:t>
+              <a:t>3件（2.7%）</a:t>
             </a:r>
             <a:endParaRPr lang="en-US" sz="1100" dirty="0"/>
           </a:p>
@@ -10863,7 +10863,7 @@
                 <a:ea typeface="Arial" pitchFamily="34" charset="-122"/>
                 <a:cs typeface="Arial" pitchFamily="34" charset="-120"/>
               </a:rPr>
-              <a:t>「proximité du metro, konbini au pied de l'hotel, proximité...」</a:t>
+              <a:t>「場所も便利な所にある」</a:t>
             </a:r>
             <a:endParaRPr lang="en-US" sz="900" dirty="0"/>
           </a:p>
@@ -11415,7 +11415,7 @@
                 <a:ea typeface="Arial" pitchFamily="34" charset="-122"/>
                 <a:cs typeface="Arial" pitchFamily="34" charset="-120"/>
               </a:rPr>
-              <a:t>10件+</a:t>
+              <a:t>20件+</a:t>
             </a:r>
             <a:endParaRPr lang="en-US" sz="900" dirty="0"/>
           </a:p>
@@ -11493,7 +11493,7 @@
                 <a:ea typeface="Arial" pitchFamily="34" charset="-122"/>
                 <a:cs typeface="Arial" pitchFamily="34" charset="-120"/>
               </a:rPr>
-              <a:t>周辺の観光スポットにとても近く、警備員の方々も非常に規律正しく、常に清掃や備品の補充を欠かしません</a:t>
+              <a:t>清潔で部屋が広く使いやすかった</a:t>
             </a:r>
             <a:endParaRPr lang="en-US" sz="900" dirty="0"/>
           </a:p>
@@ -11532,7 +11532,7 @@
                 <a:ea typeface="Arial" pitchFamily="34" charset="-122"/>
                 <a:cs typeface="Arial" pitchFamily="34" charset="-120"/>
               </a:rPr>
-              <a:t>「居心地が良く清潔で、池袋という便利な場所にあり、地下鉄で東京ハリー・ポッターエリアへも簡単にアクセスできました」</a:t>
+              <a:t>「ホテルは清潔で、枕も快適です」</a:t>
             </a:r>
             <a:endParaRPr lang="en-US" sz="900" dirty="0"/>
           </a:p>
@@ -11716,7 +11716,7 @@
                 <a:ea typeface="Arial" pitchFamily="34" charset="-122"/>
                 <a:cs typeface="Arial" pitchFamily="34" charset="-120"/>
               </a:rPr>
-              <a:t>シャワーキャップ以外のアメニティはすべて揃っています</a:t>
+              <a:t>ホテルは清潔で、枕も快適です</a:t>
             </a:r>
             <a:endParaRPr lang="en-US" sz="900" dirty="0"/>
           </a:p>
@@ -11755,7 +11755,7 @@
                 <a:ea typeface="Arial" pitchFamily="34" charset="-122"/>
                 <a:cs typeface="Arial" pitchFamily="34" charset="-120"/>
               </a:rPr>
-              <a:t>「房間挺大的，有四張床，每張床還挺大，房間温馨且衞生，地處池袋去東京哈利波特園區可地鐵直達也很方便，樓下就是一蘭拉麪...」</a:t>
+              <a:t>「シャワーキャップ以外のアメニティはすべて揃っています」</a:t>
             </a:r>
             <a:endParaRPr lang="en-US" sz="900" dirty="0"/>
           </a:p>
@@ -11861,7 +11861,7 @@
                 <a:ea typeface="Arial" pitchFamily="34" charset="-122"/>
                 <a:cs typeface="Arial" pitchFamily="34" charset="-120"/>
               </a:rPr>
-              <a:t>9件</a:t>
+              <a:t>10件+</a:t>
             </a:r>
             <a:endParaRPr lang="en-US" sz="900" dirty="0"/>
           </a:p>
@@ -11939,7 +11939,7 @@
                 <a:ea typeface="Arial" pitchFamily="34" charset="-122"/>
                 <a:cs typeface="Arial" pitchFamily="34" charset="-120"/>
               </a:rPr>
-              <a:t>この小さな町は駅にとても近く、コストパフォーマンスに優れています</a:t>
+              <a:t>料金も手頃で、公共交通機関へのアクセスも良好です</a:t>
             </a:r>
             <a:endParaRPr lang="en-US" sz="900" dirty="0"/>
           </a:p>
@@ -11978,7 +11978,7 @@
                 <a:ea typeface="Arial" pitchFamily="34" charset="-122"/>
                 <a:cs typeface="Arial" pitchFamily="34" charset="-120"/>
               </a:rPr>
-              <a:t>「小地方離車站很近 算CP值高 有吸菸室 附近很多吃的下面就有全家 この小さな町は駅からとても近いので、料金も手頃です」</a:t>
+              <a:t>「この小さな町は駅にとても近く、コストパフォーマンスに優れています」</a:t>
             </a:r>
             <a:endParaRPr lang="en-US" sz="900" dirty="0"/>
           </a:p>
@@ -12668,7 +12668,7 @@
                           <a:ea typeface="Arial" pitchFamily="34" charset="-122"/>
                           <a:cs typeface="Arial" pitchFamily="34" charset="-120"/>
                         </a:rPr>
-                        <a:t>proximité du metro, konbini au pied de l'hotel, proximité...</a:t>
+                        <a:t>It’s my third time staying in this hotel</a:t>
                       </a:r>
                       <a:endParaRPr lang="en-US" sz="900" dirty="0">
                         <a:latin typeface="Arial" charset="0"/>
@@ -12736,7 +12736,7 @@
                           <a:ea typeface="Arial" pitchFamily="34" charset="-122"/>
                           <a:cs typeface="Arial" pitchFamily="34" charset="-120"/>
                         </a:rPr>
-                        <a:t>13件</a:t>
+                        <a:t>14件</a:t>
                       </a:r>
                       <a:endParaRPr lang="en-US" sz="900" dirty="0">
                         <a:latin typeface="Arial" charset="0"/>
@@ -13010,7 +13010,7 @@
                           <a:ea typeface="Arial" pitchFamily="34" charset="-122"/>
                           <a:cs typeface="Arial" pitchFamily="34" charset="-120"/>
                         </a:rPr>
-                        <a:t>7件</a:t>
+                        <a:t>8件</a:t>
                       </a:r>
                       <a:endParaRPr lang="en-US" sz="900" dirty="0">
                         <a:latin typeface="Arial" charset="0"/>
@@ -13148,7 +13148,7 @@
                           <a:ea typeface="Arial" pitchFamily="34" charset="-122"/>
                           <a:cs typeface="Arial" pitchFamily="34" charset="-120"/>
                         </a:rPr>
-                        <a:t>浴室・水回り</a:t>
+                        <a:t>防音性能</a:t>
                       </a:r>
                       <a:endParaRPr lang="en-US" sz="900" dirty="0">
                         <a:latin typeface="Arial" charset="0"/>
@@ -13216,7 +13216,7 @@
                           <a:ea typeface="Arial" pitchFamily="34" charset="-122"/>
                           <a:cs typeface="Arial" pitchFamily="34" charset="-120"/>
                         </a:rPr>
-                        <a:t>ทำเลดีมาก ใกล้ทุกอย่าง ใกล้รถไฟฟ้า แอร์พอตบัส ใกล้ร้านอาห...</a:t>
+                        <a:t>窓からの音がうるさかった</a:t>
                       </a:r>
                       <a:endParaRPr lang="en-US" sz="900" dirty="0">
                         <a:latin typeface="Arial" charset="0"/>
@@ -13422,7 +13422,7 @@
                           <a:ea typeface="Arial" pitchFamily="34" charset="-122"/>
                           <a:cs typeface="Arial" pitchFamily="34" charset="-120"/>
                         </a:rPr>
-                        <a:t>設備の老朽化</a:t>
+                        <a:t>浴室・水回り</a:t>
                       </a:r>
                       <a:endParaRPr lang="en-US" sz="900" dirty="0">
                         <a:latin typeface="Arial" charset="0"/>
@@ -13490,7 +13490,7 @@
                           <a:ea typeface="Arial" pitchFamily="34" charset="-122"/>
                           <a:cs typeface="Arial" pitchFamily="34" charset="-120"/>
                         </a:rPr>
-                        <a:t>部屋は古いですが、とても清潔です</a:t>
+                        <a:t>ทำเลดีมาก ใกล้ทุกอย่าง ใกล้รถไฟฟ้า แอร์พอตบัส ใกล้ร้านอาห...</a:t>
                       </a:r>
                       <a:endParaRPr lang="en-US" sz="900" dirty="0">
                         <a:latin typeface="Arial" charset="0"/>
@@ -13558,7 +13558,7 @@
                           <a:ea typeface="Arial" pitchFamily="34" charset="-122"/>
                           <a:cs typeface="Arial" pitchFamily="34" charset="-120"/>
                         </a:rPr>
-                        <a:t>6件</a:t>
+                        <a:t>7件</a:t>
                       </a:r>
                       <a:endParaRPr lang="en-US" sz="900" dirty="0">
                         <a:latin typeface="Arial" charset="0"/>
@@ -13696,7 +13696,7 @@
                           <a:ea typeface="Arial" pitchFamily="34" charset="-122"/>
                           <a:cs typeface="Arial" pitchFamily="34" charset="-120"/>
                         </a:rPr>
-                        <a:t>防音性能</a:t>
+                        <a:t>設備の老朽化</a:t>
                       </a:r>
                       <a:endParaRPr lang="en-US" sz="900" dirty="0">
                         <a:latin typeface="Arial" charset="0"/>
@@ -13764,7 +13764,7 @@
                           <a:ea typeface="Arial" pitchFamily="34" charset="-122"/>
                           <a:cs typeface="Arial" pitchFamily="34" charset="-120"/>
                         </a:rPr>
-                        <a:t>夜はそんなに騒々しいとは思いませんでしたが、電車の音が小さく聞こえることは残念でした</a:t>
+                        <a:t>部屋は古いですが、とても清潔です</a:t>
                       </a:r>
                       <a:endParaRPr lang="en-US" sz="900" dirty="0">
                         <a:latin typeface="Arial" charset="0"/>
@@ -14312,7 +14312,7 @@
                           <a:ea typeface="Arial" pitchFamily="34" charset="-122"/>
                           <a:cs typeface="Arial" pitchFamily="34" charset="-120"/>
                         </a:rPr>
-                        <a:t>部屋はそれほど狭くなく、窓があり、エアコンの温度調節も可能です</a:t>
+                        <a:t>窓からの音がうるさかった</a:t>
                       </a:r>
                       <a:endParaRPr lang="en-US" sz="900" dirty="0">
                         <a:latin typeface="Arial" charset="0"/>
@@ -14380,7 +14380,7 @@
                           <a:ea typeface="Arial" pitchFamily="34" charset="-122"/>
                           <a:cs typeface="Arial" pitchFamily="34" charset="-120"/>
                         </a:rPr>
-                        <a:t>2件</a:t>
+                        <a:t>3件</a:t>
                       </a:r>
                       <a:endParaRPr lang="en-US" sz="900" dirty="0">
                         <a:latin typeface="Arial" charset="0"/>

--- a/納品レポート/ホテル別レポート/daiichi_ikebukuro_口コミ分析レポート.pptx
+++ b/納品レポート/ホテル別レポート/daiichi_ikebukuro_口コミ分析レポート.pptx
@@ -208,7 +208,7 @@
                 <c:formatCode>General</c:formatCode>
                 <c:ptCount val="6"/>
                 <c:pt idx="0">
-                  <c:v>9.5</c:v>
+                  <c:v>9.52</c:v>
                 </c:pt>
                 <c:pt idx="1">
                   <c:v>9.1</c:v>
@@ -566,7 +566,7 @@
               <c:numCache>
                 <c:ptCount val="3"/>
                 <c:pt idx="0">
-                  <c:v>101</c:v>
+                  <c:v>103</c:v>
                 </c:pt>
                 <c:pt idx="1">
                   <c:v>8</c:v>
@@ -809,7 +809,7 @@
                 <c:formatCode>General</c:formatCode>
                 <c:ptCount val="8"/>
                 <c:pt idx="0">
-                  <c:v>65</c:v>
+                  <c:v>67</c:v>
                 </c:pt>
                 <c:pt idx="1">
                   <c:v>19</c:v>
@@ -2781,7 +2781,7 @@
                 <a:ea typeface="Arial" pitchFamily="34" charset="-122"/>
                 <a:cs typeface="Arial" pitchFamily="34" charset="-120"/>
               </a:rPr>
-              <a:t>レビュー総数：112件（6サイト）</a:t>
+              <a:t>レビュー総数：114件（6サイト）</a:t>
             </a:r>
             <a:endParaRPr lang="en-US" sz="1000" dirty="0"/>
           </a:p>
@@ -2801,7 +2801,7 @@
                 <a:ea typeface="Arial" pitchFamily="34" charset="-122"/>
                 <a:cs typeface="Arial" pitchFamily="34" charset="-120"/>
               </a:rPr>
-              <a:t>作成日：2026年3月20日</a:t>
+              <a:t>作成日：2026年3月21日</a:t>
             </a:r>
             <a:endParaRPr lang="en-US" sz="1000" dirty="0"/>
           </a:p>
@@ -3347,7 +3347,7 @@
                           <a:ea typeface="Arial" pitchFamily="34" charset="-122"/>
                           <a:cs typeface="Arial" pitchFamily="34" charset="-120"/>
                         </a:rPr>
-                        <a:t>9.06点</a:t>
+                        <a:t>9.08点</a:t>
                       </a:r>
                       <a:endParaRPr lang="en-US" sz="1000" dirty="0">
                         <a:latin typeface="Arial" charset="0"/>
@@ -3621,7 +3621,7 @@
                           <a:ea typeface="Arial" pitchFamily="34" charset="-122"/>
                           <a:cs typeface="Arial" pitchFamily="34" charset="-120"/>
                         </a:rPr>
-                        <a:t>90.2%</a:t>
+                        <a:t>90.4%</a:t>
                       </a:r>
                       <a:endParaRPr lang="en-US" sz="1000" dirty="0">
                         <a:latin typeface="Arial" charset="0"/>
@@ -3895,7 +3895,7 @@
                           <a:ea typeface="Arial" pitchFamily="34" charset="-122"/>
                           <a:cs typeface="Arial" pitchFamily="34" charset="-120"/>
                         </a:rPr>
-                        <a:t>2.7%</a:t>
+                        <a:t>2.6%</a:t>
                       </a:r>
                       <a:endParaRPr lang="en-US" sz="1000" dirty="0">
                         <a:latin typeface="Arial" charset="0"/>
@@ -4717,7 +4717,7 @@
                           <a:ea typeface="Arial" pitchFamily="34" charset="-122"/>
                           <a:cs typeface="Arial" pitchFamily="34" charset="-120"/>
                         </a:rPr>
-                        <a:t>約14件/期間</a:t>
+                        <a:t>約15件/期間</a:t>
                       </a:r>
                       <a:endParaRPr lang="en-US" sz="1000" dirty="0">
                         <a:latin typeface="Arial" charset="0"/>
@@ -5356,7 +5356,7 @@
                 <a:ea typeface="Arial" pitchFamily="34" charset="-122"/>
                 <a:cs typeface="Arial" pitchFamily="34" charset="-120"/>
               </a:rPr>
-              <a:t>9.06</a:t>
+              <a:t>9.08</a:t>
             </a:r>
             <a:endParaRPr lang="en-US" sz="3200" dirty="0"/>
           </a:p>
@@ -5481,7 +5481,7 @@
                 <a:ea typeface="Arial" pitchFamily="34" charset="-122"/>
                 <a:cs typeface="Arial" pitchFamily="34" charset="-120"/>
               </a:rPr>
-              <a:t>90.2%</a:t>
+              <a:t>90.4%</a:t>
             </a:r>
             <a:endParaRPr lang="en-US" sz="3200" dirty="0"/>
           </a:p>
@@ -5606,7 +5606,7 @@
                 <a:ea typeface="Arial" pitchFamily="34" charset="-122"/>
                 <a:cs typeface="Arial" pitchFamily="34" charset="-120"/>
               </a:rPr>
-              <a:t>2.7%</a:t>
+              <a:t>2.6%</a:t>
             </a:r>
             <a:endParaRPr lang="en-US" sz="3200" dirty="0"/>
           </a:p>
@@ -5731,7 +5731,7 @@
                 <a:ea typeface="Arial" pitchFamily="34" charset="-122"/>
                 <a:cs typeface="Arial" pitchFamily="34" charset="-120"/>
               </a:rPr>
-              <a:t>112件</a:t>
+              <a:t>114件</a:t>
             </a:r>
             <a:endParaRPr lang="en-US" sz="3200" dirty="0"/>
           </a:p>
@@ -5879,7 +5879,7 @@
                 <a:ea typeface="Arial" pitchFamily="34" charset="-122"/>
                 <a:cs typeface="Arial" pitchFamily="34" charset="-120"/>
               </a:rPr>
-              <a:t>  在池袋東出口非常的方便 隔壁就是一蘭拉麵 如果第一次來行李有點多不太建議 因為離出口站沒有電梯可以搭乘房間如果一個...</a:t>
+              <a:t>  JR池袋駅からも近く、便利な立地です</a:t>
             </a:r>
             <a:endParaRPr lang="en-US" sz="1100" dirty="0"/>
           </a:p>
@@ -5959,7 +5959,7 @@
                 <a:ea typeface="Arial" pitchFamily="34" charset="-122"/>
                 <a:cs typeface="Arial" pitchFamily="34" charset="-120"/>
               </a:rPr>
-              <a:t>  ロビーのスタッフはとても丁寧で、荷物預かりサービスもあるので大変便利です</a:t>
+              <a:t>  客室は他のホテルよりもずっと広く、サービスも素晴らしく、何よりも地下鉄の駅に近く、近隣のショッピングにも便利です</a:t>
             </a:r>
             <a:endParaRPr lang="en-US" sz="1100" dirty="0"/>
           </a:p>
@@ -6107,7 +6107,7 @@
                 <a:ea typeface="Arial" pitchFamily="34" charset="-122"/>
                 <a:cs typeface="Arial" pitchFamily="34" charset="-120"/>
               </a:rPr>
-              <a:t>  It’s my third time staying in this hotel</a:t>
+              <a:t>  เตียงขนาดกำลังดี มีแอร์แยก หน้าต่างเปิดได้ เดินทางสะดวกอย...</a:t>
             </a:r>
             <a:endParaRPr lang="en-US" sz="1100" dirty="0"/>
           </a:p>
@@ -6540,7 +6540,7 @@
                 <a:ea typeface="Arial" pitchFamily="34" charset="-122"/>
                 <a:cs typeface="Arial" pitchFamily="34" charset="-120"/>
               </a:rPr>
-              <a:t>9.06</a:t>
+              <a:t>9.08</a:t>
             </a:r>
             <a:endParaRPr lang="en-US" sz="3200" dirty="0"/>
           </a:p>
@@ -6665,7 +6665,7 @@
                 <a:ea typeface="Arial" pitchFamily="34" charset="-122"/>
                 <a:cs typeface="Arial" pitchFamily="34" charset="-120"/>
               </a:rPr>
-              <a:t>90.2%</a:t>
+              <a:t>90.4%</a:t>
             </a:r>
             <a:endParaRPr lang="en-US" sz="3200" dirty="0"/>
           </a:p>
@@ -6790,7 +6790,7 @@
                 <a:ea typeface="Arial" pitchFamily="34" charset="-122"/>
                 <a:cs typeface="Arial" pitchFamily="34" charset="-120"/>
               </a:rPr>
-              <a:t>2.7%</a:t>
+              <a:t>2.6%</a:t>
             </a:r>
             <a:endParaRPr lang="en-US" sz="3200" dirty="0"/>
           </a:p>
@@ -6915,7 +6915,7 @@
                 <a:ea typeface="Arial" pitchFamily="34" charset="-122"/>
                 <a:cs typeface="Arial" pitchFamily="34" charset="-120"/>
               </a:rPr>
-              <a:t>112件</a:t>
+              <a:t>114件</a:t>
             </a:r>
             <a:endParaRPr lang="en-US" sz="3200" dirty="0"/>
           </a:p>
@@ -7336,7 +7336,7 @@
                 <a:ea typeface="Arial" pitchFamily="34" charset="-122"/>
                 <a:cs typeface="Arial" pitchFamily="34" charset="-120"/>
               </a:rPr>
-              <a:t>Trip.com(9.50)が最高スコア。</a:t>
+              <a:t>Trip.com(9.52)が最高スコア。</a:t>
             </a:r>
             <a:endParaRPr lang="en-US" sz="1100" dirty="0"/>
           </a:p>
@@ -7894,7 +7894,7 @@
                           <a:ea typeface="Arial" pitchFamily="34" charset="-122"/>
                           <a:cs typeface="Arial" pitchFamily="34" charset="-120"/>
                         </a:rPr>
-                        <a:t>54</a:t>
+                        <a:t>56</a:t>
                       </a:r>
                       <a:endParaRPr lang="en-US" sz="900" dirty="0">
                         <a:latin typeface="Arial" charset="0"/>
@@ -7962,7 +7962,7 @@
                           <a:ea typeface="Arial" pitchFamily="34" charset="-122"/>
                           <a:cs typeface="Arial" pitchFamily="34" charset="-120"/>
                         </a:rPr>
-                        <a:t>9.5</a:t>
+                        <a:t>9.52</a:t>
                       </a:r>
                       <a:endParaRPr lang="en-US" sz="900" dirty="0">
                         <a:latin typeface="Arial" charset="0"/>
@@ -8098,7 +8098,7 @@
                           <a:ea typeface="Arial" pitchFamily="34" charset="-122"/>
                           <a:cs typeface="Arial" pitchFamily="34" charset="-120"/>
                         </a:rPr>
-                        <a:t>9.5</a:t>
+                        <a:t>9.52</a:t>
                       </a:r>
                       <a:endParaRPr lang="en-US" sz="900" dirty="0">
                         <a:latin typeface="Arial" charset="0"/>
@@ -10216,7 +10216,7 @@
                 <a:ea typeface="Arial" pitchFamily="34" charset="-122"/>
                 <a:cs typeface="Arial" pitchFamily="34" charset="-120"/>
               </a:rPr>
-              <a:t>101件（90.2%）</a:t>
+              <a:t>103件（90.4%）</a:t>
             </a:r>
             <a:endParaRPr lang="en-US" sz="1100" dirty="0"/>
           </a:p>
@@ -10314,7 +10314,7 @@
                 <a:ea typeface="Arial" pitchFamily="34" charset="-122"/>
                 <a:cs typeface="Arial" pitchFamily="34" charset="-120"/>
               </a:rPr>
-              <a:t>8件（7.1%）</a:t>
+              <a:t>8件（7.0%）</a:t>
             </a:r>
             <a:endParaRPr lang="en-US" sz="1100" dirty="0"/>
           </a:p>
@@ -10412,7 +10412,7 @@
                 <a:ea typeface="Arial" pitchFamily="34" charset="-122"/>
                 <a:cs typeface="Arial" pitchFamily="34" charset="-120"/>
               </a:rPr>
-              <a:t>3件（2.7%）</a:t>
+              <a:t>3件（2.6%）</a:t>
             </a:r>
             <a:endParaRPr lang="en-US" sz="1100" dirty="0"/>
           </a:p>
@@ -10824,7 +10824,7 @@
                 <a:ea typeface="Arial" pitchFamily="34" charset="-122"/>
                 <a:cs typeface="Arial" pitchFamily="34" charset="-120"/>
               </a:rPr>
-              <a:t>在池袋東出口非常的方便 隔壁就是一蘭拉麵 如果第一次來行李有點多不太建議 因為離出口站沒有電梯可以搭乘房間如果一個...</a:t>
+              <a:t>JR池袋駅からも近く、便利な立地です</a:t>
             </a:r>
             <a:endParaRPr lang="en-US" sz="900" dirty="0"/>
           </a:p>
@@ -10863,7 +10863,7 @@
                 <a:ea typeface="Arial" pitchFamily="34" charset="-122"/>
                 <a:cs typeface="Arial" pitchFamily="34" charset="-120"/>
               </a:rPr>
-              <a:t>「場所も便利な所にある」</a:t>
+              <a:t>「客室は他のホテルよりもずっと広く、サービスも素晴らしく、何よりも地下鉄の駅に近く、近隣のショッピングにも便利です」</a:t>
             </a:r>
             <a:endParaRPr lang="en-US" sz="900" dirty="0"/>
           </a:p>
@@ -11270,7 +11270,7 @@
                 <a:ea typeface="Arial" pitchFamily="34" charset="-122"/>
                 <a:cs typeface="Arial" pitchFamily="34" charset="-120"/>
               </a:rPr>
-              <a:t>ロビーのスタッフはとても丁寧で、荷物預かりサービスもあるので大変便利です</a:t>
+              <a:t>客室は他のホテルよりもずっと広く、サービスも素晴らしく、何よりも地下鉄の駅に近く、近隣のショッピングにも便利です</a:t>
             </a:r>
             <a:endParaRPr lang="en-US" sz="900" dirty="0"/>
           </a:p>
@@ -11309,7 +11309,7 @@
                 <a:ea typeface="Arial" pitchFamily="34" charset="-122"/>
                 <a:cs typeface="Arial" pitchFamily="34" charset="-120"/>
               </a:rPr>
-              <a:t>「スタッフは親切で協力的です」</a:t>
+              <a:t>「ロビーのスタッフはとても丁寧で、荷物預かりサービスもあるので大変便利です」</a:t>
             </a:r>
             <a:endParaRPr lang="en-US" sz="900" dirty="0"/>
           </a:p>
@@ -11716,7 +11716,7 @@
                 <a:ea typeface="Arial" pitchFamily="34" charset="-122"/>
                 <a:cs typeface="Arial" pitchFamily="34" charset="-120"/>
               </a:rPr>
-              <a:t>ホテルは清潔で、枕も快適です</a:t>
+              <a:t>เตียงขนาดกำลังดี มีแอร์แยก หน้าต่างเปิดได้ เดินทางสะดวกอย...</a:t>
             </a:r>
             <a:endParaRPr lang="en-US" sz="900" dirty="0"/>
           </a:p>
@@ -11755,7 +11755,7 @@
                 <a:ea typeface="Arial" pitchFamily="34" charset="-122"/>
                 <a:cs typeface="Arial" pitchFamily="34" charset="-120"/>
               </a:rPr>
-              <a:t>「シャワーキャップ以外のアメニティはすべて揃っています」</a:t>
+              <a:t>「ホテルは清潔で、枕も快適です」</a:t>
             </a:r>
             <a:endParaRPr lang="en-US" sz="900" dirty="0"/>
           </a:p>
@@ -12668,7 +12668,7 @@
                           <a:ea typeface="Arial" pitchFamily="34" charset="-122"/>
                           <a:cs typeface="Arial" pitchFamily="34" charset="-120"/>
                         </a:rPr>
-                        <a:t>It’s my third time staying in this hotel</a:t>
+                        <a:t>เตียงขนาดกำลังดี มีแอร์แยก หน้าต่างเปิดได้ เดินทางสะดวกอย...</a:t>
                       </a:r>
                       <a:endParaRPr lang="en-US" sz="900" dirty="0">
                         <a:latin typeface="Arial" charset="0"/>
@@ -12736,7 +12736,7 @@
                           <a:ea typeface="Arial" pitchFamily="34" charset="-122"/>
                           <a:cs typeface="Arial" pitchFamily="34" charset="-120"/>
                         </a:rPr>
-                        <a:t>14件</a:t>
+                        <a:t>15件</a:t>
                       </a:r>
                       <a:endParaRPr lang="en-US" sz="900" dirty="0">
                         <a:latin typeface="Arial" charset="0"/>
@@ -14312,7 +14312,7 @@
                           <a:ea typeface="Arial" pitchFamily="34" charset="-122"/>
                           <a:cs typeface="Arial" pitchFamily="34" charset="-120"/>
                         </a:rPr>
-                        <a:t>窓からの音がうるさかった</a:t>
+                        <a:t>เตียงขนาดกำลังดี มีแอร์แยก หน้าต่างเปิดได้ เดินทางสะดวกอย...</a:t>
                       </a:r>
                       <a:endParaRPr lang="en-US" sz="900" dirty="0">
                         <a:latin typeface="Arial" charset="0"/>
@@ -14380,7 +14380,7 @@
                           <a:ea typeface="Arial" pitchFamily="34" charset="-122"/>
                           <a:cs typeface="Arial" pitchFamily="34" charset="-120"/>
                         </a:rPr>
-                        <a:t>3件</a:t>
+                        <a:t>4件</a:t>
                       </a:r>
                       <a:endParaRPr lang="en-US" sz="900" dirty="0">
                         <a:latin typeface="Arial" charset="0"/>

--- a/納品レポート/ホテル別レポート/daiichi_ikebukuro_口コミ分析レポート.pptx
+++ b/納品レポート/ホテル別レポート/daiichi_ikebukuro_口コミ分析レポート.pptx
@@ -208,13 +208,13 @@
                 <c:formatCode>General</c:formatCode>
                 <c:ptCount val="6"/>
                 <c:pt idx="0">
-                  <c:v>9.52</c:v>
+                  <c:v>9.56</c:v>
                 </c:pt>
                 <c:pt idx="1">
                   <c:v>9.1</c:v>
                 </c:pt>
                 <c:pt idx="2">
-                  <c:v>8.7</c:v>
+                  <c:v>8.76</c:v>
                 </c:pt>
                 <c:pt idx="3">
                   <c:v>8.5</c:v>
@@ -566,7 +566,7 @@
               <c:numCache>
                 <c:ptCount val="3"/>
                 <c:pt idx="0">
-                  <c:v>103</c:v>
+                  <c:v>109</c:v>
                 </c:pt>
                 <c:pt idx="1">
                   <c:v>8</c:v>
@@ -809,7 +809,7 @@
                 <c:formatCode>General</c:formatCode>
                 <c:ptCount val="8"/>
                 <c:pt idx="0">
-                  <c:v>67</c:v>
+                  <c:v>73</c:v>
                 </c:pt>
                 <c:pt idx="1">
                   <c:v>19</c:v>
@@ -2781,7 +2781,7 @@
                 <a:ea typeface="Arial" pitchFamily="34" charset="-122"/>
                 <a:cs typeface="Arial" pitchFamily="34" charset="-120"/>
               </a:rPr>
-              <a:t>レビュー総数：114件（6サイト）</a:t>
+              <a:t>レビュー総数：120件（6サイト）</a:t>
             </a:r>
             <a:endParaRPr lang="en-US" sz="1000" dirty="0"/>
           </a:p>
@@ -2801,7 +2801,7 @@
                 <a:ea typeface="Arial" pitchFamily="34" charset="-122"/>
                 <a:cs typeface="Arial" pitchFamily="34" charset="-120"/>
               </a:rPr>
-              <a:t>作成日：2026年3月21日</a:t>
+              <a:t>作成日：2026年3月23日</a:t>
             </a:r>
             <a:endParaRPr lang="en-US" sz="1000" dirty="0"/>
           </a:p>
@@ -3347,7 +3347,7 @@
                           <a:ea typeface="Arial" pitchFamily="34" charset="-122"/>
                           <a:cs typeface="Arial" pitchFamily="34" charset="-120"/>
                         </a:rPr>
-                        <a:t>9.08点</a:t>
+                        <a:t>9.12点</a:t>
                       </a:r>
                       <a:endParaRPr lang="en-US" sz="1000" dirty="0">
                         <a:latin typeface="Arial" charset="0"/>
@@ -3621,7 +3621,7 @@
                           <a:ea typeface="Arial" pitchFamily="34" charset="-122"/>
                           <a:cs typeface="Arial" pitchFamily="34" charset="-120"/>
                         </a:rPr>
-                        <a:t>90.4%</a:t>
+                        <a:t>90.8%</a:t>
                       </a:r>
                       <a:endParaRPr lang="en-US" sz="1000" dirty="0">
                         <a:latin typeface="Arial" charset="0"/>
@@ -3689,7 +3689,7 @@
                           <a:ea typeface="Arial" pitchFamily="34" charset="-122"/>
                           <a:cs typeface="Arial" pitchFamily="34" charset="-120"/>
                         </a:rPr>
-                        <a:t>92%以上</a:t>
+                        <a:t>93%以上</a:t>
                       </a:r>
                       <a:endParaRPr lang="en-US" sz="1000" dirty="0">
                         <a:latin typeface="Arial" charset="0"/>
@@ -3895,7 +3895,7 @@
                           <a:ea typeface="Arial" pitchFamily="34" charset="-122"/>
                           <a:cs typeface="Arial" pitchFamily="34" charset="-120"/>
                         </a:rPr>
-                        <a:t>2.6%</a:t>
+                        <a:t>2.5%</a:t>
                       </a:r>
                       <a:endParaRPr lang="en-US" sz="1000" dirty="0">
                         <a:latin typeface="Arial" charset="0"/>
@@ -4717,7 +4717,7 @@
                           <a:ea typeface="Arial" pitchFamily="34" charset="-122"/>
                           <a:cs typeface="Arial" pitchFamily="34" charset="-120"/>
                         </a:rPr>
-                        <a:t>約15件/期間</a:t>
+                        <a:t>約17件/期間</a:t>
                       </a:r>
                       <a:endParaRPr lang="en-US" sz="1000" dirty="0">
                         <a:latin typeface="Arial" charset="0"/>
@@ -4785,7 +4785,7 @@
                           <a:ea typeface="Arial" pitchFamily="34" charset="-122"/>
                           <a:cs typeface="Arial" pitchFamily="34" charset="-120"/>
                         </a:rPr>
-                        <a:t>7件以下</a:t>
+                        <a:t>8件以下</a:t>
                       </a:r>
                       <a:endParaRPr lang="en-US" sz="1000" dirty="0">
                         <a:latin typeface="Arial" charset="0"/>
@@ -5356,7 +5356,7 @@
                 <a:ea typeface="Arial" pitchFamily="34" charset="-122"/>
                 <a:cs typeface="Arial" pitchFamily="34" charset="-120"/>
               </a:rPr>
-              <a:t>9.08</a:t>
+              <a:t>9.12</a:t>
             </a:r>
             <a:endParaRPr lang="en-US" sz="3200" dirty="0"/>
           </a:p>
@@ -5481,7 +5481,7 @@
                 <a:ea typeface="Arial" pitchFamily="34" charset="-122"/>
                 <a:cs typeface="Arial" pitchFamily="34" charset="-120"/>
               </a:rPr>
-              <a:t>90.4%</a:t>
+              <a:t>90.8%</a:t>
             </a:r>
             <a:endParaRPr lang="en-US" sz="3200" dirty="0"/>
           </a:p>
@@ -5606,7 +5606,7 @@
                 <a:ea typeface="Arial" pitchFamily="34" charset="-122"/>
                 <a:cs typeface="Arial" pitchFamily="34" charset="-120"/>
               </a:rPr>
-              <a:t>2.6%</a:t>
+              <a:t>2.5%</a:t>
             </a:r>
             <a:endParaRPr lang="en-US" sz="3200" dirty="0"/>
           </a:p>
@@ -5731,7 +5731,7 @@
                 <a:ea typeface="Arial" pitchFamily="34" charset="-122"/>
                 <a:cs typeface="Arial" pitchFamily="34" charset="-120"/>
               </a:rPr>
-              <a:t>114件</a:t>
+              <a:t>120件</a:t>
             </a:r>
             <a:endParaRPr lang="en-US" sz="3200" dirty="0"/>
           </a:p>
@@ -5879,7 +5879,7 @@
                 <a:ea typeface="Arial" pitchFamily="34" charset="-122"/>
                 <a:cs typeface="Arial" pitchFamily="34" charset="-120"/>
               </a:rPr>
-              <a:t>  JR池袋駅からも近く、便利な立地です</a:t>
+              <a:t>  池袋駅に近いです</a:t>
             </a:r>
             <a:endParaRPr lang="en-US" sz="1100" dirty="0"/>
           </a:p>
@@ -5919,7 +5919,7 @@
                 <a:ea typeface="Arial" pitchFamily="34" charset="-122"/>
                 <a:cs typeface="Arial" pitchFamily="34" charset="-120"/>
               </a:rPr>
-              <a:t>  ทำเลดีมาก ใกล้ทุกอย่าง ใกล้รถไฟฟ้า แอร์พอตบัส ใกล้ร้านอาห...</a:t>
+              <a:t>  周辺にはレストランや軽食店も数多くあり、様々な選択肢があります</a:t>
             </a:r>
             <a:endParaRPr lang="en-US" sz="1100" dirty="0"/>
           </a:p>
@@ -6107,7 +6107,7 @@
                 <a:ea typeface="Arial" pitchFamily="34" charset="-122"/>
                 <a:cs typeface="Arial" pitchFamily="34" charset="-120"/>
               </a:rPr>
-              <a:t>  เตียงขนาดกำลังดี มีแอร์แยก หน้าต่างเปิดได้ เดินทางสะดวกอย...</a:t>
+              <a:t>  good place to stay while in japan</a:t>
             </a:r>
             <a:endParaRPr lang="en-US" sz="1100" dirty="0"/>
           </a:p>
@@ -6540,7 +6540,7 @@
                 <a:ea typeface="Arial" pitchFamily="34" charset="-122"/>
                 <a:cs typeface="Arial" pitchFamily="34" charset="-120"/>
               </a:rPr>
-              <a:t>9.08</a:t>
+              <a:t>9.12</a:t>
             </a:r>
             <a:endParaRPr lang="en-US" sz="3200" dirty="0"/>
           </a:p>
@@ -6665,7 +6665,7 @@
                 <a:ea typeface="Arial" pitchFamily="34" charset="-122"/>
                 <a:cs typeface="Arial" pitchFamily="34" charset="-120"/>
               </a:rPr>
-              <a:t>90.4%</a:t>
+              <a:t>90.8%</a:t>
             </a:r>
             <a:endParaRPr lang="en-US" sz="3200" dirty="0"/>
           </a:p>
@@ -6790,7 +6790,7 @@
                 <a:ea typeface="Arial" pitchFamily="34" charset="-122"/>
                 <a:cs typeface="Arial" pitchFamily="34" charset="-120"/>
               </a:rPr>
-              <a:t>2.6%</a:t>
+              <a:t>2.5%</a:t>
             </a:r>
             <a:endParaRPr lang="en-US" sz="3200" dirty="0"/>
           </a:p>
@@ -6915,7 +6915,7 @@
                 <a:ea typeface="Arial" pitchFamily="34" charset="-122"/>
                 <a:cs typeface="Arial" pitchFamily="34" charset="-120"/>
               </a:rPr>
-              <a:t>114件</a:t>
+              <a:t>120件</a:t>
             </a:r>
             <a:endParaRPr lang="en-US" sz="3200" dirty="0"/>
           </a:p>
@@ -7336,7 +7336,7 @@
                 <a:ea typeface="Arial" pitchFamily="34" charset="-122"/>
                 <a:cs typeface="Arial" pitchFamily="34" charset="-120"/>
               </a:rPr>
-              <a:t>Trip.com(9.52)が最高スコア。</a:t>
+              <a:t>Trip.com(9.56)が最高スコア。</a:t>
             </a:r>
             <a:endParaRPr lang="en-US" sz="1100" dirty="0"/>
           </a:p>
@@ -7894,7 +7894,7 @@
                           <a:ea typeface="Arial" pitchFamily="34" charset="-122"/>
                           <a:cs typeface="Arial" pitchFamily="34" charset="-120"/>
                         </a:rPr>
-                        <a:t>56</a:t>
+                        <a:t>61</a:t>
                       </a:r>
                       <a:endParaRPr lang="en-US" sz="900" dirty="0">
                         <a:latin typeface="Arial" charset="0"/>
@@ -7962,7 +7962,7 @@
                           <a:ea typeface="Arial" pitchFamily="34" charset="-122"/>
                           <a:cs typeface="Arial" pitchFamily="34" charset="-120"/>
                         </a:rPr>
-                        <a:t>9.52</a:t>
+                        <a:t>9.56</a:t>
                       </a:r>
                       <a:endParaRPr lang="en-US" sz="900" dirty="0">
                         <a:latin typeface="Arial" charset="0"/>
@@ -8098,7 +8098,7 @@
                           <a:ea typeface="Arial" pitchFamily="34" charset="-122"/>
                           <a:cs typeface="Arial" pitchFamily="34" charset="-120"/>
                         </a:rPr>
-                        <a:t>9.52</a:t>
+                        <a:t>9.56</a:t>
                       </a:r>
                       <a:endParaRPr lang="en-US" sz="900" dirty="0">
                         <a:latin typeface="Arial" charset="0"/>
@@ -8578,7 +8578,7 @@
                           <a:ea typeface="Arial" pitchFamily="34" charset="-122"/>
                           <a:cs typeface="Arial" pitchFamily="34" charset="-120"/>
                         </a:rPr>
-                        <a:t>20</a:t>
+                        <a:t>21</a:t>
                       </a:r>
                       <a:endParaRPr lang="en-US" sz="900" dirty="0">
                         <a:latin typeface="Arial" charset="0"/>
@@ -8646,7 +8646,7 @@
                           <a:ea typeface="Arial" pitchFamily="34" charset="-122"/>
                           <a:cs typeface="Arial" pitchFamily="34" charset="-120"/>
                         </a:rPr>
-                        <a:t>8.7</a:t>
+                        <a:t>8.76</a:t>
                       </a:r>
                       <a:endParaRPr lang="en-US" sz="900" dirty="0">
                         <a:latin typeface="Arial" charset="0"/>
@@ -8782,7 +8782,7 @@
                           <a:ea typeface="Arial" pitchFamily="34" charset="-122"/>
                           <a:cs typeface="Arial" pitchFamily="34" charset="-120"/>
                         </a:rPr>
-                        <a:t>8.7</a:t>
+                        <a:t>8.76</a:t>
                       </a:r>
                       <a:endParaRPr lang="en-US" sz="900" dirty="0">
                         <a:latin typeface="Arial" charset="0"/>
@@ -10216,7 +10216,7 @@
                 <a:ea typeface="Arial" pitchFamily="34" charset="-122"/>
                 <a:cs typeface="Arial" pitchFamily="34" charset="-120"/>
               </a:rPr>
-              <a:t>103件（90.4%）</a:t>
+              <a:t>109件（90.8%）</a:t>
             </a:r>
             <a:endParaRPr lang="en-US" sz="1100" dirty="0"/>
           </a:p>
@@ -10314,7 +10314,7 @@
                 <a:ea typeface="Arial" pitchFamily="34" charset="-122"/>
                 <a:cs typeface="Arial" pitchFamily="34" charset="-120"/>
               </a:rPr>
-              <a:t>8件（7.0%）</a:t>
+              <a:t>8件（6.7%）</a:t>
             </a:r>
             <a:endParaRPr lang="en-US" sz="1100" dirty="0"/>
           </a:p>
@@ -10412,7 +10412,7 @@
                 <a:ea typeface="Arial" pitchFamily="34" charset="-122"/>
                 <a:cs typeface="Arial" pitchFamily="34" charset="-120"/>
               </a:rPr>
-              <a:t>3件（2.6%）</a:t>
+              <a:t>3件（2.5%）</a:t>
             </a:r>
             <a:endParaRPr lang="en-US" sz="1100" dirty="0"/>
           </a:p>
@@ -10824,7 +10824,7 @@
                 <a:ea typeface="Arial" pitchFamily="34" charset="-122"/>
                 <a:cs typeface="Arial" pitchFamily="34" charset="-120"/>
               </a:rPr>
-              <a:t>JR池袋駅からも近く、便利な立地です</a:t>
+              <a:t>池袋駅に近いです</a:t>
             </a:r>
             <a:endParaRPr lang="en-US" sz="900" dirty="0"/>
           </a:p>
@@ -10863,7 +10863,7 @@
                 <a:ea typeface="Arial" pitchFamily="34" charset="-122"/>
                 <a:cs typeface="Arial" pitchFamily="34" charset="-120"/>
               </a:rPr>
-              <a:t>「客室は他のホテルよりもずっと広く、サービスも素晴らしく、何よりも地下鉄の駅に近く、近隣のショッピングにも便利です」</a:t>
+              <a:t>「立地も非常に便利で、駅から徒歩わずか数分なので、交通の便も抜群です」</a:t>
             </a:r>
             <a:endParaRPr lang="en-US" sz="900" dirty="0"/>
           </a:p>
@@ -11047,7 +11047,7 @@
                 <a:ea typeface="Arial" pitchFamily="34" charset="-122"/>
                 <a:cs typeface="Arial" pitchFamily="34" charset="-120"/>
               </a:rPr>
-              <a:t>ทำเลดีมาก ใกล้ทุกอย่าง ใกล้รถไฟฟ้า แอร์พอตบัส ใกล้ร้านอาห...</a:t>
+              <a:t>周辺にはレストランや軽食店も数多くあり、様々な選択肢があります</a:t>
             </a:r>
             <a:endParaRPr lang="en-US" sz="900" dirty="0"/>
           </a:p>
@@ -11086,7 +11086,7 @@
                 <a:ea typeface="Arial" pitchFamily="34" charset="-122"/>
                 <a:cs typeface="Arial" pitchFamily="34" charset="-120"/>
               </a:rPr>
-              <a:t>「ホテルの周辺には多くのレストランがあり、ファミリーマートやセブンイレブンもすぐ近くにあります」</a:t>
+              <a:t>「ใกล้รถไฟ ร้านอาหารเยอะ สะดวกมากๆ 駅に近く、レストランもたくさんあって、とても便利です」</a:t>
             </a:r>
             <a:endParaRPr lang="en-US" sz="900" dirty="0"/>
           </a:p>
@@ -11493,7 +11493,7 @@
                 <a:ea typeface="Arial" pitchFamily="34" charset="-122"/>
                 <a:cs typeface="Arial" pitchFamily="34" charset="-120"/>
               </a:rPr>
-              <a:t>清潔で部屋が広く使いやすかった</a:t>
+              <a:t>部屋はとても清潔で、広々として快適で、ベッドは柔らかくて心地よかったです</a:t>
             </a:r>
             <a:endParaRPr lang="en-US" sz="900" dirty="0"/>
           </a:p>
@@ -11532,7 +11532,7 @@
                 <a:ea typeface="Arial" pitchFamily="34" charset="-122"/>
                 <a:cs typeface="Arial" pitchFamily="34" charset="-120"/>
               </a:rPr>
-              <a:t>「ホテルは清潔で、枕も快適です」</a:t>
+              <a:t>「清潔で部屋が広く使いやすかった」</a:t>
             </a:r>
             <a:endParaRPr lang="en-US" sz="900" dirty="0"/>
           </a:p>
@@ -11716,7 +11716,7 @@
                 <a:ea typeface="Arial" pitchFamily="34" charset="-122"/>
                 <a:cs typeface="Arial" pitchFamily="34" charset="-120"/>
               </a:rPr>
-              <a:t>เตียงขนาดกำลังดี มีแอร์แยก หน้าต่างเปิดได้ เดินทางสะดวกอย...</a:t>
+              <a:t>部屋はとても清潔で、広々として快適で、ベッドは柔らかくて心地よかったです</a:t>
             </a:r>
             <a:endParaRPr lang="en-US" sz="900" dirty="0"/>
           </a:p>
@@ -11755,7 +11755,7 @@
                 <a:ea typeface="Arial" pitchFamily="34" charset="-122"/>
                 <a:cs typeface="Arial" pitchFamily="34" charset="-120"/>
               </a:rPr>
-              <a:t>「ホテルは清潔で、枕も快適です」</a:t>
+              <a:t>「เตียงขนาดกำลังดี มีแอร์แยก หน้าต่างเปิดได้ เดินทางสะดวกอย...」</a:t>
             </a:r>
             <a:endParaRPr lang="en-US" sz="900" dirty="0"/>
           </a:p>
@@ -12668,7 +12668,7 @@
                           <a:ea typeface="Arial" pitchFamily="34" charset="-122"/>
                           <a:cs typeface="Arial" pitchFamily="34" charset="-120"/>
                         </a:rPr>
-                        <a:t>เตียงขนาดกำลังดี มีแอร์แยก หน้าต่างเปิดได้ เดินทางสะดวกอย...</a:t>
+                        <a:t>good place to stay while in japan</a:t>
                       </a:r>
                       <a:endParaRPr lang="en-US" sz="900" dirty="0">
                         <a:latin typeface="Arial" charset="0"/>
@@ -12736,7 +12736,7 @@
                           <a:ea typeface="Arial" pitchFamily="34" charset="-122"/>
                           <a:cs typeface="Arial" pitchFamily="34" charset="-120"/>
                         </a:rPr>
-                        <a:t>15件</a:t>
+                        <a:t>17件</a:t>
                       </a:r>
                       <a:endParaRPr lang="en-US" sz="900" dirty="0">
                         <a:latin typeface="Arial" charset="0"/>

--- a/納品レポート/ホテル別レポート/daiichi_ikebukuro_口コミ分析レポート.pptx
+++ b/納品レポート/ホテル別レポート/daiichi_ikebukuro_口コミ分析レポート.pptx
@@ -566,7 +566,7 @@
               <c:numCache>
                 <c:ptCount val="3"/>
                 <c:pt idx="0">
-                  <c:v>109</c:v>
+                  <c:v>110</c:v>
                 </c:pt>
                 <c:pt idx="1">
                   <c:v>8</c:v>
@@ -809,7 +809,7 @@
                 <c:formatCode>General</c:formatCode>
                 <c:ptCount val="8"/>
                 <c:pt idx="0">
-                  <c:v>73</c:v>
+                  <c:v>74</c:v>
                 </c:pt>
                 <c:pt idx="1">
                   <c:v>19</c:v>
@@ -2781,7 +2781,7 @@
                 <a:ea typeface="Arial" pitchFamily="34" charset="-122"/>
                 <a:cs typeface="Arial" pitchFamily="34" charset="-120"/>
               </a:rPr>
-              <a:t>レビュー総数：120件（6サイト）</a:t>
+              <a:t>レビュー総数：121件（6サイト）</a:t>
             </a:r>
             <a:endParaRPr lang="en-US" sz="1000" dirty="0"/>
           </a:p>
@@ -2801,7 +2801,7 @@
                 <a:ea typeface="Arial" pitchFamily="34" charset="-122"/>
                 <a:cs typeface="Arial" pitchFamily="34" charset="-120"/>
               </a:rPr>
-              <a:t>作成日：2026年3月23日</a:t>
+              <a:t>作成日：2026年3月24日</a:t>
             </a:r>
             <a:endParaRPr lang="en-US" sz="1000" dirty="0"/>
           </a:p>
@@ -3347,7 +3347,7 @@
                           <a:ea typeface="Arial" pitchFamily="34" charset="-122"/>
                           <a:cs typeface="Arial" pitchFamily="34" charset="-120"/>
                         </a:rPr>
-                        <a:t>9.12点</a:t>
+                        <a:t>9.13点</a:t>
                       </a:r>
                       <a:endParaRPr lang="en-US" sz="1000" dirty="0">
                         <a:latin typeface="Arial" charset="0"/>
@@ -3621,7 +3621,7 @@
                           <a:ea typeface="Arial" pitchFamily="34" charset="-122"/>
                           <a:cs typeface="Arial" pitchFamily="34" charset="-120"/>
                         </a:rPr>
-                        <a:t>90.8%</a:t>
+                        <a:t>90.9%</a:t>
                       </a:r>
                       <a:endParaRPr lang="en-US" sz="1000" dirty="0">
                         <a:latin typeface="Arial" charset="0"/>
@@ -5356,7 +5356,7 @@
                 <a:ea typeface="Arial" pitchFamily="34" charset="-122"/>
                 <a:cs typeface="Arial" pitchFamily="34" charset="-120"/>
               </a:rPr>
-              <a:t>9.12</a:t>
+              <a:t>9.13</a:t>
             </a:r>
             <a:endParaRPr lang="en-US" sz="3200" dirty="0"/>
           </a:p>
@@ -5481,7 +5481,7 @@
                 <a:ea typeface="Arial" pitchFamily="34" charset="-122"/>
                 <a:cs typeface="Arial" pitchFamily="34" charset="-120"/>
               </a:rPr>
-              <a:t>90.8%</a:t>
+              <a:t>90.9%</a:t>
             </a:r>
             <a:endParaRPr lang="en-US" sz="3200" dirty="0"/>
           </a:p>
@@ -5731,7 +5731,7 @@
                 <a:ea typeface="Arial" pitchFamily="34" charset="-122"/>
                 <a:cs typeface="Arial" pitchFamily="34" charset="-120"/>
               </a:rPr>
-              <a:t>120件</a:t>
+              <a:t>121件</a:t>
             </a:r>
             <a:endParaRPr lang="en-US" sz="3200" dirty="0"/>
           </a:p>
@@ -6540,7 +6540,7 @@
                 <a:ea typeface="Arial" pitchFamily="34" charset="-122"/>
                 <a:cs typeface="Arial" pitchFamily="34" charset="-120"/>
               </a:rPr>
-              <a:t>9.12</a:t>
+              <a:t>9.13</a:t>
             </a:r>
             <a:endParaRPr lang="en-US" sz="3200" dirty="0"/>
           </a:p>
@@ -6665,7 +6665,7 @@
                 <a:ea typeface="Arial" pitchFamily="34" charset="-122"/>
                 <a:cs typeface="Arial" pitchFamily="34" charset="-120"/>
               </a:rPr>
-              <a:t>90.8%</a:t>
+              <a:t>90.9%</a:t>
             </a:r>
             <a:endParaRPr lang="en-US" sz="3200" dirty="0"/>
           </a:p>
@@ -6915,7 +6915,7 @@
                 <a:ea typeface="Arial" pitchFamily="34" charset="-122"/>
                 <a:cs typeface="Arial" pitchFamily="34" charset="-120"/>
               </a:rPr>
-              <a:t>120件</a:t>
+              <a:t>121件</a:t>
             </a:r>
             <a:endParaRPr lang="en-US" sz="3200" dirty="0"/>
           </a:p>
@@ -7894,7 +7894,7 @@
                           <a:ea typeface="Arial" pitchFamily="34" charset="-122"/>
                           <a:cs typeface="Arial" pitchFamily="34" charset="-120"/>
                         </a:rPr>
-                        <a:t>61</a:t>
+                        <a:t>62</a:t>
                       </a:r>
                       <a:endParaRPr lang="en-US" sz="900" dirty="0">
                         <a:latin typeface="Arial" charset="0"/>
@@ -10216,7 +10216,7 @@
                 <a:ea typeface="Arial" pitchFamily="34" charset="-122"/>
                 <a:cs typeface="Arial" pitchFamily="34" charset="-120"/>
               </a:rPr>
-              <a:t>109件（90.8%）</a:t>
+              <a:t>110件（90.9%）</a:t>
             </a:r>
             <a:endParaRPr lang="en-US" sz="1100" dirty="0"/>
           </a:p>
@@ -10314,7 +10314,7 @@
                 <a:ea typeface="Arial" pitchFamily="34" charset="-122"/>
                 <a:cs typeface="Arial" pitchFamily="34" charset="-120"/>
               </a:rPr>
-              <a:t>8件（6.7%）</a:t>
+              <a:t>8件（6.6%）</a:t>
             </a:r>
             <a:endParaRPr lang="en-US" sz="1100" dirty="0"/>
           </a:p>

--- a/納品レポート/ホテル別レポート/daiichi_ikebukuro_口コミ分析レポート.pptx
+++ b/納品レポート/ホテル別レポート/daiichi_ikebukuro_口コミ分析レポート.pptx
@@ -208,10 +208,10 @@
                 <c:formatCode>General</c:formatCode>
                 <c:ptCount val="6"/>
                 <c:pt idx="0">
-                  <c:v>9.56</c:v>
+                  <c:v>9.55</c:v>
                 </c:pt>
                 <c:pt idx="1">
-                  <c:v>9.1</c:v>
+                  <c:v>9.19</c:v>
                 </c:pt>
                 <c:pt idx="2">
                   <c:v>8.76</c:v>
@@ -566,7 +566,7 @@
               <c:numCache>
                 <c:ptCount val="3"/>
                 <c:pt idx="0">
-                  <c:v>110</c:v>
+                  <c:v>116</c:v>
                 </c:pt>
                 <c:pt idx="1">
                   <c:v>8</c:v>
@@ -809,13 +809,13 @@
                 <c:formatCode>General</c:formatCode>
                 <c:ptCount val="8"/>
                 <c:pt idx="0">
-                  <c:v>74</c:v>
+                  <c:v>79</c:v>
                 </c:pt>
                 <c:pt idx="1">
                   <c:v>19</c:v>
                 </c:pt>
                 <c:pt idx="2">
-                  <c:v>17</c:v>
+                  <c:v>18</c:v>
                 </c:pt>
                 <c:pt idx="3">
                   <c:v>3</c:v>
@@ -2781,7 +2781,7 @@
                 <a:ea typeface="Arial" pitchFamily="34" charset="-122"/>
                 <a:cs typeface="Arial" pitchFamily="34" charset="-120"/>
               </a:rPr>
-              <a:t>レビュー総数：121件（6サイト）</a:t>
+              <a:t>レビュー総数：127件（6サイト）</a:t>
             </a:r>
             <a:endParaRPr lang="en-US" sz="1000" dirty="0"/>
           </a:p>
@@ -2801,7 +2801,7 @@
                 <a:ea typeface="Arial" pitchFamily="34" charset="-122"/>
                 <a:cs typeface="Arial" pitchFamily="34" charset="-120"/>
               </a:rPr>
-              <a:t>作成日：2026年3月24日</a:t>
+              <a:t>作成日：2026年3月25日</a:t>
             </a:r>
             <a:endParaRPr lang="en-US" sz="1000" dirty="0"/>
           </a:p>
@@ -3347,7 +3347,7 @@
                           <a:ea typeface="Arial" pitchFamily="34" charset="-122"/>
                           <a:cs typeface="Arial" pitchFamily="34" charset="-120"/>
                         </a:rPr>
-                        <a:t>9.13点</a:t>
+                        <a:t>9.16点</a:t>
                       </a:r>
                       <a:endParaRPr lang="en-US" sz="1000" dirty="0">
                         <a:latin typeface="Arial" charset="0"/>
@@ -3415,7 +3415,7 @@
                           <a:ea typeface="Arial" pitchFamily="34" charset="-122"/>
                           <a:cs typeface="Arial" pitchFamily="34" charset="-120"/>
                         </a:rPr>
-                        <a:t>9.3点以上</a:t>
+                        <a:t>9.4点以上</a:t>
                       </a:r>
                       <a:endParaRPr lang="en-US" sz="1000" dirty="0">
                         <a:latin typeface="Arial" charset="0"/>
@@ -3621,7 +3621,7 @@
                           <a:ea typeface="Arial" pitchFamily="34" charset="-122"/>
                           <a:cs typeface="Arial" pitchFamily="34" charset="-120"/>
                         </a:rPr>
-                        <a:t>90.9%</a:t>
+                        <a:t>91.3%</a:t>
                       </a:r>
                       <a:endParaRPr lang="en-US" sz="1000" dirty="0">
                         <a:latin typeface="Arial" charset="0"/>
@@ -3895,7 +3895,7 @@
                           <a:ea typeface="Arial" pitchFamily="34" charset="-122"/>
                           <a:cs typeface="Arial" pitchFamily="34" charset="-120"/>
                         </a:rPr>
-                        <a:t>2.5%</a:t>
+                        <a:t>2.4%</a:t>
                       </a:r>
                       <a:endParaRPr lang="en-US" sz="1000" dirty="0">
                         <a:latin typeface="Arial" charset="0"/>
@@ -4717,7 +4717,7 @@
                           <a:ea typeface="Arial" pitchFamily="34" charset="-122"/>
                           <a:cs typeface="Arial" pitchFamily="34" charset="-120"/>
                         </a:rPr>
-                        <a:t>約17件/期間</a:t>
+                        <a:t>約18件/期間</a:t>
                       </a:r>
                       <a:endParaRPr lang="en-US" sz="1000" dirty="0">
                         <a:latin typeface="Arial" charset="0"/>
@@ -4785,7 +4785,7 @@
                           <a:ea typeface="Arial" pitchFamily="34" charset="-122"/>
                           <a:cs typeface="Arial" pitchFamily="34" charset="-120"/>
                         </a:rPr>
-                        <a:t>8件以下</a:t>
+                        <a:t>9件以下</a:t>
                       </a:r>
                       <a:endParaRPr lang="en-US" sz="1000" dirty="0">
                         <a:latin typeface="Arial" charset="0"/>
@@ -5356,7 +5356,7 @@
                 <a:ea typeface="Arial" pitchFamily="34" charset="-122"/>
                 <a:cs typeface="Arial" pitchFamily="34" charset="-120"/>
               </a:rPr>
-              <a:t>9.13</a:t>
+              <a:t>9.16</a:t>
             </a:r>
             <a:endParaRPr lang="en-US" sz="3200" dirty="0"/>
           </a:p>
@@ -5481,7 +5481,7 @@
                 <a:ea typeface="Arial" pitchFamily="34" charset="-122"/>
                 <a:cs typeface="Arial" pitchFamily="34" charset="-120"/>
               </a:rPr>
-              <a:t>90.9%</a:t>
+              <a:t>91.3%</a:t>
             </a:r>
             <a:endParaRPr lang="en-US" sz="3200" dirty="0"/>
           </a:p>
@@ -5606,7 +5606,7 @@
                 <a:ea typeface="Arial" pitchFamily="34" charset="-122"/>
                 <a:cs typeface="Arial" pitchFamily="34" charset="-120"/>
               </a:rPr>
-              <a:t>2.5%</a:t>
+              <a:t>2.4%</a:t>
             </a:r>
             <a:endParaRPr lang="en-US" sz="3200" dirty="0"/>
           </a:p>
@@ -5731,7 +5731,7 @@
                 <a:ea typeface="Arial" pitchFamily="34" charset="-122"/>
                 <a:cs typeface="Arial" pitchFamily="34" charset="-120"/>
               </a:rPr>
-              <a:t>121件</a:t>
+              <a:t>127件</a:t>
             </a:r>
             <a:endParaRPr lang="en-US" sz="3200" dirty="0"/>
           </a:p>
@@ -5879,7 +5879,7 @@
                 <a:ea typeface="Arial" pitchFamily="34" charset="-122"/>
                 <a:cs typeface="Arial" pitchFamily="34" charset="-120"/>
               </a:rPr>
-              <a:t>  池袋駅に近いです</a:t>
+              <a:t>  立地は非常に便利です</a:t>
             </a:r>
             <a:endParaRPr lang="en-US" sz="1100" dirty="0"/>
           </a:p>
@@ -5959,7 +5959,7 @@
                 <a:ea typeface="Arial" pitchFamily="34" charset="-122"/>
                 <a:cs typeface="Arial" pitchFamily="34" charset="-120"/>
               </a:rPr>
-              <a:t>  客室は他のホテルよりもずっと広く、サービスも素晴らしく、何よりも地下鉄の駅に近く、近隣のショッピングにも便利です</a:t>
+              <a:t>  スタッフは親切です</a:t>
             </a:r>
             <a:endParaRPr lang="en-US" sz="1100" dirty="0"/>
           </a:p>
@@ -6107,7 +6107,7 @@
                 <a:ea typeface="Arial" pitchFamily="34" charset="-122"/>
                 <a:cs typeface="Arial" pitchFamily="34" charset="-120"/>
               </a:rPr>
-              <a:t>  good place to stay while in japan</a:t>
+              <a:t>  The space is generous, you can easily open two suitcases ...</a:t>
             </a:r>
             <a:endParaRPr lang="en-US" sz="1100" dirty="0"/>
           </a:p>
@@ -6147,7 +6147,7 @@
                 <a:ea typeface="Arial" pitchFamily="34" charset="-122"/>
                 <a:cs typeface="Arial" pitchFamily="34" charset="-120"/>
               </a:rPr>
-              <a:t>  部屋は一人なら十分な広さですが、二人だと少し狭いかもしれません</a:t>
+              <a:t>  部屋は狭いですが、許容範囲です</a:t>
             </a:r>
             <a:endParaRPr lang="en-US" sz="1100" dirty="0"/>
           </a:p>
@@ -6167,7 +6167,7 @@
                 <a:ea typeface="Arial" pitchFamily="34" charset="-122"/>
                 <a:cs typeface="Arial" pitchFamily="34" charset="-120"/>
               </a:rPr>
-              <a:t>防音性能 </a:t>
+              <a:t>設備の老朽化 </a:t>
             </a:r>
             <a:endParaRPr lang="en-US" sz="1100" dirty="0"/>
           </a:p>
@@ -6187,7 +6187,7 @@
                 <a:ea typeface="Arial" pitchFamily="34" charset="-122"/>
                 <a:cs typeface="Arial" pitchFamily="34" charset="-120"/>
               </a:rPr>
-              <a:t>  窓からの音がうるさかった</a:t>
+              <a:t>  建物は古いですが、清潔です</a:t>
             </a:r>
             <a:endParaRPr lang="en-US" sz="1100" dirty="0"/>
           </a:p>
@@ -6540,7 +6540,7 @@
                 <a:ea typeface="Arial" pitchFamily="34" charset="-122"/>
                 <a:cs typeface="Arial" pitchFamily="34" charset="-120"/>
               </a:rPr>
-              <a:t>9.13</a:t>
+              <a:t>9.16</a:t>
             </a:r>
             <a:endParaRPr lang="en-US" sz="3200" dirty="0"/>
           </a:p>
@@ -6665,7 +6665,7 @@
                 <a:ea typeface="Arial" pitchFamily="34" charset="-122"/>
                 <a:cs typeface="Arial" pitchFamily="34" charset="-120"/>
               </a:rPr>
-              <a:t>90.9%</a:t>
+              <a:t>91.3%</a:t>
             </a:r>
             <a:endParaRPr lang="en-US" sz="3200" dirty="0"/>
           </a:p>
@@ -6790,7 +6790,7 @@
                 <a:ea typeface="Arial" pitchFamily="34" charset="-122"/>
                 <a:cs typeface="Arial" pitchFamily="34" charset="-120"/>
               </a:rPr>
-              <a:t>2.5%</a:t>
+              <a:t>2.4%</a:t>
             </a:r>
             <a:endParaRPr lang="en-US" sz="3200" dirty="0"/>
           </a:p>
@@ -6915,7 +6915,7 @@
                 <a:ea typeface="Arial" pitchFamily="34" charset="-122"/>
                 <a:cs typeface="Arial" pitchFamily="34" charset="-120"/>
               </a:rPr>
-              <a:t>121件</a:t>
+              <a:t>127件</a:t>
             </a:r>
             <a:endParaRPr lang="en-US" sz="3200" dirty="0"/>
           </a:p>
@@ -7336,7 +7336,7 @@
                 <a:ea typeface="Arial" pitchFamily="34" charset="-122"/>
                 <a:cs typeface="Arial" pitchFamily="34" charset="-120"/>
               </a:rPr>
-              <a:t>Trip.com(9.56)が最高スコア。</a:t>
+              <a:t>Trip.com(9.55)が最高スコア。</a:t>
             </a:r>
             <a:endParaRPr lang="en-US" sz="1100" dirty="0"/>
           </a:p>
@@ -7894,7 +7894,7 @@
                           <a:ea typeface="Arial" pitchFamily="34" charset="-122"/>
                           <a:cs typeface="Arial" pitchFamily="34" charset="-120"/>
                         </a:rPr>
-                        <a:t>62</a:t>
+                        <a:t>65</a:t>
                       </a:r>
                       <a:endParaRPr lang="en-US" sz="900" dirty="0">
                         <a:latin typeface="Arial" charset="0"/>
@@ -7962,7 +7962,7 @@
                           <a:ea typeface="Arial" pitchFamily="34" charset="-122"/>
                           <a:cs typeface="Arial" pitchFamily="34" charset="-120"/>
                         </a:rPr>
-                        <a:t>9.56</a:t>
+                        <a:t>9.55</a:t>
                       </a:r>
                       <a:endParaRPr lang="en-US" sz="900" dirty="0">
                         <a:latin typeface="Arial" charset="0"/>
@@ -8098,7 +8098,7 @@
                           <a:ea typeface="Arial" pitchFamily="34" charset="-122"/>
                           <a:cs typeface="Arial" pitchFamily="34" charset="-120"/>
                         </a:rPr>
-                        <a:t>9.56</a:t>
+                        <a:t>9.55</a:t>
                       </a:r>
                       <a:endParaRPr lang="en-US" sz="900" dirty="0">
                         <a:latin typeface="Arial" charset="0"/>
@@ -8236,7 +8236,7 @@
                           <a:ea typeface="Arial" pitchFamily="34" charset="-122"/>
                           <a:cs typeface="Arial" pitchFamily="34" charset="-120"/>
                         </a:rPr>
-                        <a:t>29</a:t>
+                        <a:t>32</a:t>
                       </a:r>
                       <a:endParaRPr lang="en-US" sz="900" dirty="0">
                         <a:latin typeface="Arial" charset="0"/>
@@ -8304,7 +8304,7 @@
                           <a:ea typeface="Arial" pitchFamily="34" charset="-122"/>
                           <a:cs typeface="Arial" pitchFamily="34" charset="-120"/>
                         </a:rPr>
-                        <a:t>4.55</a:t>
+                        <a:t>4.59</a:t>
                       </a:r>
                       <a:endParaRPr lang="en-US" sz="900" dirty="0">
                         <a:latin typeface="Arial" charset="0"/>
@@ -8440,7 +8440,7 @@
                           <a:ea typeface="Arial" pitchFamily="34" charset="-122"/>
                           <a:cs typeface="Arial" pitchFamily="34" charset="-120"/>
                         </a:rPr>
-                        <a:t>9.1</a:t>
+                        <a:t>9.19</a:t>
                       </a:r>
                       <a:endParaRPr lang="en-US" sz="900" dirty="0">
                         <a:latin typeface="Arial" charset="0"/>
@@ -10216,7 +10216,7 @@
                 <a:ea typeface="Arial" pitchFamily="34" charset="-122"/>
                 <a:cs typeface="Arial" pitchFamily="34" charset="-120"/>
               </a:rPr>
-              <a:t>110件（90.9%）</a:t>
+              <a:t>116件（91.3%）</a:t>
             </a:r>
             <a:endParaRPr lang="en-US" sz="1100" dirty="0"/>
           </a:p>
@@ -10314,7 +10314,7 @@
                 <a:ea typeface="Arial" pitchFamily="34" charset="-122"/>
                 <a:cs typeface="Arial" pitchFamily="34" charset="-120"/>
               </a:rPr>
-              <a:t>8件（6.6%）</a:t>
+              <a:t>8件（6.3%）</a:t>
             </a:r>
             <a:endParaRPr lang="en-US" sz="1100" dirty="0"/>
           </a:p>
@@ -10412,7 +10412,7 @@
                 <a:ea typeface="Arial" pitchFamily="34" charset="-122"/>
                 <a:cs typeface="Arial" pitchFamily="34" charset="-120"/>
               </a:rPr>
-              <a:t>3件（2.5%）</a:t>
+              <a:t>3件（2.4%）</a:t>
             </a:r>
             <a:endParaRPr lang="en-US" sz="1100" dirty="0"/>
           </a:p>
@@ -10824,7 +10824,7 @@
                 <a:ea typeface="Arial" pitchFamily="34" charset="-122"/>
                 <a:cs typeface="Arial" pitchFamily="34" charset="-120"/>
               </a:rPr>
-              <a:t>池袋駅に近いです</a:t>
+              <a:t>立地は非常に便利です</a:t>
             </a:r>
             <a:endParaRPr lang="en-US" sz="900" dirty="0"/>
           </a:p>
@@ -10863,7 +10863,7 @@
                 <a:ea typeface="Arial" pitchFamily="34" charset="-122"/>
                 <a:cs typeface="Arial" pitchFamily="34" charset="-120"/>
               </a:rPr>
-              <a:t>「立地も非常に便利で、駅から徒歩わずか数分なので、交通の便も抜群です」</a:t>
+              <a:t>「ホテルは幹線道路のすぐ裏手という非常に便利な場所にあり、すぐ外には公園があります」</a:t>
             </a:r>
             <a:endParaRPr lang="en-US" sz="900" dirty="0"/>
           </a:p>
@@ -11270,7 +11270,7 @@
                 <a:ea typeface="Arial" pitchFamily="34" charset="-122"/>
                 <a:cs typeface="Arial" pitchFamily="34" charset="-120"/>
               </a:rPr>
-              <a:t>客室は他のホテルよりもずっと広く、サービスも素晴らしく、何よりも地下鉄の駅に近く、近隣のショッピングにも便利です</a:t>
+              <a:t>スタッフは親切です</a:t>
             </a:r>
             <a:endParaRPr lang="en-US" sz="900" dirty="0"/>
           </a:p>
@@ -11309,7 +11309,7 @@
                 <a:ea typeface="Arial" pitchFamily="34" charset="-122"/>
                 <a:cs typeface="Arial" pitchFamily="34" charset="-120"/>
               </a:rPr>
-              <a:t>「ロビーのスタッフはとても丁寧で、荷物預かりサービスもあるので大変便利です」</a:t>
+              <a:t>「ハウスキーピングは丁寧で細部にまで気を配っており、快適な滞在をさらに充実させてくれます」</a:t>
             </a:r>
             <a:endParaRPr lang="en-US" sz="900" dirty="0"/>
           </a:p>
@@ -11493,7 +11493,7 @@
                 <a:ea typeface="Arial" pitchFamily="34" charset="-122"/>
                 <a:cs typeface="Arial" pitchFamily="34" charset="-120"/>
               </a:rPr>
-              <a:t>部屋はとても清潔で、広々として快適で、ベッドは柔らかくて心地よかったです</a:t>
+              <a:t>建物は古いですが、清潔です</a:t>
             </a:r>
             <a:endParaRPr lang="en-US" sz="900" dirty="0"/>
           </a:p>
@@ -11532,7 +11532,7 @@
                 <a:ea typeface="Arial" pitchFamily="34" charset="-122"/>
                 <a:cs typeface="Arial" pitchFamily="34" charset="-120"/>
               </a:rPr>
-              <a:t>「清潔で部屋が広く使いやすかった」</a:t>
+              <a:t>「清掃員のゴミ箱の周りのゴミさえ片付けていなかった」</a:t>
             </a:r>
             <a:endParaRPr lang="en-US" sz="900" dirty="0"/>
           </a:p>
@@ -11716,7 +11716,7 @@
                 <a:ea typeface="Arial" pitchFamily="34" charset="-122"/>
                 <a:cs typeface="Arial" pitchFamily="34" charset="-120"/>
               </a:rPr>
-              <a:t>部屋はとても清潔で、広々として快適で、ベッドは柔らかくて心地よかったです</a:t>
+              <a:t>客室は清潔で快適でした</a:t>
             </a:r>
             <a:endParaRPr lang="en-US" sz="900" dirty="0"/>
           </a:p>
@@ -11755,7 +11755,7 @@
                 <a:ea typeface="Arial" pitchFamily="34" charset="-122"/>
                 <a:cs typeface="Arial" pitchFamily="34" charset="-120"/>
               </a:rPr>
-              <a:t>「เตียงขนาดกำลังดี มีแอร์แยก หน้าต่างเปิดได้ เดินทางสะดวกอย...」</a:t>
+              <a:t>「部屋は清潔で快適で、設備は少し古いですが、全体的な体験を損なうことはありません」</a:t>
             </a:r>
             <a:endParaRPr lang="en-US" sz="900" dirty="0"/>
           </a:p>
@@ -11939,7 +11939,7 @@
                 <a:ea typeface="Arial" pitchFamily="34" charset="-122"/>
                 <a:cs typeface="Arial" pitchFamily="34" charset="-120"/>
               </a:rPr>
-              <a:t>料金も手頃で、公共交通機関へのアクセスも良好です</a:t>
+              <a:t>全体的に見て、このホテルはコストパフォーマンスに優れています</a:t>
             </a:r>
             <a:endParaRPr lang="en-US" sz="900" dirty="0"/>
           </a:p>
@@ -11978,7 +11978,7 @@
                 <a:ea typeface="Arial" pitchFamily="34" charset="-122"/>
                 <a:cs typeface="Arial" pitchFamily="34" charset="-120"/>
               </a:rPr>
-              <a:t>「この小さな町は駅にとても近く、コストパフォーマンスに優れています」</a:t>
+              <a:t>「料金も手頃で、公共交通機関へのアクセスも良好です」</a:t>
             </a:r>
             <a:endParaRPr lang="en-US" sz="900" dirty="0"/>
           </a:p>
@@ -12668,7 +12668,7 @@
                           <a:ea typeface="Arial" pitchFamily="34" charset="-122"/>
                           <a:cs typeface="Arial" pitchFamily="34" charset="-120"/>
                         </a:rPr>
-                        <a:t>good place to stay while in japan</a:t>
+                        <a:t>The space is generous, you can easily open two suitcases ...</a:t>
                       </a:r>
                       <a:endParaRPr lang="en-US" sz="900" dirty="0">
                         <a:latin typeface="Arial" charset="0"/>
@@ -12736,7 +12736,7 @@
                           <a:ea typeface="Arial" pitchFamily="34" charset="-122"/>
                           <a:cs typeface="Arial" pitchFamily="34" charset="-120"/>
                         </a:rPr>
-                        <a:t>17件</a:t>
+                        <a:t>18件</a:t>
                       </a:r>
                       <a:endParaRPr lang="en-US" sz="900" dirty="0">
                         <a:latin typeface="Arial" charset="0"/>
@@ -12942,7 +12942,7 @@
                           <a:ea typeface="Arial" pitchFamily="34" charset="-122"/>
                           <a:cs typeface="Arial" pitchFamily="34" charset="-120"/>
                         </a:rPr>
-                        <a:t>部屋は一人なら十分な広さですが、二人だと少し狭いかもしれません</a:t>
+                        <a:t>部屋は狭いですが、許容範囲です</a:t>
                       </a:r>
                       <a:endParaRPr lang="en-US" sz="900" dirty="0">
                         <a:latin typeface="Arial" charset="0"/>
@@ -13010,7 +13010,7 @@
                           <a:ea typeface="Arial" pitchFamily="34" charset="-122"/>
                           <a:cs typeface="Arial" pitchFamily="34" charset="-120"/>
                         </a:rPr>
-                        <a:t>8件</a:t>
+                        <a:t>12件</a:t>
                       </a:r>
                       <a:endParaRPr lang="en-US" sz="900" dirty="0">
                         <a:latin typeface="Arial" charset="0"/>
@@ -13148,7 +13148,7 @@
                           <a:ea typeface="Arial" pitchFamily="34" charset="-122"/>
                           <a:cs typeface="Arial" pitchFamily="34" charset="-120"/>
                         </a:rPr>
-                        <a:t>防音性能</a:t>
+                        <a:t>設備の老朽化</a:t>
                       </a:r>
                       <a:endParaRPr lang="en-US" sz="900" dirty="0">
                         <a:latin typeface="Arial" charset="0"/>
@@ -13216,7 +13216,7 @@
                           <a:ea typeface="Arial" pitchFamily="34" charset="-122"/>
                           <a:cs typeface="Arial" pitchFamily="34" charset="-120"/>
                         </a:rPr>
-                        <a:t>窓からの音がうるさかった</a:t>
+                        <a:t>建物は古いですが、清潔です</a:t>
                       </a:r>
                       <a:endParaRPr lang="en-US" sz="900" dirty="0">
                         <a:latin typeface="Arial" charset="0"/>
@@ -13284,7 +13284,7 @@
                           <a:ea typeface="Arial" pitchFamily="34" charset="-122"/>
                           <a:cs typeface="Arial" pitchFamily="34" charset="-120"/>
                         </a:rPr>
-                        <a:t>7件</a:t>
+                        <a:t>9件</a:t>
                       </a:r>
                       <a:endParaRPr lang="en-US" sz="900" dirty="0">
                         <a:latin typeface="Arial" charset="0"/>
@@ -13422,7 +13422,7 @@
                           <a:ea typeface="Arial" pitchFamily="34" charset="-122"/>
                           <a:cs typeface="Arial" pitchFamily="34" charset="-120"/>
                         </a:rPr>
-                        <a:t>浴室・水回り</a:t>
+                        <a:t>防音性能</a:t>
                       </a:r>
                       <a:endParaRPr lang="en-US" sz="900" dirty="0">
                         <a:latin typeface="Arial" charset="0"/>
@@ -13490,7 +13490,7 @@
                           <a:ea typeface="Arial" pitchFamily="34" charset="-122"/>
                           <a:cs typeface="Arial" pitchFamily="34" charset="-120"/>
                         </a:rPr>
-                        <a:t>ทำเลดีมาก ใกล้ทุกอย่าง ใกล้รถไฟฟ้า แอร์พอตบัส ใกล้ร้านอาห...</a:t>
+                        <a:t>地下鉄の駅は階下にありますが、防音対策がしっかりしているので、全く邪魔されることなく快適に過ごせました</a:t>
                       </a:r>
                       <a:endParaRPr lang="en-US" sz="900" dirty="0">
                         <a:latin typeface="Arial" charset="0"/>
@@ -13558,7 +13558,7 @@
                           <a:ea typeface="Arial" pitchFamily="34" charset="-122"/>
                           <a:cs typeface="Arial" pitchFamily="34" charset="-120"/>
                         </a:rPr>
-                        <a:t>7件</a:t>
+                        <a:t>9件</a:t>
                       </a:r>
                       <a:endParaRPr lang="en-US" sz="900" dirty="0">
                         <a:latin typeface="Arial" charset="0"/>
@@ -13696,7 +13696,7 @@
                           <a:ea typeface="Arial" pitchFamily="34" charset="-122"/>
                           <a:cs typeface="Arial" pitchFamily="34" charset="-120"/>
                         </a:rPr>
-                        <a:t>設備の老朽化</a:t>
+                        <a:t>浴室・水回り</a:t>
                       </a:r>
                       <a:endParaRPr lang="en-US" sz="900" dirty="0">
                         <a:latin typeface="Arial" charset="0"/>
@@ -13764,7 +13764,7 @@
                           <a:ea typeface="Arial" pitchFamily="34" charset="-122"/>
                           <a:cs typeface="Arial" pitchFamily="34" charset="-120"/>
                         </a:rPr>
-                        <a:t>部屋は古いですが、とても清潔です</a:t>
+                        <a:t>さらに、ホテルが用意してくれたセルフサービスのバスアメニティは非常に質が高く、使用後は肌が滑らかで乾燥せず、嬉しい...</a:t>
                       </a:r>
                       <a:endParaRPr lang="en-US" sz="900" dirty="0">
                         <a:latin typeface="Arial" charset="0"/>
@@ -13832,7 +13832,7 @@
                           <a:ea typeface="Arial" pitchFamily="34" charset="-122"/>
                           <a:cs typeface="Arial" pitchFamily="34" charset="-120"/>
                         </a:rPr>
-                        <a:t>6件</a:t>
+                        <a:t>9件</a:t>
                       </a:r>
                       <a:endParaRPr lang="en-US" sz="900" dirty="0">
                         <a:latin typeface="Arial" charset="0"/>
@@ -15639,6 +15639,177 @@
                 <a:ea typeface="Arial" pitchFamily="34" charset="-122"/>
                 <a:cs typeface="Arial" pitchFamily="34" charset="-120"/>
               </a:rPr>
+              <a:t>清掃品質の向上</a:t>
+            </a:r>
+            <a:endParaRPr lang="en-US" sz="1200" dirty="0"/>
+          </a:p>
+        </p:txBody>
+      </p:sp>
+      <p:sp>
+        <p:nvSpPr>
+          <p:cNvPr id="13" name="Text 11"/>
+          <p:cNvSpPr/>
+          <p:nvPr/>
+        </p:nvSpPr>
+        <p:spPr>
+          <a:xfrm>
+            <a:off x="4800600" y="1600200"/>
+            <a:ext cx="3657600" cy="1188720"/>
+          </a:xfrm>
+          <a:prstGeom prst="rect">
+            <a:avLst/>
+          </a:prstGeom>
+          <a:noFill/>
+          <a:ln/>
+        </p:spPr>
+        <p:txBody>
+          <a:bodyPr wrap="square" lIns="0" tIns="0" rIns="0" bIns="0" rtlCol="0" anchor="ctr"/>
+          <a:lstStyle/>
+          <a:p>
+            <a:pPr marL="342900" indent="-342900">
+              <a:spcAft>
+                <a:spcPts val="300"/>
+              </a:spcAft>
+              <a:buSzPct val="100000"/>
+              <a:buChar char="•"/>
+            </a:pPr>
+            <a:r>
+              <a:rPr lang="en-US" sz="900" dirty="0">
+                <a:solidFill>
+                  <a:srgbClr val="334155"/>
+                </a:solidFill>
+                <a:latin typeface="Arial" pitchFamily="34" charset="0"/>
+                <a:ea typeface="Arial" pitchFamily="34" charset="-122"/>
+                <a:cs typeface="Arial" pitchFamily="34" charset="-120"/>
+              </a:rPr>
+              <a:t>清掃チェックリストの見直しと強化（ベッド下・隅の重点確認）</a:t>
+            </a:r>
+            <a:endParaRPr lang="en-US" sz="900" dirty="0"/>
+          </a:p>
+          <a:p>
+            <a:pPr marL="342900" indent="-342900">
+              <a:spcAft>
+                <a:spcPts val="300"/>
+              </a:spcAft>
+              <a:buSzPct val="100000"/>
+              <a:buChar char="•"/>
+            </a:pPr>
+            <a:r>
+              <a:rPr lang="en-US" sz="900" dirty="0">
+                <a:solidFill>
+                  <a:srgbClr val="334155"/>
+                </a:solidFill>
+                <a:latin typeface="Arial" pitchFamily="34" charset="0"/>
+                <a:ea typeface="Arial" pitchFamily="34" charset="-122"/>
+                <a:cs typeface="Arial" pitchFamily="34" charset="-120"/>
+              </a:rPr>
+              <a:t>清掃後のダブルチェック体制の導入</a:t>
+            </a:r>
+            <a:endParaRPr lang="en-US" sz="900" dirty="0"/>
+          </a:p>
+          <a:p>
+            <a:pPr marL="342900" indent="-342900">
+              <a:spcAft>
+                <a:spcPts val="300"/>
+              </a:spcAft>
+              <a:buSzPct val="100000"/>
+              <a:buChar char="•"/>
+            </a:pPr>
+            <a:r>
+              <a:rPr lang="en-US" sz="900" dirty="0">
+                <a:solidFill>
+                  <a:srgbClr val="334155"/>
+                </a:solidFill>
+                <a:latin typeface="Arial" pitchFamily="34" charset="0"/>
+                <a:ea typeface="Arial" pitchFamily="34" charset="-122"/>
+                <a:cs typeface="Arial" pitchFamily="34" charset="-120"/>
+              </a:rPr>
+              <a:t>清掃スタッフへの再研修実施</a:t>
+            </a:r>
+            <a:endParaRPr lang="en-US" sz="900" dirty="0"/>
+          </a:p>
+        </p:txBody>
+      </p:sp>
+      <p:sp>
+        <p:nvSpPr>
+          <p:cNvPr id="14" name="Shape 12"/>
+          <p:cNvSpPr/>
+          <p:nvPr/>
+        </p:nvSpPr>
+        <p:spPr>
+          <a:xfrm>
+            <a:off x="457200" y="3017520"/>
+            <a:ext cx="3977640" cy="1600200"/>
+          </a:xfrm>
+          <a:prstGeom prst="rect">
+            <a:avLst/>
+          </a:prstGeom>
+          <a:solidFill>
+            <a:srgbClr val="FFFFFF"/>
+          </a:solidFill>
+          <a:ln/>
+          <a:effectLst>
+            <a:outerShdw sx="100000" sy="100000" kx="0" ky="0" algn="bl" rotWithShape="0" blurRad="50800" dist="25400" dir="8100000">
+              <a:srgbClr val="000000">
+                <a:alpha val="10000"/>
+              </a:srgbClr>
+            </a:outerShdw>
+          </a:effectLst>
+        </p:spPr>
+      </p:sp>
+      <p:sp>
+        <p:nvSpPr>
+          <p:cNvPr id="15" name="Shape 13"/>
+          <p:cNvSpPr/>
+          <p:nvPr/>
+        </p:nvSpPr>
+        <p:spPr>
+          <a:xfrm>
+            <a:off x="457200" y="3017520"/>
+            <a:ext cx="54864" cy="1600200"/>
+          </a:xfrm>
+          <a:prstGeom prst="rect">
+            <a:avLst/>
+          </a:prstGeom>
+          <a:solidFill>
+            <a:srgbClr val="3B7DD8"/>
+          </a:solidFill>
+          <a:ln/>
+        </p:spPr>
+      </p:sp>
+      <p:sp>
+        <p:nvSpPr>
+          <p:cNvPr id="16" name="Text 14"/>
+          <p:cNvSpPr/>
+          <p:nvPr/>
+        </p:nvSpPr>
+        <p:spPr>
+          <a:xfrm>
+            <a:off x="594360" y="3063240"/>
+            <a:ext cx="3657600" cy="320040"/>
+          </a:xfrm>
+          <a:prstGeom prst="rect">
+            <a:avLst/>
+          </a:prstGeom>
+          <a:noFill/>
+          <a:ln/>
+        </p:spPr>
+        <p:txBody>
+          <a:bodyPr wrap="square" lIns="0" tIns="0" rIns="0" bIns="0" rtlCol="0" anchor="ctr"/>
+          <a:lstStyle/>
+          <a:p>
+            <a:pPr indent="0" marL="0">
+              <a:buNone/>
+            </a:pPr>
+            <a:r>
+              <a:rPr lang="en-US" sz="1200" b="1" dirty="0">
+                <a:solidFill>
+                  <a:srgbClr val="1A2744"/>
+                </a:solidFill>
+                <a:latin typeface="Arial" pitchFamily="34" charset="0"/>
+                <a:ea typeface="Arial" pitchFamily="34" charset="-122"/>
+                <a:cs typeface="Arial" pitchFamily="34" charset="-120"/>
+              </a:rPr>
               <a:t>朝食サービスの改善</a:t>
             </a:r>
             <a:endParaRPr lang="en-US" sz="1200" dirty="0"/>
@@ -15647,13 +15818,13 @@
       </p:sp>
       <p:sp>
         <p:nvSpPr>
-          <p:cNvPr id="13" name="Text 11"/>
-          <p:cNvSpPr/>
-          <p:nvPr/>
-        </p:nvSpPr>
-        <p:spPr>
-          <a:xfrm>
-            <a:off x="4800600" y="1600200"/>
+          <p:cNvPr id="17" name="Text 15"/>
+          <p:cNvSpPr/>
+          <p:nvPr/>
+        </p:nvSpPr>
+        <p:spPr>
+          <a:xfrm>
+            <a:off x="594360" y="3383280"/>
             <a:ext cx="3657600" cy="1188720"/>
           </a:xfrm>
           <a:prstGeom prst="rect">
@@ -15732,13 +15903,13 @@
       </p:sp>
       <p:sp>
         <p:nvSpPr>
-          <p:cNvPr id="14" name="Shape 12"/>
-          <p:cNvSpPr/>
-          <p:nvPr/>
-        </p:nvSpPr>
-        <p:spPr>
-          <a:xfrm>
-            <a:off x="457200" y="3017520"/>
+          <p:cNvPr id="18" name="Shape 16"/>
+          <p:cNvSpPr/>
+          <p:nvPr/>
+        </p:nvSpPr>
+        <p:spPr>
+          <a:xfrm>
+            <a:off x="4663440" y="3017520"/>
             <a:ext cx="3977640" cy="1600200"/>
           </a:xfrm>
           <a:prstGeom prst="rect">
@@ -15759,13 +15930,13 @@
       </p:sp>
       <p:sp>
         <p:nvSpPr>
-          <p:cNvPr id="15" name="Shape 13"/>
-          <p:cNvSpPr/>
-          <p:nvPr/>
-        </p:nvSpPr>
-        <p:spPr>
-          <a:xfrm>
-            <a:off x="457200" y="3017520"/>
+          <p:cNvPr id="19" name="Shape 17"/>
+          <p:cNvSpPr/>
+          <p:nvPr/>
+        </p:nvSpPr>
+        <p:spPr>
+          <a:xfrm>
+            <a:off x="4663440" y="3017520"/>
             <a:ext cx="54864" cy="1600200"/>
           </a:xfrm>
           <a:prstGeom prst="rect">
@@ -15779,13 +15950,13 @@
       </p:sp>
       <p:sp>
         <p:nvSpPr>
-          <p:cNvPr id="16" name="Text 14"/>
-          <p:cNvSpPr/>
-          <p:nvPr/>
-        </p:nvSpPr>
-        <p:spPr>
-          <a:xfrm>
-            <a:off x="594360" y="3063240"/>
+          <p:cNvPr id="20" name="Text 18"/>
+          <p:cNvSpPr/>
+          <p:nvPr/>
+        </p:nvSpPr>
+        <p:spPr>
+          <a:xfrm>
+            <a:off x="4800600" y="3063240"/>
             <a:ext cx="3657600" cy="320040"/>
           </a:xfrm>
           <a:prstGeom prst="rect">
@@ -15818,13 +15989,13 @@
       </p:sp>
       <p:sp>
         <p:nvSpPr>
-          <p:cNvPr id="17" name="Text 15"/>
-          <p:cNvSpPr/>
-          <p:nvPr/>
-        </p:nvSpPr>
-        <p:spPr>
-          <a:xfrm>
-            <a:off x="594360" y="3383280"/>
+          <p:cNvPr id="21" name="Text 19"/>
+          <p:cNvSpPr/>
+          <p:nvPr/>
+        </p:nvSpPr>
+        <p:spPr>
+          <a:xfrm>
+            <a:off x="4800600" y="3383280"/>
             <a:ext cx="3657600" cy="1188720"/>
           </a:xfrm>
           <a:prstGeom prst="rect">
@@ -15896,177 +16067,6 @@
                 <a:cs typeface="Arial" pitchFamily="34" charset="-120"/>
               </a:rPr>
               <a:t>異常報告があった客室の優先メンテナンス実施</a:t>
-            </a:r>
-            <a:endParaRPr lang="en-US" sz="900" dirty="0"/>
-          </a:p>
-        </p:txBody>
-      </p:sp>
-      <p:sp>
-        <p:nvSpPr>
-          <p:cNvPr id="18" name="Shape 16"/>
-          <p:cNvSpPr/>
-          <p:nvPr/>
-        </p:nvSpPr>
-        <p:spPr>
-          <a:xfrm>
-            <a:off x="4663440" y="3017520"/>
-            <a:ext cx="3977640" cy="1600200"/>
-          </a:xfrm>
-          <a:prstGeom prst="rect">
-            <a:avLst/>
-          </a:prstGeom>
-          <a:solidFill>
-            <a:srgbClr val="FFFFFF"/>
-          </a:solidFill>
-          <a:ln/>
-          <a:effectLst>
-            <a:outerShdw sx="100000" sy="100000" kx="0" ky="0" algn="bl" rotWithShape="0" blurRad="50800" dist="25400" dir="8100000">
-              <a:srgbClr val="000000">
-                <a:alpha val="10000"/>
-              </a:srgbClr>
-            </a:outerShdw>
-          </a:effectLst>
-        </p:spPr>
-      </p:sp>
-      <p:sp>
-        <p:nvSpPr>
-          <p:cNvPr id="19" name="Shape 17"/>
-          <p:cNvSpPr/>
-          <p:nvPr/>
-        </p:nvSpPr>
-        <p:spPr>
-          <a:xfrm>
-            <a:off x="4663440" y="3017520"/>
-            <a:ext cx="54864" cy="1600200"/>
-          </a:xfrm>
-          <a:prstGeom prst="rect">
-            <a:avLst/>
-          </a:prstGeom>
-          <a:solidFill>
-            <a:srgbClr val="3B7DD8"/>
-          </a:solidFill>
-          <a:ln/>
-        </p:spPr>
-      </p:sp>
-      <p:sp>
-        <p:nvSpPr>
-          <p:cNvPr id="20" name="Text 18"/>
-          <p:cNvSpPr/>
-          <p:nvPr/>
-        </p:nvSpPr>
-        <p:spPr>
-          <a:xfrm>
-            <a:off x="4800600" y="3063240"/>
-            <a:ext cx="3657600" cy="320040"/>
-          </a:xfrm>
-          <a:prstGeom prst="rect">
-            <a:avLst/>
-          </a:prstGeom>
-          <a:noFill/>
-          <a:ln/>
-        </p:spPr>
-        <p:txBody>
-          <a:bodyPr wrap="square" lIns="0" tIns="0" rIns="0" bIns="0" rtlCol="0" anchor="ctr"/>
-          <a:lstStyle/>
-          <a:p>
-            <a:pPr indent="0" marL="0">
-              <a:buNone/>
-            </a:pPr>
-            <a:r>
-              <a:rPr lang="en-US" sz="1200" b="1" dirty="0">
-                <a:solidFill>
-                  <a:srgbClr val="1A2744"/>
-                </a:solidFill>
-                <a:latin typeface="Arial" pitchFamily="34" charset="0"/>
-                <a:ea typeface="Arial" pitchFamily="34" charset="-122"/>
-                <a:cs typeface="Arial" pitchFamily="34" charset="-120"/>
-              </a:rPr>
-              <a:t>スタッフ対応品質の統一</a:t>
-            </a:r>
-            <a:endParaRPr lang="en-US" sz="1200" dirty="0"/>
-          </a:p>
-        </p:txBody>
-      </p:sp>
-      <p:sp>
-        <p:nvSpPr>
-          <p:cNvPr id="21" name="Text 19"/>
-          <p:cNvSpPr/>
-          <p:nvPr/>
-        </p:nvSpPr>
-        <p:spPr>
-          <a:xfrm>
-            <a:off x="4800600" y="3383280"/>
-            <a:ext cx="3657600" cy="1188720"/>
-          </a:xfrm>
-          <a:prstGeom prst="rect">
-            <a:avLst/>
-          </a:prstGeom>
-          <a:noFill/>
-          <a:ln/>
-        </p:spPr>
-        <p:txBody>
-          <a:bodyPr wrap="square" lIns="0" tIns="0" rIns="0" bIns="0" rtlCol="0" anchor="ctr"/>
-          <a:lstStyle/>
-          <a:p>
-            <a:pPr marL="342900" indent="-342900">
-              <a:spcAft>
-                <a:spcPts val="300"/>
-              </a:spcAft>
-              <a:buSzPct val="100000"/>
-              <a:buChar char="•"/>
-            </a:pPr>
-            <a:r>
-              <a:rPr lang="en-US" sz="900" dirty="0">
-                <a:solidFill>
-                  <a:srgbClr val="334155"/>
-                </a:solidFill>
-                <a:latin typeface="Arial" pitchFamily="34" charset="0"/>
-                <a:ea typeface="Arial" pitchFamily="34" charset="-122"/>
-                <a:cs typeface="Arial" pitchFamily="34" charset="-120"/>
-              </a:rPr>
-              <a:t>接客マニュアルの見直しと全スタッフへの周知</a:t>
-            </a:r>
-            <a:endParaRPr lang="en-US" sz="900" dirty="0"/>
-          </a:p>
-          <a:p>
-            <a:pPr marL="342900" indent="-342900">
-              <a:spcAft>
-                <a:spcPts val="300"/>
-              </a:spcAft>
-              <a:buSzPct val="100000"/>
-              <a:buChar char="•"/>
-            </a:pPr>
-            <a:r>
-              <a:rPr lang="en-US" sz="900" dirty="0">
-                <a:solidFill>
-                  <a:srgbClr val="334155"/>
-                </a:solidFill>
-                <a:latin typeface="Arial" pitchFamily="34" charset="0"/>
-                <a:ea typeface="Arial" pitchFamily="34" charset="-122"/>
-                <a:cs typeface="Arial" pitchFamily="34" charset="-120"/>
-              </a:rPr>
-              <a:t>ゲストからのクレーム対応フローの明確化</a:t>
-            </a:r>
-            <a:endParaRPr lang="en-US" sz="900" dirty="0"/>
-          </a:p>
-          <a:p>
-            <a:pPr marL="342900" indent="-342900">
-              <a:spcAft>
-                <a:spcPts val="300"/>
-              </a:spcAft>
-              <a:buSzPct val="100000"/>
-              <a:buChar char="•"/>
-            </a:pPr>
-            <a:r>
-              <a:rPr lang="en-US" sz="900" dirty="0">
-                <a:solidFill>
-                  <a:srgbClr val="334155"/>
-                </a:solidFill>
-                <a:latin typeface="Arial" pitchFamily="34" charset="0"/>
-                <a:ea typeface="Arial" pitchFamily="34" charset="-122"/>
-                <a:cs typeface="Arial" pitchFamily="34" charset="-120"/>
-              </a:rPr>
-              <a:t>定期的なCS研修の実施</a:t>
             </a:r>
             <a:endParaRPr lang="en-US" sz="900" dirty="0"/>
           </a:p>

--- a/納品レポート/ホテル別レポート/daiichi_ikebukuro_口コミ分析レポート.pptx
+++ b/納品レポート/ホテル別レポート/daiichi_ikebukuro_口コミ分析レポート.pptx
@@ -211,7 +211,7 @@
                   <c:v>9.55</c:v>
                 </c:pt>
                 <c:pt idx="1">
-                  <c:v>9.19</c:v>
+                  <c:v>9.21</c:v>
                 </c:pt>
                 <c:pt idx="2">
                   <c:v>8.76</c:v>
@@ -566,7 +566,7 @@
               <c:numCache>
                 <c:ptCount val="3"/>
                 <c:pt idx="0">
-                  <c:v>116</c:v>
+                  <c:v>117</c:v>
                 </c:pt>
                 <c:pt idx="1">
                   <c:v>8</c:v>
@@ -809,7 +809,7 @@
                 <c:formatCode>General</c:formatCode>
                 <c:ptCount val="8"/>
                 <c:pt idx="0">
-                  <c:v>79</c:v>
+                  <c:v>80</c:v>
                 </c:pt>
                 <c:pt idx="1">
                   <c:v>19</c:v>
@@ -2781,7 +2781,7 @@
                 <a:ea typeface="Arial" pitchFamily="34" charset="-122"/>
                 <a:cs typeface="Arial" pitchFamily="34" charset="-120"/>
               </a:rPr>
-              <a:t>レビュー総数：127件（6サイト）</a:t>
+              <a:t>レビュー総数：128件（6サイト）</a:t>
             </a:r>
             <a:endParaRPr lang="en-US" sz="1000" dirty="0"/>
           </a:p>
@@ -2801,7 +2801,7 @@
                 <a:ea typeface="Arial" pitchFamily="34" charset="-122"/>
                 <a:cs typeface="Arial" pitchFamily="34" charset="-120"/>
               </a:rPr>
-              <a:t>作成日：2026年3月25日</a:t>
+              <a:t>作成日：2026年3月26日</a:t>
             </a:r>
             <a:endParaRPr lang="en-US" sz="1000" dirty="0"/>
           </a:p>
@@ -3621,7 +3621,7 @@
                           <a:ea typeface="Arial" pitchFamily="34" charset="-122"/>
                           <a:cs typeface="Arial" pitchFamily="34" charset="-120"/>
                         </a:rPr>
-                        <a:t>91.3%</a:t>
+                        <a:t>91.4%</a:t>
                       </a:r>
                       <a:endParaRPr lang="en-US" sz="1000" dirty="0">
                         <a:latin typeface="Arial" charset="0"/>
@@ -3895,7 +3895,7 @@
                           <a:ea typeface="Arial" pitchFamily="34" charset="-122"/>
                           <a:cs typeface="Arial" pitchFamily="34" charset="-120"/>
                         </a:rPr>
-                        <a:t>2.4%</a:t>
+                        <a:t>2.3%</a:t>
                       </a:r>
                       <a:endParaRPr lang="en-US" sz="1000" dirty="0">
                         <a:latin typeface="Arial" charset="0"/>
@@ -4717,7 +4717,7 @@
                           <a:ea typeface="Arial" pitchFamily="34" charset="-122"/>
                           <a:cs typeface="Arial" pitchFamily="34" charset="-120"/>
                         </a:rPr>
-                        <a:t>約18件/期間</a:t>
+                        <a:t>約19件/期間</a:t>
                       </a:r>
                       <a:endParaRPr lang="en-US" sz="1000" dirty="0">
                         <a:latin typeface="Arial" charset="0"/>
@@ -5481,7 +5481,7 @@
                 <a:ea typeface="Arial" pitchFamily="34" charset="-122"/>
                 <a:cs typeface="Arial" pitchFamily="34" charset="-120"/>
               </a:rPr>
-              <a:t>91.3%</a:t>
+              <a:t>91.4%</a:t>
             </a:r>
             <a:endParaRPr lang="en-US" sz="3200" dirty="0"/>
           </a:p>
@@ -5606,7 +5606,7 @@
                 <a:ea typeface="Arial" pitchFamily="34" charset="-122"/>
                 <a:cs typeface="Arial" pitchFamily="34" charset="-120"/>
               </a:rPr>
-              <a:t>2.4%</a:t>
+              <a:t>2.3%</a:t>
             </a:r>
             <a:endParaRPr lang="en-US" sz="3200" dirty="0"/>
           </a:p>
@@ -5731,7 +5731,7 @@
                 <a:ea typeface="Arial" pitchFamily="34" charset="-122"/>
                 <a:cs typeface="Arial" pitchFamily="34" charset="-120"/>
               </a:rPr>
-              <a:t>127件</a:t>
+              <a:t>128件</a:t>
             </a:r>
             <a:endParaRPr lang="en-US" sz="3200" dirty="0"/>
           </a:p>
@@ -6107,7 +6107,7 @@
                 <a:ea typeface="Arial" pitchFamily="34" charset="-122"/>
                 <a:cs typeface="Arial" pitchFamily="34" charset="-120"/>
               </a:rPr>
-              <a:t>  The space is generous, you can easily open two suitcases ...</a:t>
+              <a:t>  Small room but acceptable Old building but clean Staff ar...</a:t>
             </a:r>
             <a:endParaRPr lang="en-US" sz="1100" dirty="0"/>
           </a:p>
@@ -6665,7 +6665,7 @@
                 <a:ea typeface="Arial" pitchFamily="34" charset="-122"/>
                 <a:cs typeface="Arial" pitchFamily="34" charset="-120"/>
               </a:rPr>
-              <a:t>91.3%</a:t>
+              <a:t>91.4%</a:t>
             </a:r>
             <a:endParaRPr lang="en-US" sz="3200" dirty="0"/>
           </a:p>
@@ -6790,7 +6790,7 @@
                 <a:ea typeface="Arial" pitchFamily="34" charset="-122"/>
                 <a:cs typeface="Arial" pitchFamily="34" charset="-120"/>
               </a:rPr>
-              <a:t>2.4%</a:t>
+              <a:t>2.3%</a:t>
             </a:r>
             <a:endParaRPr lang="en-US" sz="3200" dirty="0"/>
           </a:p>
@@ -6915,7 +6915,7 @@
                 <a:ea typeface="Arial" pitchFamily="34" charset="-122"/>
                 <a:cs typeface="Arial" pitchFamily="34" charset="-120"/>
               </a:rPr>
-              <a:t>127件</a:t>
+              <a:t>128件</a:t>
             </a:r>
             <a:endParaRPr lang="en-US" sz="3200" dirty="0"/>
           </a:p>
@@ -8236,7 +8236,7 @@
                           <a:ea typeface="Arial" pitchFamily="34" charset="-122"/>
                           <a:cs typeface="Arial" pitchFamily="34" charset="-120"/>
                         </a:rPr>
-                        <a:t>32</a:t>
+                        <a:t>33</a:t>
                       </a:r>
                       <a:endParaRPr lang="en-US" sz="900" dirty="0">
                         <a:latin typeface="Arial" charset="0"/>
@@ -8304,7 +8304,7 @@
                           <a:ea typeface="Arial" pitchFamily="34" charset="-122"/>
                           <a:cs typeface="Arial" pitchFamily="34" charset="-120"/>
                         </a:rPr>
-                        <a:t>4.59</a:t>
+                        <a:t>4.61</a:t>
                       </a:r>
                       <a:endParaRPr lang="en-US" sz="900" dirty="0">
                         <a:latin typeface="Arial" charset="0"/>
@@ -8440,7 +8440,7 @@
                           <a:ea typeface="Arial" pitchFamily="34" charset="-122"/>
                           <a:cs typeface="Arial" pitchFamily="34" charset="-120"/>
                         </a:rPr>
-                        <a:t>9.19</a:t>
+                        <a:t>9.21</a:t>
                       </a:r>
                       <a:endParaRPr lang="en-US" sz="900" dirty="0">
                         <a:latin typeface="Arial" charset="0"/>
@@ -10216,7 +10216,7 @@
                 <a:ea typeface="Arial" pitchFamily="34" charset="-122"/>
                 <a:cs typeface="Arial" pitchFamily="34" charset="-120"/>
               </a:rPr>
-              <a:t>116件（91.3%）</a:t>
+              <a:t>117件（91.4%）</a:t>
             </a:r>
             <a:endParaRPr lang="en-US" sz="1100" dirty="0"/>
           </a:p>
@@ -10314,7 +10314,7 @@
                 <a:ea typeface="Arial" pitchFamily="34" charset="-122"/>
                 <a:cs typeface="Arial" pitchFamily="34" charset="-120"/>
               </a:rPr>
-              <a:t>8件（6.3%）</a:t>
+              <a:t>8件（6.2%）</a:t>
             </a:r>
             <a:endParaRPr lang="en-US" sz="1100" dirty="0"/>
           </a:p>
@@ -10412,7 +10412,7 @@
                 <a:ea typeface="Arial" pitchFamily="34" charset="-122"/>
                 <a:cs typeface="Arial" pitchFamily="34" charset="-120"/>
               </a:rPr>
-              <a:t>3件（2.4%）</a:t>
+              <a:t>3件（2.3%）</a:t>
             </a:r>
             <a:endParaRPr lang="en-US" sz="1100" dirty="0"/>
           </a:p>
@@ -10863,7 +10863,7 @@
                 <a:ea typeface="Arial" pitchFamily="34" charset="-122"/>
                 <a:cs typeface="Arial" pitchFamily="34" charset="-120"/>
               </a:rPr>
-              <a:t>「ホテルは幹線道路のすぐ裏手という非常に便利な場所にあり、すぐ外には公園があります」</a:t>
+              <a:t>「ホテルは幹線道路のすぐ裏手にあり、すぐ外に公園があるという非常に便利な場所に位置しています」</a:t>
             </a:r>
             <a:endParaRPr lang="en-US" sz="900" dirty="0"/>
           </a:p>
@@ -11309,7 +11309,7 @@
                 <a:ea typeface="Arial" pitchFamily="34" charset="-122"/>
                 <a:cs typeface="Arial" pitchFamily="34" charset="-120"/>
               </a:rPr>
-              <a:t>「ハウスキーピングは丁寧で細部にまで気を配っており、快適な滞在をさらに充実させてくれます」</a:t>
+              <a:t>「スタッフはフレンドリー」</a:t>
             </a:r>
             <a:endParaRPr lang="en-US" sz="900" dirty="0"/>
           </a:p>
@@ -11638,7 +11638,7 @@
                 <a:ea typeface="Arial" pitchFamily="34" charset="-122"/>
                 <a:cs typeface="Arial" pitchFamily="34" charset="-120"/>
               </a:rPr>
-              <a:t>10件+</a:t>
+              <a:t>20件+</a:t>
             </a:r>
             <a:endParaRPr lang="en-US" sz="900" dirty="0"/>
           </a:p>
@@ -12668,7 +12668,7 @@
                           <a:ea typeface="Arial" pitchFamily="34" charset="-122"/>
                           <a:cs typeface="Arial" pitchFamily="34" charset="-120"/>
                         </a:rPr>
-                        <a:t>The space is generous, you can easily open two suitcases ...</a:t>
+                        <a:t>Small room but acceptable Old building but clean Staff ar...</a:t>
                       </a:r>
                       <a:endParaRPr lang="en-US" sz="900" dirty="0">
                         <a:latin typeface="Arial" charset="0"/>
@@ -12736,7 +12736,7 @@
                           <a:ea typeface="Arial" pitchFamily="34" charset="-122"/>
                           <a:cs typeface="Arial" pitchFamily="34" charset="-120"/>
                         </a:rPr>
-                        <a:t>18件</a:t>
+                        <a:t>19件</a:t>
                       </a:r>
                       <a:endParaRPr lang="en-US" sz="900" dirty="0">
                         <a:latin typeface="Arial" charset="0"/>
@@ -13284,7 +13284,7 @@
                           <a:ea typeface="Arial" pitchFamily="34" charset="-122"/>
                           <a:cs typeface="Arial" pitchFamily="34" charset="-120"/>
                         </a:rPr>
-                        <a:t>9件</a:t>
+                        <a:t>10件</a:t>
                       </a:r>
                       <a:endParaRPr lang="en-US" sz="900" dirty="0">
                         <a:latin typeface="Arial" charset="0"/>

--- a/納品レポート/ホテル別レポート/daiichi_ikebukuro_口コミ分析レポート.pptx
+++ b/納品レポート/ホテル別レポート/daiichi_ikebukuro_口コミ分析レポート.pptx
@@ -208,13 +208,13 @@
                 <c:formatCode>General</c:formatCode>
                 <c:ptCount val="6"/>
                 <c:pt idx="0">
-                  <c:v>9.55</c:v>
+                  <c:v>9.56</c:v>
                 </c:pt>
                 <c:pt idx="1">
                   <c:v>9.21</c:v>
                 </c:pt>
                 <c:pt idx="2">
-                  <c:v>8.76</c:v>
+                  <c:v>8.82</c:v>
                 </c:pt>
                 <c:pt idx="3">
                   <c:v>8.5</c:v>
@@ -566,7 +566,7 @@
               <c:numCache>
                 <c:ptCount val="3"/>
                 <c:pt idx="0">
-                  <c:v>117</c:v>
+                  <c:v>119</c:v>
                 </c:pt>
                 <c:pt idx="1">
                   <c:v>8</c:v>
@@ -809,7 +809,7 @@
                 <c:formatCode>General</c:formatCode>
                 <c:ptCount val="8"/>
                 <c:pt idx="0">
-                  <c:v>80</c:v>
+                  <c:v>82</c:v>
                 </c:pt>
                 <c:pt idx="1">
                   <c:v>19</c:v>
@@ -2781,7 +2781,7 @@
                 <a:ea typeface="Arial" pitchFamily="34" charset="-122"/>
                 <a:cs typeface="Arial" pitchFamily="34" charset="-120"/>
               </a:rPr>
-              <a:t>レビュー総数：128件（6サイト）</a:t>
+              <a:t>レビュー総数：130件（6サイト）</a:t>
             </a:r>
             <a:endParaRPr lang="en-US" sz="1000" dirty="0"/>
           </a:p>
@@ -2801,7 +2801,7 @@
                 <a:ea typeface="Arial" pitchFamily="34" charset="-122"/>
                 <a:cs typeface="Arial" pitchFamily="34" charset="-120"/>
               </a:rPr>
-              <a:t>作成日：2026年3月26日</a:t>
+              <a:t>作成日：2026年3月27日</a:t>
             </a:r>
             <a:endParaRPr lang="en-US" sz="1000" dirty="0"/>
           </a:p>
@@ -3347,7 +3347,7 @@
                           <a:ea typeface="Arial" pitchFamily="34" charset="-122"/>
                           <a:cs typeface="Arial" pitchFamily="34" charset="-120"/>
                         </a:rPr>
-                        <a:t>9.16点</a:t>
+                        <a:t>9.18点</a:t>
                       </a:r>
                       <a:endParaRPr lang="en-US" sz="1000" dirty="0">
                         <a:latin typeface="Arial" charset="0"/>
@@ -3621,7 +3621,7 @@
                           <a:ea typeface="Arial" pitchFamily="34" charset="-122"/>
                           <a:cs typeface="Arial" pitchFamily="34" charset="-120"/>
                         </a:rPr>
-                        <a:t>91.4%</a:t>
+                        <a:t>91.5%</a:t>
                       </a:r>
                       <a:endParaRPr lang="en-US" sz="1000" dirty="0">
                         <a:latin typeface="Arial" charset="0"/>
@@ -3689,7 +3689,7 @@
                           <a:ea typeface="Arial" pitchFamily="34" charset="-122"/>
                           <a:cs typeface="Arial" pitchFamily="34" charset="-120"/>
                         </a:rPr>
-                        <a:t>93%以上</a:t>
+                        <a:t>94%以上</a:t>
                       </a:r>
                       <a:endParaRPr lang="en-US" sz="1000" dirty="0">
                         <a:latin typeface="Arial" charset="0"/>
@@ -5356,7 +5356,7 @@
                 <a:ea typeface="Arial" pitchFamily="34" charset="-122"/>
                 <a:cs typeface="Arial" pitchFamily="34" charset="-120"/>
               </a:rPr>
-              <a:t>9.16</a:t>
+              <a:t>9.18</a:t>
             </a:r>
             <a:endParaRPr lang="en-US" sz="3200" dirty="0"/>
           </a:p>
@@ -5481,7 +5481,7 @@
                 <a:ea typeface="Arial" pitchFamily="34" charset="-122"/>
                 <a:cs typeface="Arial" pitchFamily="34" charset="-120"/>
               </a:rPr>
-              <a:t>91.4%</a:t>
+              <a:t>91.5%</a:t>
             </a:r>
             <a:endParaRPr lang="en-US" sz="3200" dirty="0"/>
           </a:p>
@@ -5731,7 +5731,7 @@
                 <a:ea typeface="Arial" pitchFamily="34" charset="-122"/>
                 <a:cs typeface="Arial" pitchFamily="34" charset="-120"/>
               </a:rPr>
-              <a:t>128件</a:t>
+              <a:t>130件</a:t>
             </a:r>
             <a:endParaRPr lang="en-US" sz="3200" dirty="0"/>
           </a:p>
@@ -5879,7 +5879,7 @@
                 <a:ea typeface="Arial" pitchFamily="34" charset="-122"/>
                 <a:cs typeface="Arial" pitchFamily="34" charset="-120"/>
               </a:rPr>
-              <a:t>  立地は非常に便利です</a:t>
+              <a:t>  駅近で周りにお店も多く、とても過ごしやすかったです</a:t>
             </a:r>
             <a:endParaRPr lang="en-US" sz="1100" dirty="0"/>
           </a:p>
@@ -6540,7 +6540,7 @@
                 <a:ea typeface="Arial" pitchFamily="34" charset="-122"/>
                 <a:cs typeface="Arial" pitchFamily="34" charset="-120"/>
               </a:rPr>
-              <a:t>9.16</a:t>
+              <a:t>9.18</a:t>
             </a:r>
             <a:endParaRPr lang="en-US" sz="3200" dirty="0"/>
           </a:p>
@@ -6665,7 +6665,7 @@
                 <a:ea typeface="Arial" pitchFamily="34" charset="-122"/>
                 <a:cs typeface="Arial" pitchFamily="34" charset="-120"/>
               </a:rPr>
-              <a:t>91.4%</a:t>
+              <a:t>91.5%</a:t>
             </a:r>
             <a:endParaRPr lang="en-US" sz="3200" dirty="0"/>
           </a:p>
@@ -6915,7 +6915,7 @@
                 <a:ea typeface="Arial" pitchFamily="34" charset="-122"/>
                 <a:cs typeface="Arial" pitchFamily="34" charset="-120"/>
               </a:rPr>
-              <a:t>128件</a:t>
+              <a:t>130件</a:t>
             </a:r>
             <a:endParaRPr lang="en-US" sz="3200" dirty="0"/>
           </a:p>
@@ -7336,7 +7336,7 @@
                 <a:ea typeface="Arial" pitchFamily="34" charset="-122"/>
                 <a:cs typeface="Arial" pitchFamily="34" charset="-120"/>
               </a:rPr>
-              <a:t>Trip.com(9.55)が最高スコア。</a:t>
+              <a:t>Trip.com(9.56)が最高スコア。</a:t>
             </a:r>
             <a:endParaRPr lang="en-US" sz="1100" dirty="0"/>
           </a:p>
@@ -7894,7 +7894,7 @@
                           <a:ea typeface="Arial" pitchFamily="34" charset="-122"/>
                           <a:cs typeface="Arial" pitchFamily="34" charset="-120"/>
                         </a:rPr>
-                        <a:t>65</a:t>
+                        <a:t>66</a:t>
                       </a:r>
                       <a:endParaRPr lang="en-US" sz="900" dirty="0">
                         <a:latin typeface="Arial" charset="0"/>
@@ -7962,7 +7962,7 @@
                           <a:ea typeface="Arial" pitchFamily="34" charset="-122"/>
                           <a:cs typeface="Arial" pitchFamily="34" charset="-120"/>
                         </a:rPr>
-                        <a:t>9.55</a:t>
+                        <a:t>9.56</a:t>
                       </a:r>
                       <a:endParaRPr lang="en-US" sz="900" dirty="0">
                         <a:latin typeface="Arial" charset="0"/>
@@ -8098,7 +8098,7 @@
                           <a:ea typeface="Arial" pitchFamily="34" charset="-122"/>
                           <a:cs typeface="Arial" pitchFamily="34" charset="-120"/>
                         </a:rPr>
-                        <a:t>9.55</a:t>
+                        <a:t>9.56</a:t>
                       </a:r>
                       <a:endParaRPr lang="en-US" sz="900" dirty="0">
                         <a:latin typeface="Arial" charset="0"/>
@@ -8578,7 +8578,7 @@
                           <a:ea typeface="Arial" pitchFamily="34" charset="-122"/>
                           <a:cs typeface="Arial" pitchFamily="34" charset="-120"/>
                         </a:rPr>
-                        <a:t>21</a:t>
+                        <a:t>22</a:t>
                       </a:r>
                       <a:endParaRPr lang="en-US" sz="900" dirty="0">
                         <a:latin typeface="Arial" charset="0"/>
@@ -8646,7 +8646,7 @@
                           <a:ea typeface="Arial" pitchFamily="34" charset="-122"/>
                           <a:cs typeface="Arial" pitchFamily="34" charset="-120"/>
                         </a:rPr>
-                        <a:t>8.76</a:t>
+                        <a:t>8.82</a:t>
                       </a:r>
                       <a:endParaRPr lang="en-US" sz="900" dirty="0">
                         <a:latin typeface="Arial" charset="0"/>
@@ -8782,7 +8782,7 @@
                           <a:ea typeface="Arial" pitchFamily="34" charset="-122"/>
                           <a:cs typeface="Arial" pitchFamily="34" charset="-120"/>
                         </a:rPr>
-                        <a:t>8.76</a:t>
+                        <a:t>8.82</a:t>
                       </a:r>
                       <a:endParaRPr lang="en-US" sz="900" dirty="0">
                         <a:latin typeface="Arial" charset="0"/>
@@ -10216,7 +10216,7 @@
                 <a:ea typeface="Arial" pitchFamily="34" charset="-122"/>
                 <a:cs typeface="Arial" pitchFamily="34" charset="-120"/>
               </a:rPr>
-              <a:t>117件（91.4%）</a:t>
+              <a:t>119件（91.5%）</a:t>
             </a:r>
             <a:endParaRPr lang="en-US" sz="1100" dirty="0"/>
           </a:p>
@@ -10824,7 +10824,7 @@
                 <a:ea typeface="Arial" pitchFamily="34" charset="-122"/>
                 <a:cs typeface="Arial" pitchFamily="34" charset="-120"/>
               </a:rPr>
-              <a:t>立地は非常に便利です</a:t>
+              <a:t>駅近で周りにお店も多く、とても過ごしやすかったです</a:t>
             </a:r>
             <a:endParaRPr lang="en-US" sz="900" dirty="0"/>
           </a:p>
@@ -10863,7 +10863,7 @@
                 <a:ea typeface="Arial" pitchFamily="34" charset="-122"/>
                 <a:cs typeface="Arial" pitchFamily="34" charset="-120"/>
               </a:rPr>
-              <a:t>「ホテルは幹線道路のすぐ裏手にあり、すぐ外に公園があるという非常に便利な場所に位置しています」</a:t>
+              <a:t>「立地は非常に便利です」</a:t>
             </a:r>
             <a:endParaRPr lang="en-US" sz="900" dirty="0"/>
           </a:p>
@@ -13010,7 +13010,7 @@
                           <a:ea typeface="Arial" pitchFamily="34" charset="-122"/>
                           <a:cs typeface="Arial" pitchFamily="34" charset="-120"/>
                         </a:rPr>
-                        <a:t>12件</a:t>
+                        <a:t>13件</a:t>
                       </a:r>
                       <a:endParaRPr lang="en-US" sz="900" dirty="0">
                         <a:latin typeface="Arial" charset="0"/>

--- a/納品レポート/ホテル別レポート/daiichi_ikebukuro_口コミ分析レポート.pptx
+++ b/納品レポート/ホテル別レポート/daiichi_ikebukuro_口コミ分析レポート.pptx
@@ -2801,7 +2801,7 @@
                 <a:ea typeface="Arial" pitchFamily="34" charset="-122"/>
                 <a:cs typeface="Arial" pitchFamily="34" charset="-120"/>
               </a:rPr>
-              <a:t>作成日：2026年3月27日</a:t>
+              <a:t>作成日：2026年3月28日</a:t>
             </a:r>
             <a:endParaRPr lang="en-US" sz="1000" dirty="0"/>
           </a:p>
@@ -11638,7 +11638,7 @@
                 <a:ea typeface="Arial" pitchFamily="34" charset="-122"/>
                 <a:cs typeface="Arial" pitchFamily="34" charset="-120"/>
               </a:rPr>
-              <a:t>20件+</a:t>
+              <a:t>10件+</a:t>
             </a:r>
             <a:endParaRPr lang="en-US" sz="900" dirty="0"/>
           </a:p>
@@ -13010,7 +13010,7 @@
                           <a:ea typeface="Arial" pitchFamily="34" charset="-122"/>
                           <a:cs typeface="Arial" pitchFamily="34" charset="-120"/>
                         </a:rPr>
-                        <a:t>13件</a:t>
+                        <a:t>12件</a:t>
                       </a:r>
                       <a:endParaRPr lang="en-US" sz="900" dirty="0">
                         <a:latin typeface="Arial" charset="0"/>

--- a/納品レポート/ホテル別レポート/daiichi_ikebukuro_口コミ分析レポート.pptx
+++ b/納品レポート/ホテル別レポート/daiichi_ikebukuro_口コミ分析レポート.pptx
@@ -274,10 +274,10 @@
                 <c:formatCode>General</c:formatCode>
                 <c:ptCount val="6"/>
                 <c:pt idx="0">
-                  <c:v>9.56</c:v>
+                  <c:v>9.57</c:v>
                 </c:pt>
                 <c:pt idx="1">
-                  <c:v>9.21</c:v>
+                  <c:v>9.31</c:v>
                 </c:pt>
                 <c:pt idx="2">
                   <c:v>8.82</c:v>
@@ -628,13 +628,13 @@
                 <c:formatCode>General</c:formatCode>
                 <c:ptCount val="8"/>
                 <c:pt idx="0">
-                  <c:v>82</c:v>
+                  <c:v>87</c:v>
                 </c:pt>
                 <c:pt idx="1">
                   <c:v>19</c:v>
                 </c:pt>
                 <c:pt idx="2">
-                  <c:v>18</c:v>
+                  <c:v>17</c:v>
                 </c:pt>
                 <c:pt idx="3">
                   <c:v>3</c:v>
@@ -2537,7 +2537,7 @@
                 <a:ea typeface="Arial" pitchFamily="34" charset="-122"/>
                 <a:cs typeface="Arial" pitchFamily="34" charset="-120"/>
               </a:rPr>
-              <a:t>レビュー総数：130件</a:t>
+              <a:t>レビュー総数：134件</a:t>
             </a:r>
             <a:endParaRPr lang="en-US" sz="1000" dirty="0"/>
           </a:p>
@@ -2817,7 +2817,7 @@
                 <a:ea typeface="Arial" pitchFamily="34" charset="-122"/>
                 <a:cs typeface="Arial" pitchFamily="34" charset="-120"/>
               </a:rPr>
-              <a:t>第一イン池袋は全体平均9.18点（10pt換算）、高評価率91.5%を達成しています。本レポートで示した改善施策を段階的に実施することで、さらなる顧客満足度向上が期待できます。</a:t>
+              <a:t>第一イン池袋は全体平均9.22点（10pt換算）、高評価率91.8%を達成しています。本レポートで示した改善施策を段階的に実施することで、さらなる顧客満足度向上が期待できます。</a:t>
             </a:r>
             <a:endParaRPr lang="en-US" sz="1200" dirty="0"/>
           </a:p>
@@ -3254,7 +3254,7 @@
                 <a:ea typeface="Arial" pitchFamily="34" charset="-122"/>
                 <a:cs typeface="Arial" pitchFamily="34" charset="-120"/>
               </a:rPr>
-              <a:t>9.18</a:t>
+              <a:t>9.22</a:t>
             </a:r>
             <a:endParaRPr lang="en-US" sz="2800" dirty="0"/>
           </a:p>
@@ -3372,7 +3372,7 @@
                 <a:ea typeface="Arial" pitchFamily="34" charset="-122"/>
                 <a:cs typeface="Arial" pitchFamily="34" charset="-120"/>
               </a:rPr>
-              <a:t>91.5%</a:t>
+              <a:t>91.8%</a:t>
             </a:r>
             <a:endParaRPr lang="en-US" sz="2800" dirty="0"/>
           </a:p>
@@ -3490,7 +3490,7 @@
                 <a:ea typeface="Arial" pitchFamily="34" charset="-122"/>
                 <a:cs typeface="Arial" pitchFamily="34" charset="-120"/>
               </a:rPr>
-              <a:t>2.3%</a:t>
+              <a:t>2.2%</a:t>
             </a:r>
             <a:endParaRPr lang="en-US" sz="2800" dirty="0"/>
           </a:p>
@@ -3608,7 +3608,7 @@
                 <a:ea typeface="Arial" pitchFamily="34" charset="-122"/>
                 <a:cs typeface="Arial" pitchFamily="34" charset="-120"/>
               </a:rPr>
-              <a:t>130件</a:t>
+              <a:t>134件</a:t>
             </a:r>
             <a:endParaRPr lang="en-US" sz="2800" dirty="0"/>
           </a:p>
@@ -4347,7 +4347,7 @@
                           <a:ea typeface="Arial" pitchFamily="34" charset="-122"/>
                           <a:cs typeface="Arial" pitchFamily="34" charset="-120"/>
                         </a:rPr>
-                        <a:t>66</a:t>
+                        <a:t>68</a:t>
                       </a:r>
                       <a:endParaRPr lang="en-US" sz="800" dirty="0">
                         <a:latin typeface="Arial" charset="0"/>
@@ -4415,7 +4415,7 @@
                           <a:ea typeface="Arial" pitchFamily="34" charset="-122"/>
                           <a:cs typeface="Arial" pitchFamily="34" charset="-120"/>
                         </a:rPr>
-                        <a:t>9.56/10</a:t>
+                        <a:t>9.57/10</a:t>
                       </a:r>
                       <a:endParaRPr lang="en-US" sz="800" dirty="0">
                         <a:latin typeface="Arial" charset="0"/>
@@ -4483,7 +4483,7 @@
                           <a:ea typeface="Arial" pitchFamily="34" charset="-122"/>
                           <a:cs typeface="Arial" pitchFamily="34" charset="-120"/>
                         </a:rPr>
-                        <a:t>9.56</a:t>
+                        <a:t>9.57</a:t>
                       </a:r>
                       <a:endParaRPr lang="en-US" sz="800" dirty="0">
                         <a:latin typeface="Arial" charset="0"/>
@@ -4689,7 +4689,7 @@
                           <a:ea typeface="Arial" pitchFamily="34" charset="-122"/>
                           <a:cs typeface="Arial" pitchFamily="34" charset="-120"/>
                         </a:rPr>
-                        <a:t>33</a:t>
+                        <a:t>35</a:t>
                       </a:r>
                       <a:endParaRPr lang="en-US" sz="800" dirty="0">
                         <a:latin typeface="Arial" charset="0"/>
@@ -4757,7 +4757,7 @@
                           <a:ea typeface="Arial" pitchFamily="34" charset="-122"/>
                           <a:cs typeface="Arial" pitchFamily="34" charset="-120"/>
                         </a:rPr>
-                        <a:t>4.61/5</a:t>
+                        <a:t>4.66/5</a:t>
                       </a:r>
                       <a:endParaRPr lang="en-US" sz="800" dirty="0">
                         <a:latin typeface="Arial" charset="0"/>
@@ -4825,7 +4825,7 @@
                           <a:ea typeface="Arial" pitchFamily="34" charset="-122"/>
                           <a:cs typeface="Arial" pitchFamily="34" charset="-120"/>
                         </a:rPr>
-                        <a:t>9.21</a:t>
+                        <a:t>9.31</a:t>
                       </a:r>
                       <a:endParaRPr lang="en-US" sz="800" dirty="0">
                         <a:latin typeface="Arial" charset="0"/>
@@ -6646,7 +6646,7 @@
                 <a:ea typeface="Arial" pitchFamily="34" charset="-122"/>
                 <a:cs typeface="Arial" pitchFamily="34" charset="-120"/>
               </a:rPr>
-              <a:t>119件（91.5%）</a:t>
+              <a:t>123件（91.8%）</a:t>
             </a:r>
             <a:endParaRPr lang="en-US" sz="1600" dirty="0"/>
           </a:p>
@@ -6744,7 +6744,7 @@
                 <a:ea typeface="Arial" pitchFamily="34" charset="-122"/>
                 <a:cs typeface="Arial" pitchFamily="34" charset="-120"/>
               </a:rPr>
-              <a:t>8件（6.2%）</a:t>
+              <a:t>8件（6.0%）</a:t>
             </a:r>
             <a:endParaRPr lang="en-US" sz="1600" dirty="0"/>
           </a:p>
@@ -6842,7 +6842,7 @@
                 <a:ea typeface="Arial" pitchFamily="34" charset="-122"/>
                 <a:cs typeface="Arial" pitchFamily="34" charset="-120"/>
               </a:rPr>
-              <a:t>3件（2.3%）</a:t>
+              <a:t>3件（2.2%）</a:t>
             </a:r>
             <a:endParaRPr lang="en-US" sz="1600" dirty="0"/>
           </a:p>
@@ -7004,7 +7004,7 @@
                 <a:ea typeface="Arial" pitchFamily="34" charset="-122"/>
                 <a:cs typeface="Arial" pitchFamily="34" charset="-120"/>
               </a:rPr>
-              <a:t>高評価レビュー（8-10点: 119件）の分析から、主要な強みテーマを抽出しています。立地・アクセス、客室清潔感、スタッフ対応が高評価の中心的テーマです。</a:t>
+              <a:t>高評価レビュー（8-10点: 123件）の分析から、主要な強みテーマを抽出しています。立地・アクセス、客室清潔感、スタッフ対応が高評価の中心的テーマです。</a:t>
             </a:r>
             <a:endParaRPr lang="en-US" sz="1200" dirty="0"/>
           </a:p>
@@ -8044,7 +8044,7 @@
                 <a:ea typeface="Arial" pitchFamily="34" charset="-122"/>
                 <a:cs typeface="Arial" pitchFamily="34" charset="-120"/>
               </a:rPr>
-              <a:t>全体平均 9.18点 → 目標 9.68点</a:t>
+              <a:t>全体平均 9.22点 → 目標 9.72点</a:t>
             </a:r>
             <a:endParaRPr lang="en-US" sz="1200" dirty="0"/>
           </a:p>
@@ -8061,7 +8061,7 @@
                 <a:ea typeface="Arial" pitchFamily="34" charset="-122"/>
                 <a:cs typeface="Arial" pitchFamily="34" charset="-120"/>
               </a:rPr>
-              <a:t>高評価率 91.5% → 目標 96.5%</a:t>
+              <a:t>高評価率 91.8% → 目標 96.8%</a:t>
             </a:r>
             <a:endParaRPr lang="en-US" sz="1200" dirty="0"/>
           </a:p>
@@ -8078,7 +8078,7 @@
                 <a:ea typeface="Arial" pitchFamily="34" charset="-122"/>
                 <a:cs typeface="Arial" pitchFamily="34" charset="-120"/>
               </a:rPr>
-              <a:t>低評価率 2.3% → 目標 0.3%</a:t>
+              <a:t>低評価率 2.2% → 目標 0.2%</a:t>
             </a:r>
             <a:endParaRPr lang="en-US" sz="1200" dirty="0"/>
           </a:p>

--- a/納品レポート/ホテル別レポート/daiichi_ikebukuro_口コミ分析レポート.pptx
+++ b/納品レポート/ホテル別レポート/daiichi_ikebukuro_口コミ分析レポート.pptx
@@ -274,7 +274,7 @@
                 <c:formatCode>General</c:formatCode>
                 <c:ptCount val="6"/>
                 <c:pt idx="0">
-                  <c:v>9.57</c:v>
+                  <c:v>9.58</c:v>
                 </c:pt>
                 <c:pt idx="1">
                   <c:v>9.31</c:v>
@@ -289,7 +289,7 @@
                   <c:v>8</c:v>
                 </c:pt>
                 <c:pt idx="5">
-                  <c:v>5.5</c:v>
+                  <c:v>4.67</c:v>
                 </c:pt>
               </c:numCache>
             </c:numRef>
@@ -628,13 +628,13 @@
                 <c:formatCode>General</c:formatCode>
                 <c:ptCount val="8"/>
                 <c:pt idx="0">
-                  <c:v>87</c:v>
+                  <c:v>88</c:v>
                 </c:pt>
                 <c:pt idx="1">
                   <c:v>19</c:v>
                 </c:pt>
                 <c:pt idx="2">
-                  <c:v>17</c:v>
+                  <c:v>16</c:v>
                 </c:pt>
                 <c:pt idx="3">
                   <c:v>3</c:v>
@@ -2817,7 +2817,7 @@
                 <a:ea typeface="Arial" pitchFamily="34" charset="-122"/>
                 <a:cs typeface="Arial" pitchFamily="34" charset="-120"/>
               </a:rPr>
-              <a:t>第一イン池袋は全体平均9.22点（10pt換算）、高評価率91.8%を達成しています。本レポートで示した改善施策を段階的に実施することで、さらなる顧客満足度向上が期待できます。</a:t>
+              <a:t>第一イン池袋は全体平均9.23点（10pt換算）、高評価率91.8%を達成しています。本レポートで示した改善施策を段階的に実施することで、さらなる顧客満足度向上が期待できます。</a:t>
             </a:r>
             <a:endParaRPr lang="en-US" sz="1200" dirty="0"/>
           </a:p>
@@ -3254,7 +3254,7 @@
                 <a:ea typeface="Arial" pitchFamily="34" charset="-122"/>
                 <a:cs typeface="Arial" pitchFamily="34" charset="-120"/>
               </a:rPr>
-              <a:t>9.22</a:t>
+              <a:t>9.23</a:t>
             </a:r>
             <a:endParaRPr lang="en-US" sz="2800" dirty="0"/>
           </a:p>
@@ -4347,7 +4347,7 @@
                           <a:ea typeface="Arial" pitchFamily="34" charset="-122"/>
                           <a:cs typeface="Arial" pitchFamily="34" charset="-120"/>
                         </a:rPr>
-                        <a:t>68</a:t>
+                        <a:t>69</a:t>
                       </a:r>
                       <a:endParaRPr lang="en-US" sz="800" dirty="0">
                         <a:latin typeface="Arial" charset="0"/>
@@ -4415,7 +4415,7 @@
                           <a:ea typeface="Arial" pitchFamily="34" charset="-122"/>
                           <a:cs typeface="Arial" pitchFamily="34" charset="-120"/>
                         </a:rPr>
-                        <a:t>9.57/10</a:t>
+                        <a:t>9.58/10</a:t>
                       </a:r>
                       <a:endParaRPr lang="en-US" sz="800" dirty="0">
                         <a:latin typeface="Arial" charset="0"/>
@@ -4483,7 +4483,7 @@
                           <a:ea typeface="Arial" pitchFamily="34" charset="-122"/>
                           <a:cs typeface="Arial" pitchFamily="34" charset="-120"/>
                         </a:rPr>
-                        <a:t>9.57</a:t>
+                        <a:t>9.58</a:t>
                       </a:r>
                       <a:endParaRPr lang="en-US" sz="800" dirty="0">
                         <a:latin typeface="Arial" charset="0"/>
@@ -6057,7 +6057,7 @@
                           <a:ea typeface="Arial" pitchFamily="34" charset="-122"/>
                           <a:cs typeface="Arial" pitchFamily="34" charset="-120"/>
                         </a:rPr>
-                        <a:t>4</a:t>
+                        <a:t>3</a:t>
                       </a:r>
                       <a:endParaRPr lang="en-US" sz="800" dirty="0">
                         <a:latin typeface="Arial" charset="0"/>
@@ -6125,7 +6125,7 @@
                           <a:ea typeface="Arial" pitchFamily="34" charset="-122"/>
                           <a:cs typeface="Arial" pitchFamily="34" charset="-120"/>
                         </a:rPr>
-                        <a:t>5.50/10</a:t>
+                        <a:t>4.67/10</a:t>
                       </a:r>
                       <a:endParaRPr lang="en-US" sz="800" dirty="0">
                         <a:latin typeface="Arial" charset="0"/>
@@ -6193,7 +6193,7 @@
                           <a:ea typeface="Arial" pitchFamily="34" charset="-122"/>
                           <a:cs typeface="Arial" pitchFamily="34" charset="-120"/>
                         </a:rPr>
-                        <a:t>5.50</a:t>
+                        <a:t>4.67</a:t>
                       </a:r>
                       <a:endParaRPr lang="en-US" sz="800" dirty="0">
                         <a:latin typeface="Arial" charset="0"/>
@@ -8044,7 +8044,7 @@
                 <a:ea typeface="Arial" pitchFamily="34" charset="-122"/>
                 <a:cs typeface="Arial" pitchFamily="34" charset="-120"/>
               </a:rPr>
-              <a:t>全体平均 9.22点 → 目標 9.72点</a:t>
+              <a:t>全体平均 9.23点 → 目標 9.73点</a:t>
             </a:r>
             <a:endParaRPr lang="en-US" sz="1200" dirty="0"/>
           </a:p>

--- a/納品レポート/ホテル別レポート/daiichi_ikebukuro_口コミ分析レポート.pptx
+++ b/納品レポート/ホテル別レポート/daiichi_ikebukuro_口コミ分析レポート.pptx
@@ -274,10 +274,10 @@
                 <c:formatCode>General</c:formatCode>
                 <c:ptCount val="6"/>
                 <c:pt idx="0">
-                  <c:v>9.58</c:v>
+                  <c:v>9.59</c:v>
                 </c:pt>
                 <c:pt idx="1">
-                  <c:v>9.31</c:v>
+                  <c:v>9.35</c:v>
                 </c:pt>
                 <c:pt idx="2">
                   <c:v>8.82</c:v>
@@ -628,13 +628,13 @@
                 <c:formatCode>General</c:formatCode>
                 <c:ptCount val="8"/>
                 <c:pt idx="0">
-                  <c:v>88</c:v>
+                  <c:v>89</c:v>
                 </c:pt>
                 <c:pt idx="1">
                   <c:v>19</c:v>
                 </c:pt>
                 <c:pt idx="2">
-                  <c:v>16</c:v>
+                  <c:v>15</c:v>
                 </c:pt>
                 <c:pt idx="3">
                   <c:v>3</c:v>
@@ -2817,7 +2817,7 @@
                 <a:ea typeface="Arial" pitchFamily="34" charset="-122"/>
                 <a:cs typeface="Arial" pitchFamily="34" charset="-120"/>
               </a:rPr>
-              <a:t>第一イン池袋は全体平均9.23点（10pt換算）、高評価率91.8%を達成しています。本レポートで示した改善施策を段階的に実施することで、さらなる顧客満足度向上が期待できます。</a:t>
+              <a:t>第一イン池袋は全体平均9.25点（10pt換算）、高評価率91.8%を達成しています。本レポートで示した改善施策を段階的に実施することで、さらなる顧客満足度向上が期待できます。</a:t>
             </a:r>
             <a:endParaRPr lang="en-US" sz="1200" dirty="0"/>
           </a:p>
@@ -3254,7 +3254,7 @@
                 <a:ea typeface="Arial" pitchFamily="34" charset="-122"/>
                 <a:cs typeface="Arial" pitchFamily="34" charset="-120"/>
               </a:rPr>
-              <a:t>9.23</a:t>
+              <a:t>9.25</a:t>
             </a:r>
             <a:endParaRPr lang="en-US" sz="2800" dirty="0"/>
           </a:p>
@@ -4347,7 +4347,7 @@
                           <a:ea typeface="Arial" pitchFamily="34" charset="-122"/>
                           <a:cs typeface="Arial" pitchFamily="34" charset="-120"/>
                         </a:rPr>
-                        <a:t>69</a:t>
+                        <a:t>70</a:t>
                       </a:r>
                       <a:endParaRPr lang="en-US" sz="800" dirty="0">
                         <a:latin typeface="Arial" charset="0"/>
@@ -4415,7 +4415,7 @@
                           <a:ea typeface="Arial" pitchFamily="34" charset="-122"/>
                           <a:cs typeface="Arial" pitchFamily="34" charset="-120"/>
                         </a:rPr>
-                        <a:t>9.58/10</a:t>
+                        <a:t>9.59/10</a:t>
                       </a:r>
                       <a:endParaRPr lang="en-US" sz="800" dirty="0">
                         <a:latin typeface="Arial" charset="0"/>
@@ -4483,7 +4483,7 @@
                           <a:ea typeface="Arial" pitchFamily="34" charset="-122"/>
                           <a:cs typeface="Arial" pitchFamily="34" charset="-120"/>
                         </a:rPr>
-                        <a:t>9.58</a:t>
+                        <a:t>9.59</a:t>
                       </a:r>
                       <a:endParaRPr lang="en-US" sz="800" dirty="0">
                         <a:latin typeface="Arial" charset="0"/>
@@ -4689,7 +4689,7 @@
                           <a:ea typeface="Arial" pitchFamily="34" charset="-122"/>
                           <a:cs typeface="Arial" pitchFamily="34" charset="-120"/>
                         </a:rPr>
-                        <a:t>35</a:t>
+                        <a:t>34</a:t>
                       </a:r>
                       <a:endParaRPr lang="en-US" sz="800" dirty="0">
                         <a:latin typeface="Arial" charset="0"/>
@@ -4757,7 +4757,7 @@
                           <a:ea typeface="Arial" pitchFamily="34" charset="-122"/>
                           <a:cs typeface="Arial" pitchFamily="34" charset="-120"/>
                         </a:rPr>
-                        <a:t>4.66/5</a:t>
+                        <a:t>4.68/5</a:t>
                       </a:r>
                       <a:endParaRPr lang="en-US" sz="800" dirty="0">
                         <a:latin typeface="Arial" charset="0"/>
@@ -4825,7 +4825,7 @@
                           <a:ea typeface="Arial" pitchFamily="34" charset="-122"/>
                           <a:cs typeface="Arial" pitchFamily="34" charset="-120"/>
                         </a:rPr>
-                        <a:t>9.31</a:t>
+                        <a:t>9.35</a:t>
                       </a:r>
                       <a:endParaRPr lang="en-US" sz="800" dirty="0">
                         <a:latin typeface="Arial" charset="0"/>
@@ -8044,7 +8044,7 @@
                 <a:ea typeface="Arial" pitchFamily="34" charset="-122"/>
                 <a:cs typeface="Arial" pitchFamily="34" charset="-120"/>
               </a:rPr>
-              <a:t>全体平均 9.23点 → 目標 9.73点</a:t>
+              <a:t>全体平均 9.25点 → 目標 9.75点</a:t>
             </a:r>
             <a:endParaRPr lang="en-US" sz="1200" dirty="0"/>
           </a:p>

--- a/納品レポート/ホテル別レポート/daiichi_ikebukuro_口コミ分析レポート.pptx
+++ b/納品レポート/ホテル別レポート/daiichi_ikebukuro_口コミ分析レポート.pptx
@@ -208,13 +208,13 @@
                   <c:v>10</c:v>
                 </c:pt>
                 <c:pt idx="1">
-                  <c:v>9.73</c:v>
+                  <c:v>9.72</c:v>
                 </c:pt>
                 <c:pt idx="2">
                   <c:v>9.38</c:v>
                 </c:pt>
                 <c:pt idx="3">
-                  <c:v>9.15</c:v>
+                  <c:v>9.21</c:v>
                 </c:pt>
                 <c:pt idx="4">
                   <c:v>4</c:v>
@@ -560,7 +560,7 @@
               <c:numCache>
                 <c:ptCount val="3"/>
                 <c:pt idx="0">
-                  <c:v>70</c:v>
+                  <c:v>74</c:v>
                 </c:pt>
                 <c:pt idx="1">
                   <c:v>3</c:v>
@@ -775,10 +775,10 @@
                 <c:formatCode>General</c:formatCode>
                 <c:ptCount val="6"/>
                 <c:pt idx="0">
-                  <c:v>56</c:v>
+                  <c:v>59</c:v>
                 </c:pt>
                 <c:pt idx="1">
-                  <c:v>11</c:v>
+                  <c:v>12</c:v>
                 </c:pt>
                 <c:pt idx="2">
                   <c:v>3</c:v>
@@ -2741,7 +2741,7 @@
                 <a:ea typeface="Arial" pitchFamily="34" charset="-122"/>
                 <a:cs typeface="Arial" pitchFamily="34" charset="-120"/>
               </a:rPr>
-              <a:t>レビュー総数：75件（5サイト）</a:t>
+              <a:t>レビュー総数：79件（5サイト）</a:t>
             </a:r>
             <a:endParaRPr lang="en-US" sz="1000" dirty="0"/>
           </a:p>
@@ -2761,7 +2761,7 @@
                 <a:ea typeface="Arial" pitchFamily="34" charset="-122"/>
                 <a:cs typeface="Arial" pitchFamily="34" charset="-120"/>
               </a:rPr>
-              <a:t>作成日：2026年4月2日</a:t>
+              <a:t>作成日：2026年4月5日</a:t>
             </a:r>
             <a:endParaRPr lang="en-US" sz="1000" dirty="0"/>
           </a:p>
@@ -3307,7 +3307,7 @@
                           <a:ea typeface="Arial" pitchFamily="34" charset="-122"/>
                           <a:cs typeface="Arial" pitchFamily="34" charset="-120"/>
                         </a:rPr>
-                        <a:t>9.48点</a:t>
+                        <a:t>9.49点</a:t>
                       </a:r>
                       <a:endParaRPr lang="en-US" sz="1000" dirty="0">
                         <a:latin typeface="Arial" charset="0"/>
@@ -3581,7 +3581,7 @@
                           <a:ea typeface="Arial" pitchFamily="34" charset="-122"/>
                           <a:cs typeface="Arial" pitchFamily="34" charset="-120"/>
                         </a:rPr>
-                        <a:t>93.3%</a:t>
+                        <a:t>93.7%</a:t>
                       </a:r>
                       <a:endParaRPr lang="en-US" sz="1000" dirty="0">
                         <a:latin typeface="Arial" charset="0"/>
@@ -3649,7 +3649,7 @@
                           <a:ea typeface="Arial" pitchFamily="34" charset="-122"/>
                           <a:cs typeface="Arial" pitchFamily="34" charset="-120"/>
                         </a:rPr>
-                        <a:t>95%以上</a:t>
+                        <a:t>96%以上</a:t>
                       </a:r>
                       <a:endParaRPr lang="en-US" sz="1000" dirty="0">
                         <a:latin typeface="Arial" charset="0"/>
@@ -3855,7 +3855,7 @@
                           <a:ea typeface="Arial" pitchFamily="34" charset="-122"/>
                           <a:cs typeface="Arial" pitchFamily="34" charset="-120"/>
                         </a:rPr>
-                        <a:t>2.7%</a:t>
+                        <a:t>2.5%</a:t>
                       </a:r>
                       <a:endParaRPr lang="en-US" sz="1000" dirty="0">
                         <a:latin typeface="Arial" charset="0"/>
@@ -4609,7 +4609,7 @@
                           <a:ea typeface="Arial" pitchFamily="34" charset="-122"/>
                           <a:cs typeface="Arial" pitchFamily="34" charset="-120"/>
                         </a:rPr>
-                        <a:t>エアコン・空調クレーム</a:t>
+                        <a:t>部屋の狭さクレーム</a:t>
                       </a:r>
                       <a:endParaRPr lang="en-US" sz="1000" dirty="0">
                         <a:latin typeface="Arial" charset="0"/>
@@ -4677,7 +4677,7 @@
                           <a:ea typeface="Arial" pitchFamily="34" charset="-122"/>
                           <a:cs typeface="Arial" pitchFamily="34" charset="-120"/>
                         </a:rPr>
-                        <a:t>約10件/期間</a:t>
+                        <a:t>約11件/期間</a:t>
                       </a:r>
                       <a:endParaRPr lang="en-US" sz="1000" dirty="0">
                         <a:latin typeface="Arial" charset="0"/>
@@ -5316,7 +5316,7 @@
                 <a:ea typeface="Arial" pitchFamily="34" charset="-122"/>
                 <a:cs typeface="Arial" pitchFamily="34" charset="-120"/>
               </a:rPr>
-              <a:t>9.48</a:t>
+              <a:t>9.49</a:t>
             </a:r>
             <a:endParaRPr lang="en-US" sz="3200" dirty="0"/>
           </a:p>
@@ -5441,7 +5441,7 @@
                 <a:ea typeface="Arial" pitchFamily="34" charset="-122"/>
                 <a:cs typeface="Arial" pitchFamily="34" charset="-120"/>
               </a:rPr>
-              <a:t>93.3%</a:t>
+              <a:t>93.7%</a:t>
             </a:r>
             <a:endParaRPr lang="en-US" sz="3200" dirty="0"/>
           </a:p>
@@ -5566,7 +5566,7 @@
                 <a:ea typeface="Arial" pitchFamily="34" charset="-122"/>
                 <a:cs typeface="Arial" pitchFamily="34" charset="-120"/>
               </a:rPr>
-              <a:t>2.7%</a:t>
+              <a:t>2.5%</a:t>
             </a:r>
             <a:endParaRPr lang="en-US" sz="3200" dirty="0"/>
           </a:p>
@@ -5691,7 +5691,7 @@
                 <a:ea typeface="Arial" pitchFamily="34" charset="-122"/>
                 <a:cs typeface="Arial" pitchFamily="34" charset="-120"/>
               </a:rPr>
-              <a:t>75件</a:t>
+              <a:t>79件</a:t>
             </a:r>
             <a:endParaRPr lang="en-US" sz="3200" dirty="0"/>
           </a:p>
@@ -5839,7 +5839,7 @@
                 <a:ea typeface="Arial" pitchFamily="34" charset="-122"/>
                 <a:cs typeface="Arial" pitchFamily="34" charset="-120"/>
               </a:rPr>
-              <a:t>  地點好，近池袋站，附近非常熱鬧，生活機能強，樓下就有超商，有3人床房，4床房，每次家族旅遊的第一選擇 池袋駅に近く...</a:t>
+              <a:t>  立地は非常に便利で、電車や地下鉄の駅にも近いです</a:t>
             </a:r>
             <a:endParaRPr lang="en-US" sz="1100" dirty="0"/>
           </a:p>
@@ -5879,7 +5879,7 @@
                 <a:ea typeface="Arial" pitchFamily="34" charset="-122"/>
                 <a:cs typeface="Arial" pitchFamily="34" charset="-120"/>
               </a:rPr>
-              <a:t>  チェックアウト時には荷物預かりサービスも利用できます</a:t>
+              <a:t>  セルフチェックインはスムーズで、スタッフはとても丁寧です</a:t>
             </a:r>
             <a:endParaRPr lang="en-US" sz="1100" dirty="0"/>
           </a:p>
@@ -6047,6 +6047,46 @@
                 <a:ea typeface="Arial" pitchFamily="34" charset="-122"/>
                 <a:cs typeface="Arial" pitchFamily="34" charset="-120"/>
               </a:rPr>
+              <a:t>部屋の狭さ </a:t>
+            </a:r>
+            <a:endParaRPr lang="en-US" sz="1100" dirty="0"/>
+          </a:p>
+          <a:p>
+            <a:pPr indent="0" marL="0">
+              <a:spcAft>
+                <a:spcPts val="200"/>
+              </a:spcAft>
+              <a:buNone/>
+            </a:pPr>
+            <a:r>
+              <a:rPr lang="en-US" sz="900" dirty="0">
+                <a:solidFill>
+                  <a:srgbClr val="64748B"/>
+                </a:solidFill>
+                <a:latin typeface="Arial" pitchFamily="34" charset="0"/>
+                <a:ea typeface="Arial" pitchFamily="34" charset="-122"/>
+                <a:cs typeface="Arial" pitchFamily="34" charset="-120"/>
+              </a:rPr>
+              <a:t>  部屋は小さいですが、清潔で快適です</a:t>
+            </a:r>
+            <a:endParaRPr lang="en-US" sz="1100" dirty="0"/>
+          </a:p>
+          <a:p>
+            <a:pPr indent="0" marL="0">
+              <a:spcAft>
+                <a:spcPts val="200"/>
+              </a:spcAft>
+              <a:buNone/>
+            </a:pPr>
+            <a:r>
+              <a:rPr lang="en-US" sz="1100" b="1" dirty="0">
+                <a:solidFill>
+                  <a:srgbClr val="334155"/>
+                </a:solidFill>
+                <a:latin typeface="Arial" pitchFamily="34" charset="0"/>
+                <a:ea typeface="Arial" pitchFamily="34" charset="-122"/>
+                <a:cs typeface="Arial" pitchFamily="34" charset="-120"/>
+              </a:rPr>
               <a:t>エアコン・空調 </a:t>
             </a:r>
             <a:endParaRPr lang="en-US" sz="1100" dirty="0"/>
@@ -6068,46 +6108,6 @@
                 <a:cs typeface="Arial" pitchFamily="34" charset="-120"/>
               </a:rPr>
               <a:t>  Is a very good location hotel, so close to shopping and d...</a:t>
-            </a:r>
-            <a:endParaRPr lang="en-US" sz="1100" dirty="0"/>
-          </a:p>
-          <a:p>
-            <a:pPr indent="0" marL="0">
-              <a:spcAft>
-                <a:spcPts val="200"/>
-              </a:spcAft>
-              <a:buNone/>
-            </a:pPr>
-            <a:r>
-              <a:rPr lang="en-US" sz="1100" b="1" dirty="0">
-                <a:solidFill>
-                  <a:srgbClr val="334155"/>
-                </a:solidFill>
-                <a:latin typeface="Arial" pitchFamily="34" charset="0"/>
-                <a:ea typeface="Arial" pitchFamily="34" charset="-122"/>
-                <a:cs typeface="Arial" pitchFamily="34" charset="-120"/>
-              </a:rPr>
-              <a:t>部屋の狭さ </a:t>
-            </a:r>
-            <a:endParaRPr lang="en-US" sz="1100" dirty="0"/>
-          </a:p>
-          <a:p>
-            <a:pPr indent="0" marL="0">
-              <a:spcAft>
-                <a:spcPts val="200"/>
-              </a:spcAft>
-              <a:buNone/>
-            </a:pPr>
-            <a:r>
-              <a:rPr lang="en-US" sz="900" dirty="0">
-                <a:solidFill>
-                  <a:srgbClr val="64748B"/>
-                </a:solidFill>
-                <a:latin typeface="Arial" pitchFamily="34" charset="0"/>
-                <a:ea typeface="Arial" pitchFamily="34" charset="-122"/>
-                <a:cs typeface="Arial" pitchFamily="34" charset="-120"/>
-              </a:rPr>
-              <a:t>  部屋は狭いですが、許容範囲です</a:t>
             </a:r>
             <a:endParaRPr lang="en-US" sz="1100" dirty="0"/>
           </a:p>
@@ -6500,7 +6500,7 @@
                 <a:ea typeface="Arial" pitchFamily="34" charset="-122"/>
                 <a:cs typeface="Arial" pitchFamily="34" charset="-120"/>
               </a:rPr>
-              <a:t>9.48</a:t>
+              <a:t>9.49</a:t>
             </a:r>
             <a:endParaRPr lang="en-US" sz="3200" dirty="0"/>
           </a:p>
@@ -6625,7 +6625,7 @@
                 <a:ea typeface="Arial" pitchFamily="34" charset="-122"/>
                 <a:cs typeface="Arial" pitchFamily="34" charset="-120"/>
               </a:rPr>
-              <a:t>93.3%</a:t>
+              <a:t>93.7%</a:t>
             </a:r>
             <a:endParaRPr lang="en-US" sz="3200" dirty="0"/>
           </a:p>
@@ -6750,7 +6750,7 @@
                 <a:ea typeface="Arial" pitchFamily="34" charset="-122"/>
                 <a:cs typeface="Arial" pitchFamily="34" charset="-120"/>
               </a:rPr>
-              <a:t>2.7%</a:t>
+              <a:t>2.5%</a:t>
             </a:r>
             <a:endParaRPr lang="en-US" sz="3200" dirty="0"/>
           </a:p>
@@ -6875,7 +6875,7 @@
                 <a:ea typeface="Arial" pitchFamily="34" charset="-122"/>
                 <a:cs typeface="Arial" pitchFamily="34" charset="-120"/>
               </a:rPr>
-              <a:t>75件</a:t>
+              <a:t>79件</a:t>
             </a:r>
             <a:endParaRPr lang="en-US" sz="3200" dirty="0"/>
           </a:p>
@@ -7854,7 +7854,7 @@
                           <a:ea typeface="Arial" pitchFamily="34" charset="-122"/>
                           <a:cs typeface="Arial" pitchFamily="34" charset="-120"/>
                         </a:rPr>
-                        <a:t>1</a:t>
+                        <a:t>2</a:t>
                       </a:r>
                       <a:endParaRPr lang="en-US" sz="900" dirty="0">
                         <a:latin typeface="Arial" charset="0"/>
@@ -8196,7 +8196,7 @@
                           <a:ea typeface="Arial" pitchFamily="34" charset="-122"/>
                           <a:cs typeface="Arial" pitchFamily="34" charset="-120"/>
                         </a:rPr>
-                        <a:t>44</a:t>
+                        <a:t>46</a:t>
                       </a:r>
                       <a:endParaRPr lang="en-US" sz="900" dirty="0">
                         <a:latin typeface="Arial" charset="0"/>
@@ -8264,7 +8264,7 @@
                           <a:ea typeface="Arial" pitchFamily="34" charset="-122"/>
                           <a:cs typeface="Arial" pitchFamily="34" charset="-120"/>
                         </a:rPr>
-                        <a:t>9.73</a:t>
+                        <a:t>9.72</a:t>
                       </a:r>
                       <a:endParaRPr lang="en-US" sz="900" dirty="0">
                         <a:latin typeface="Arial" charset="0"/>
@@ -8400,7 +8400,7 @@
                           <a:ea typeface="Arial" pitchFamily="34" charset="-122"/>
                           <a:cs typeface="Arial" pitchFamily="34" charset="-120"/>
                         </a:rPr>
-                        <a:t>9.73</a:t>
+                        <a:t>9.72</a:t>
                       </a:r>
                       <a:endParaRPr lang="en-US" sz="900" dirty="0">
                         <a:latin typeface="Arial" charset="0"/>
@@ -8880,7 +8880,7 @@
                           <a:ea typeface="Arial" pitchFamily="34" charset="-122"/>
                           <a:cs typeface="Arial" pitchFamily="34" charset="-120"/>
                         </a:rPr>
-                        <a:t>13</a:t>
+                        <a:t>14</a:t>
                       </a:r>
                       <a:endParaRPr lang="en-US" sz="900" dirty="0">
                         <a:latin typeface="Arial" charset="0"/>
@@ -8948,7 +8948,7 @@
                           <a:ea typeface="Arial" pitchFamily="34" charset="-122"/>
                           <a:cs typeface="Arial" pitchFamily="34" charset="-120"/>
                         </a:rPr>
-                        <a:t>9.15</a:t>
+                        <a:t>9.21</a:t>
                       </a:r>
                       <a:endParaRPr lang="en-US" sz="900" dirty="0">
                         <a:latin typeface="Arial" charset="0"/>
@@ -9084,7 +9084,7 @@
                           <a:ea typeface="Arial" pitchFamily="34" charset="-122"/>
                           <a:cs typeface="Arial" pitchFamily="34" charset="-120"/>
                         </a:rPr>
-                        <a:t>9.15</a:t>
+                        <a:t>9.21</a:t>
                       </a:r>
                       <a:endParaRPr lang="en-US" sz="900" dirty="0">
                         <a:latin typeface="Arial" charset="0"/>
@@ -9834,7 +9834,7 @@
                 <a:ea typeface="Arial" pitchFamily="34" charset="-122"/>
                 <a:cs typeface="Arial" pitchFamily="34" charset="-120"/>
               </a:rPr>
-              <a:t>70件（93.3%）</a:t>
+              <a:t>74件（93.7%）</a:t>
             </a:r>
             <a:endParaRPr lang="en-US" sz="1100" dirty="0"/>
           </a:p>
@@ -9932,7 +9932,7 @@
                 <a:ea typeface="Arial" pitchFamily="34" charset="-122"/>
                 <a:cs typeface="Arial" pitchFamily="34" charset="-120"/>
               </a:rPr>
-              <a:t>3件（4.0%）</a:t>
+              <a:t>3件（3.8%）</a:t>
             </a:r>
             <a:endParaRPr lang="en-US" sz="1100" dirty="0"/>
           </a:p>
@@ -10030,7 +10030,7 @@
                 <a:ea typeface="Arial" pitchFamily="34" charset="-122"/>
                 <a:cs typeface="Arial" pitchFamily="34" charset="-120"/>
               </a:rPr>
-              <a:t>2件（2.7%）</a:t>
+              <a:t>2件（2.5%）</a:t>
             </a:r>
             <a:endParaRPr lang="en-US" sz="1100" dirty="0"/>
           </a:p>
@@ -10442,7 +10442,7 @@
                 <a:ea typeface="Arial" pitchFamily="34" charset="-122"/>
                 <a:cs typeface="Arial" pitchFamily="34" charset="-120"/>
               </a:rPr>
-              <a:t>地點好，近池袋站，附近非常熱鬧，生活機能強，樓下就有超商，有3人床房，4床房，每次家族旅遊的第一選擇 池袋駅に近く...</a:t>
+              <a:t>立地は非常に便利で、電車や地下鉄の駅にも近いです</a:t>
             </a:r>
             <a:endParaRPr lang="en-US" sz="900" dirty="0"/>
           </a:p>
@@ -10481,7 +10481,7 @@
                 <a:ea typeface="Arial" pitchFamily="34" charset="-122"/>
                 <a:cs typeface="Arial" pitchFamily="34" charset="-120"/>
               </a:rPr>
-              <a:t>「距離池袋東口極近，梗3分鐘步程，房間大，單人房可完全開放行李箱還有空位，check out 也有存放行李服務，下次...」</a:t>
+              <a:t>「立地は非常に便利で、サービスも良く、セルフサービスの荷物預かり所は融通が利く」</a:t>
             </a:r>
             <a:endParaRPr lang="en-US" sz="900" dirty="0"/>
           </a:p>
@@ -10665,7 +10665,7 @@
                 <a:ea typeface="Arial" pitchFamily="34" charset="-122"/>
                 <a:cs typeface="Arial" pitchFamily="34" charset="-120"/>
               </a:rPr>
-              <a:t>チェックアウト時には荷物預かりサービスも利用できます</a:t>
+              <a:t>セルフチェックインはスムーズで、スタッフはとても丁寧です</a:t>
             </a:r>
             <a:endParaRPr lang="en-US" sz="900" dirty="0"/>
           </a:p>
@@ -10704,7 +10704,7 @@
                 <a:ea typeface="Arial" pitchFamily="34" charset="-122"/>
                 <a:cs typeface="Arial" pitchFamily="34" charset="-120"/>
               </a:rPr>
-              <a:t>「部屋は清潔で、サービスも素晴らしかったです」</a:t>
+              <a:t>「立地は非常に便利で、サービスも良く、セルフサービスの荷物預かり所は融通が利く」</a:t>
             </a:r>
             <a:endParaRPr lang="en-US" sz="900" dirty="0"/>
           </a:p>
@@ -11111,7 +11111,7 @@
                 <a:ea typeface="Arial" pitchFamily="34" charset="-122"/>
                 <a:cs typeface="Arial" pitchFamily="34" charset="-120"/>
               </a:rPr>
-              <a:t>部屋は清潔で、サービスも素晴らしかったです</a:t>
+              <a:t>部屋は小さいですが、清潔で快適です</a:t>
             </a:r>
             <a:endParaRPr lang="en-US" sz="900" dirty="0"/>
           </a:p>
@@ -11150,7 +11150,7 @@
                 <a:ea typeface="Arial" pitchFamily="34" charset="-122"/>
                 <a:cs typeface="Arial" pitchFamily="34" charset="-120"/>
               </a:rPr>
-              <a:t>「部屋はそれほど新しくはありませんが、清潔です」</a:t>
+              <a:t>「Location, ease of check in, comfort, clean Nothing 何もない」</a:t>
             </a:r>
             <a:endParaRPr lang="en-US" sz="900" dirty="0"/>
           </a:p>
@@ -11334,7 +11334,7 @@
                 <a:ea typeface="Arial" pitchFamily="34" charset="-122"/>
                 <a:cs typeface="Arial" pitchFamily="34" charset="-120"/>
               </a:rPr>
-              <a:t>客室は清潔で快適でした</a:t>
+              <a:t>部屋は小さいですが、清潔で快適です</a:t>
             </a:r>
             <a:endParaRPr lang="en-US" sz="900" dirty="0"/>
           </a:p>
@@ -11373,7 +11373,7 @@
                 <a:ea typeface="Arial" pitchFamily="34" charset="-122"/>
                 <a:cs typeface="Arial" pitchFamily="34" charset="-120"/>
               </a:rPr>
-              <a:t>「部屋は清潔で快適で、設備は少し古いですが、全体的な体験を損なうことはありません」</a:t>
+              <a:t>「設備は少し古いが、それでもまたここに泊まりたい」</a:t>
             </a:r>
             <a:endParaRPr lang="en-US" sz="900" dirty="0"/>
           </a:p>
@@ -12218,7 +12218,7 @@
                           <a:ea typeface="Arial" pitchFamily="34" charset="-122"/>
                           <a:cs typeface="Arial" pitchFamily="34" charset="-120"/>
                         </a:rPr>
-                        <a:t>エアコン・空調</a:t>
+                        <a:t>部屋の狭さ</a:t>
                       </a:r>
                       <a:endParaRPr lang="en-US" sz="900" dirty="0">
                         <a:latin typeface="Arial" charset="0"/>
@@ -12286,7 +12286,7 @@
                           <a:ea typeface="Arial" pitchFamily="34" charset="-122"/>
                           <a:cs typeface="Arial" pitchFamily="34" charset="-120"/>
                         </a:rPr>
-                        <a:t>Is a very good location hotel, so close to shopping and d...</a:t>
+                        <a:t>部屋は小さいですが、清潔で快適です</a:t>
                       </a:r>
                       <a:endParaRPr lang="en-US" sz="900" dirty="0">
                         <a:latin typeface="Arial" charset="0"/>
@@ -12354,7 +12354,7 @@
                           <a:ea typeface="Arial" pitchFamily="34" charset="-122"/>
                           <a:cs typeface="Arial" pitchFamily="34" charset="-120"/>
                         </a:rPr>
-                        <a:t>10件</a:t>
+                        <a:t>11件</a:t>
                       </a:r>
                       <a:endParaRPr lang="en-US" sz="900" dirty="0">
                         <a:latin typeface="Arial" charset="0"/>
@@ -12492,7 +12492,7 @@
                           <a:ea typeface="Arial" pitchFamily="34" charset="-122"/>
                           <a:cs typeface="Arial" pitchFamily="34" charset="-120"/>
                         </a:rPr>
-                        <a:t>部屋の狭さ</a:t>
+                        <a:t>エアコン・空調</a:t>
                       </a:r>
                       <a:endParaRPr lang="en-US" sz="900" dirty="0">
                         <a:latin typeface="Arial" charset="0"/>
@@ -12560,7 +12560,7 @@
                           <a:ea typeface="Arial" pitchFamily="34" charset="-122"/>
                           <a:cs typeface="Arial" pitchFamily="34" charset="-120"/>
                         </a:rPr>
-                        <a:t>部屋は狭いですが、許容範囲です</a:t>
+                        <a:t>Is a very good location hotel, so close to shopping and d...</a:t>
                       </a:r>
                       <a:endParaRPr lang="en-US" sz="900" dirty="0">
                         <a:latin typeface="Arial" charset="0"/>
@@ -12628,7 +12628,7 @@
                           <a:ea typeface="Arial" pitchFamily="34" charset="-122"/>
                           <a:cs typeface="Arial" pitchFamily="34" charset="-120"/>
                         </a:rPr>
-                        <a:t>9件</a:t>
+                        <a:t>10件</a:t>
                       </a:r>
                       <a:endParaRPr lang="en-US" sz="900" dirty="0">
                         <a:latin typeface="Arial" charset="0"/>
@@ -13108,7 +13108,7 @@
                           <a:ea typeface="Arial" pitchFamily="34" charset="-122"/>
                           <a:cs typeface="Arial" pitchFamily="34" charset="-120"/>
                         </a:rPr>
-                        <a:t>建物は古いですが、清潔です</a:t>
+                        <a:t>設備は少し古いが、それでもまたここに泊まりたい</a:t>
                       </a:r>
                       <a:endParaRPr lang="en-US" sz="900" dirty="0">
                         <a:latin typeface="Arial" charset="0"/>
@@ -13176,7 +13176,7 @@
                           <a:ea typeface="Arial" pitchFamily="34" charset="-122"/>
                           <a:cs typeface="Arial" pitchFamily="34" charset="-120"/>
                         </a:rPr>
-                        <a:t>4件</a:t>
+                        <a:t>5件</a:t>
                       </a:r>
                       <a:endParaRPr lang="en-US" sz="900" dirty="0">
                         <a:latin typeface="Arial" charset="0"/>
@@ -14136,7 +14136,7 @@
                           <a:ea typeface="Arial" pitchFamily="34" charset="-122"/>
                           <a:cs typeface="Arial" pitchFamily="34" charset="-120"/>
                         </a:rPr>
-                        <a:t>清掃不備</a:t>
+                        <a:t>対応・サービスの不満</a:t>
                       </a:r>
                       <a:endParaRPr lang="en-US" sz="900" dirty="0">
                         <a:latin typeface="Arial" charset="0"/>
@@ -14204,7 +14204,7 @@
                           <a:ea typeface="Arial" pitchFamily="34" charset="-122"/>
                           <a:cs typeface="Arial" pitchFamily="34" charset="-120"/>
                         </a:rPr>
-                        <a:t>清掃員のゴミ箱の周りのゴミさえ片付けていなかった</a:t>
+                        <a:t>位置極其便利，服務態度好，自助存放行李彈性大，設施稍舊但仍會再入住</a:t>
                       </a:r>
                       <a:endParaRPr lang="en-US" sz="900" dirty="0">
                         <a:latin typeface="Arial" charset="0"/>
@@ -14324,6 +14324,280 @@
                   </a:tcPr>
                 </a:tc>
               </a:tr>
+              <a:tr h="320040">
+                <a:tc>
+                  <a:txBody>
+                    <a:bodyPr/>
+                    <a:lstStyle/>
+                    <a:p>
+                      <a:pPr algn="ctr" indent="0" marL="0">
+                        <a:buNone/>
+                      </a:pPr>
+                      <a:r>
+                        <a:rPr lang="en-US" sz="1200" b="1" dirty="0">
+                          <a:solidFill>
+                            <a:srgbClr val="94A3B8"/>
+                          </a:solidFill>
+                          <a:latin typeface="Arial" pitchFamily="34" charset="0"/>
+                          <a:ea typeface="Arial" pitchFamily="34" charset="-122"/>
+                          <a:cs typeface="Arial" pitchFamily="34" charset="-120"/>
+                        </a:rPr>
+                        <a:t>C</a:t>
+                      </a:r>
+                      <a:endParaRPr lang="en-US" sz="1200" dirty="0">
+                        <a:latin typeface="Arial" charset="0"/>
+                        <a:ea typeface="Arial" charset="0"/>
+                        <a:cs typeface="Arial" charset="0"/>
+                      </a:endParaRPr>
+                    </a:p>
+                  </a:txBody>
+                  <a:tcPr marL="91440" marR="91440" marT="45720" marB="45720">
+                    <a:lnL w="6350" cap="flat" cmpd="sng" algn="ctr">
+                      <a:solidFill>
+                        <a:srgbClr val="CBD5E1"/>
+                      </a:solidFill>
+                      <a:prstDash val="solid"/>
+                      <a:round/>
+                      <a:headEnd type="none" w="med" len="med"/>
+                      <a:tailEnd type="none" w="med" len="med"/>
+                    </a:lnL>
+                    <a:lnR w="6350" cap="flat" cmpd="sng" algn="ctr">
+                      <a:solidFill>
+                        <a:srgbClr val="CBD5E1"/>
+                      </a:solidFill>
+                      <a:prstDash val="solid"/>
+                      <a:round/>
+                      <a:headEnd type="none" w="med" len="med"/>
+                      <a:tailEnd type="none" w="med" len="med"/>
+                    </a:lnR>
+                    <a:lnT w="6350" cap="flat" cmpd="sng" algn="ctr">
+                      <a:solidFill>
+                        <a:srgbClr val="CBD5E1"/>
+                      </a:solidFill>
+                      <a:prstDash val="solid"/>
+                      <a:round/>
+                      <a:headEnd type="none" w="med" len="med"/>
+                      <a:tailEnd type="none" w="med" len="med"/>
+                    </a:lnT>
+                    <a:lnB w="6350" cap="flat" cmpd="sng" algn="ctr">
+                      <a:solidFill>
+                        <a:srgbClr val="CBD5E1"/>
+                      </a:solidFill>
+                      <a:prstDash val="solid"/>
+                      <a:round/>
+                      <a:headEnd type="none" w="med" len="med"/>
+                      <a:tailEnd type="none" w="med" len="med"/>
+                    </a:lnB>
+                    <a:solidFill>
+                      <a:srgbClr val="E8EFF8"/>
+                    </a:solidFill>
+                  </a:tcPr>
+                </a:tc>
+                <a:tc>
+                  <a:txBody>
+                    <a:bodyPr/>
+                    <a:lstStyle/>
+                    <a:p>
+                      <a:pPr indent="0" marL="0">
+                        <a:buNone/>
+                      </a:pPr>
+                      <a:r>
+                        <a:rPr lang="en-US" sz="900" b="1" dirty="0">
+                          <a:solidFill>
+                            <a:srgbClr val="334155"/>
+                          </a:solidFill>
+                          <a:latin typeface="Arial" pitchFamily="34" charset="0"/>
+                          <a:ea typeface="Arial" pitchFamily="34" charset="-122"/>
+                          <a:cs typeface="Arial" pitchFamily="34" charset="-120"/>
+                        </a:rPr>
+                        <a:t>清掃不備</a:t>
+                      </a:r>
+                      <a:endParaRPr lang="en-US" sz="900" dirty="0">
+                        <a:latin typeface="Arial" charset="0"/>
+                        <a:ea typeface="Arial" charset="0"/>
+                        <a:cs typeface="Arial" charset="0"/>
+                      </a:endParaRPr>
+                    </a:p>
+                  </a:txBody>
+                  <a:tcPr marL="91440" marR="91440" marT="45720" marB="45720">
+                    <a:lnL w="6350" cap="flat" cmpd="sng" algn="ctr">
+                      <a:solidFill>
+                        <a:srgbClr val="CBD5E1"/>
+                      </a:solidFill>
+                      <a:prstDash val="solid"/>
+                      <a:round/>
+                      <a:headEnd type="none" w="med" len="med"/>
+                      <a:tailEnd type="none" w="med" len="med"/>
+                    </a:lnL>
+                    <a:lnR w="6350" cap="flat" cmpd="sng" algn="ctr">
+                      <a:solidFill>
+                        <a:srgbClr val="CBD5E1"/>
+                      </a:solidFill>
+                      <a:prstDash val="solid"/>
+                      <a:round/>
+                      <a:headEnd type="none" w="med" len="med"/>
+                      <a:tailEnd type="none" w="med" len="med"/>
+                    </a:lnR>
+                    <a:lnT w="6350" cap="flat" cmpd="sng" algn="ctr">
+                      <a:solidFill>
+                        <a:srgbClr val="CBD5E1"/>
+                      </a:solidFill>
+                      <a:prstDash val="solid"/>
+                      <a:round/>
+                      <a:headEnd type="none" w="med" len="med"/>
+                      <a:tailEnd type="none" w="med" len="med"/>
+                    </a:lnT>
+                    <a:lnB w="6350" cap="flat" cmpd="sng" algn="ctr">
+                      <a:solidFill>
+                        <a:srgbClr val="CBD5E1"/>
+                      </a:solidFill>
+                      <a:prstDash val="solid"/>
+                      <a:round/>
+                      <a:headEnd type="none" w="med" len="med"/>
+                      <a:tailEnd type="none" w="med" len="med"/>
+                    </a:lnB>
+                    <a:solidFill>
+                      <a:srgbClr val="E8EFF8"/>
+                    </a:solidFill>
+                  </a:tcPr>
+                </a:tc>
+                <a:tc>
+                  <a:txBody>
+                    <a:bodyPr/>
+                    <a:lstStyle/>
+                    <a:p>
+                      <a:pPr indent="0" marL="0">
+                        <a:buNone/>
+                      </a:pPr>
+                      <a:r>
+                        <a:rPr lang="en-US" sz="900" dirty="0">
+                          <a:solidFill>
+                            <a:srgbClr val="64748B"/>
+                          </a:solidFill>
+                          <a:latin typeface="Arial" pitchFamily="34" charset="0"/>
+                          <a:ea typeface="Arial" pitchFamily="34" charset="-122"/>
+                          <a:cs typeface="Arial" pitchFamily="34" charset="-120"/>
+                        </a:rPr>
+                        <a:t>清掃員のゴミ箱の周りのゴミさえ片付けていなかった</a:t>
+                      </a:r>
+                      <a:endParaRPr lang="en-US" sz="900" dirty="0">
+                        <a:latin typeface="Arial" charset="0"/>
+                        <a:ea typeface="Arial" charset="0"/>
+                        <a:cs typeface="Arial" charset="0"/>
+                      </a:endParaRPr>
+                    </a:p>
+                  </a:txBody>
+                  <a:tcPr marL="91440" marR="91440" marT="45720" marB="45720">
+                    <a:lnL w="6350" cap="flat" cmpd="sng" algn="ctr">
+                      <a:solidFill>
+                        <a:srgbClr val="CBD5E1"/>
+                      </a:solidFill>
+                      <a:prstDash val="solid"/>
+                      <a:round/>
+                      <a:headEnd type="none" w="med" len="med"/>
+                      <a:tailEnd type="none" w="med" len="med"/>
+                    </a:lnL>
+                    <a:lnR w="6350" cap="flat" cmpd="sng" algn="ctr">
+                      <a:solidFill>
+                        <a:srgbClr val="CBD5E1"/>
+                      </a:solidFill>
+                      <a:prstDash val="solid"/>
+                      <a:round/>
+                      <a:headEnd type="none" w="med" len="med"/>
+                      <a:tailEnd type="none" w="med" len="med"/>
+                    </a:lnR>
+                    <a:lnT w="6350" cap="flat" cmpd="sng" algn="ctr">
+                      <a:solidFill>
+                        <a:srgbClr val="CBD5E1"/>
+                      </a:solidFill>
+                      <a:prstDash val="solid"/>
+                      <a:round/>
+                      <a:headEnd type="none" w="med" len="med"/>
+                      <a:tailEnd type="none" w="med" len="med"/>
+                    </a:lnT>
+                    <a:lnB w="6350" cap="flat" cmpd="sng" algn="ctr">
+                      <a:solidFill>
+                        <a:srgbClr val="CBD5E1"/>
+                      </a:solidFill>
+                      <a:prstDash val="solid"/>
+                      <a:round/>
+                      <a:headEnd type="none" w="med" len="med"/>
+                      <a:tailEnd type="none" w="med" len="med"/>
+                    </a:lnB>
+                    <a:solidFill>
+                      <a:srgbClr val="E8EFF8"/>
+                    </a:solidFill>
+                  </a:tcPr>
+                </a:tc>
+                <a:tc>
+                  <a:txBody>
+                    <a:bodyPr/>
+                    <a:lstStyle/>
+                    <a:p>
+                      <a:pPr algn="ctr" indent="0" marL="0">
+                        <a:buNone/>
+                      </a:pPr>
+                      <a:r>
+                        <a:rPr lang="en-US" sz="900" dirty="0">
+                          <a:solidFill>
+                            <a:srgbClr val="334155"/>
+                          </a:solidFill>
+                          <a:latin typeface="Arial" pitchFamily="34" charset="0"/>
+                          <a:ea typeface="Arial" pitchFamily="34" charset="-122"/>
+                          <a:cs typeface="Arial" pitchFamily="34" charset="-120"/>
+                        </a:rPr>
+                        <a:t>1件</a:t>
+                      </a:r>
+                      <a:endParaRPr lang="en-US" sz="900" dirty="0">
+                        <a:latin typeface="Arial" charset="0"/>
+                        <a:ea typeface="Arial" charset="0"/>
+                        <a:cs typeface="Arial" charset="0"/>
+                      </a:endParaRPr>
+                    </a:p>
+                  </a:txBody>
+                  <a:tcPr marL="91440" marR="91440" marT="45720" marB="45720">
+                    <a:lnL w="6350" cap="flat" cmpd="sng" algn="ctr">
+                      <a:solidFill>
+                        <a:srgbClr val="CBD5E1"/>
+                      </a:solidFill>
+                      <a:prstDash val="solid"/>
+                      <a:round/>
+                      <a:headEnd type="none" w="med" len="med"/>
+                      <a:tailEnd type="none" w="med" len="med"/>
+                    </a:lnL>
+                    <a:lnR w="6350" cap="flat" cmpd="sng" algn="ctr">
+                      <a:solidFill>
+                        <a:srgbClr val="CBD5E1"/>
+                      </a:solidFill>
+                      <a:prstDash val="solid"/>
+                      <a:round/>
+                      <a:headEnd type="none" w="med" len="med"/>
+                      <a:tailEnd type="none" w="med" len="med"/>
+                    </a:lnR>
+                    <a:lnT w="6350" cap="flat" cmpd="sng" algn="ctr">
+                      <a:solidFill>
+                        <a:srgbClr val="CBD5E1"/>
+                      </a:solidFill>
+                      <a:prstDash val="solid"/>
+                      <a:round/>
+                      <a:headEnd type="none" w="med" len="med"/>
+                      <a:tailEnd type="none" w="med" len="med"/>
+                    </a:lnT>
+                    <a:lnB w="6350" cap="flat" cmpd="sng" algn="ctr">
+                      <a:solidFill>
+                        <a:srgbClr val="CBD5E1"/>
+                      </a:solidFill>
+                      <a:prstDash val="solid"/>
+                      <a:round/>
+                      <a:headEnd type="none" w="med" len="med"/>
+                      <a:tailEnd type="none" w="med" len="med"/>
+                    </a:lnB>
+                    <a:solidFill>
+                      <a:srgbClr val="E8EFF8"/>
+                    </a:solidFill>
+                  </a:tcPr>
+                </a:tc>
+              </a:tr>
             </a:tbl>
           </a:graphicData>
         </a:graphic>
@@ -15253,6 +15527,177 @@
         </p:nvSpPr>
         <p:spPr>
           <a:xfrm>
+            <a:off x="4663440" y="3017520"/>
+            <a:ext cx="3977640" cy="1600200"/>
+          </a:xfrm>
+          <a:prstGeom prst="rect">
+            <a:avLst/>
+          </a:prstGeom>
+          <a:solidFill>
+            <a:srgbClr val="FFFFFF"/>
+          </a:solidFill>
+          <a:ln/>
+          <a:effectLst>
+            <a:outerShdw sx="100000" sy="100000" kx="0" ky="0" algn="bl" rotWithShape="0" blurRad="50800" dist="25400" dir="8100000">
+              <a:srgbClr val="000000">
+                <a:alpha val="10000"/>
+              </a:srgbClr>
+            </a:outerShdw>
+          </a:effectLst>
+        </p:spPr>
+      </p:sp>
+      <p:sp>
+        <p:nvSpPr>
+          <p:cNvPr id="19" name="Shape 17"/>
+          <p:cNvSpPr/>
+          <p:nvPr/>
+        </p:nvSpPr>
+        <p:spPr>
+          <a:xfrm>
+            <a:off x="4663440" y="3017520"/>
+            <a:ext cx="54864" cy="1600200"/>
+          </a:xfrm>
+          <a:prstGeom prst="rect">
+            <a:avLst/>
+          </a:prstGeom>
+          <a:solidFill>
+            <a:srgbClr val="3B7DD8"/>
+          </a:solidFill>
+          <a:ln/>
+        </p:spPr>
+      </p:sp>
+      <p:sp>
+        <p:nvSpPr>
+          <p:cNvPr id="20" name="Text 18"/>
+          <p:cNvSpPr/>
+          <p:nvPr/>
+        </p:nvSpPr>
+        <p:spPr>
+          <a:xfrm>
+            <a:off x="4800600" y="3063240"/>
+            <a:ext cx="3657600" cy="320040"/>
+          </a:xfrm>
+          <a:prstGeom prst="rect">
+            <a:avLst/>
+          </a:prstGeom>
+          <a:noFill/>
+          <a:ln/>
+        </p:spPr>
+        <p:txBody>
+          <a:bodyPr wrap="square" lIns="0" tIns="0" rIns="0" bIns="0" rtlCol="0" anchor="ctr"/>
+          <a:lstStyle/>
+          <a:p>
+            <a:pPr indent="0" marL="0">
+              <a:buNone/>
+            </a:pPr>
+            <a:r>
+              <a:rPr lang="en-US" sz="1200" b="1" dirty="0">
+                <a:solidFill>
+                  <a:srgbClr val="1A2744"/>
+                </a:solidFill>
+                <a:latin typeface="Arial" pitchFamily="34" charset="0"/>
+                <a:ea typeface="Arial" pitchFamily="34" charset="-122"/>
+                <a:cs typeface="Arial" pitchFamily="34" charset="-120"/>
+              </a:rPr>
+              <a:t>スタッフ対応品質の統一</a:t>
+            </a:r>
+            <a:endParaRPr lang="en-US" sz="1200" dirty="0"/>
+          </a:p>
+        </p:txBody>
+      </p:sp>
+      <p:sp>
+        <p:nvSpPr>
+          <p:cNvPr id="21" name="Text 19"/>
+          <p:cNvSpPr/>
+          <p:nvPr/>
+        </p:nvSpPr>
+        <p:spPr>
+          <a:xfrm>
+            <a:off x="4800600" y="3383280"/>
+            <a:ext cx="3657600" cy="1188720"/>
+          </a:xfrm>
+          <a:prstGeom prst="rect">
+            <a:avLst/>
+          </a:prstGeom>
+          <a:noFill/>
+          <a:ln/>
+        </p:spPr>
+        <p:txBody>
+          <a:bodyPr wrap="square" lIns="0" tIns="0" rIns="0" bIns="0" rtlCol="0" anchor="ctr"/>
+          <a:lstStyle/>
+          <a:p>
+            <a:pPr marL="342900" indent="-342900">
+              <a:spcAft>
+                <a:spcPts val="300"/>
+              </a:spcAft>
+              <a:buSzPct val="100000"/>
+              <a:buChar char="•"/>
+            </a:pPr>
+            <a:r>
+              <a:rPr lang="en-US" sz="900" dirty="0">
+                <a:solidFill>
+                  <a:srgbClr val="334155"/>
+                </a:solidFill>
+                <a:latin typeface="Arial" pitchFamily="34" charset="0"/>
+                <a:ea typeface="Arial" pitchFamily="34" charset="-122"/>
+                <a:cs typeface="Arial" pitchFamily="34" charset="-120"/>
+              </a:rPr>
+              <a:t>接客マニュアルの見直しと全スタッフへの周知</a:t>
+            </a:r>
+            <a:endParaRPr lang="en-US" sz="900" dirty="0"/>
+          </a:p>
+          <a:p>
+            <a:pPr marL="342900" indent="-342900">
+              <a:spcAft>
+                <a:spcPts val="300"/>
+              </a:spcAft>
+              <a:buSzPct val="100000"/>
+              <a:buChar char="•"/>
+            </a:pPr>
+            <a:r>
+              <a:rPr lang="en-US" sz="900" dirty="0">
+                <a:solidFill>
+                  <a:srgbClr val="334155"/>
+                </a:solidFill>
+                <a:latin typeface="Arial" pitchFamily="34" charset="0"/>
+                <a:ea typeface="Arial" pitchFamily="34" charset="-122"/>
+                <a:cs typeface="Arial" pitchFamily="34" charset="-120"/>
+              </a:rPr>
+              <a:t>ゲストからのクレーム対応フローの明確化</a:t>
+            </a:r>
+            <a:endParaRPr lang="en-US" sz="900" dirty="0"/>
+          </a:p>
+          <a:p>
+            <a:pPr marL="342900" indent="-342900">
+              <a:spcAft>
+                <a:spcPts val="300"/>
+              </a:spcAft>
+              <a:buSzPct val="100000"/>
+              <a:buChar char="•"/>
+            </a:pPr>
+            <a:r>
+              <a:rPr lang="en-US" sz="900" dirty="0">
+                <a:solidFill>
+                  <a:srgbClr val="334155"/>
+                </a:solidFill>
+                <a:latin typeface="Arial" pitchFamily="34" charset="0"/>
+                <a:ea typeface="Arial" pitchFamily="34" charset="-122"/>
+                <a:cs typeface="Arial" pitchFamily="34" charset="-120"/>
+              </a:rPr>
+              <a:t>定期的なCS研修の実施</a:t>
+            </a:r>
+            <a:endParaRPr lang="en-US" sz="900" dirty="0"/>
+          </a:p>
+        </p:txBody>
+      </p:sp>
+      <p:sp>
+        <p:nvSpPr>
+          <p:cNvPr id="22" name="Shape 20"/>
+          <p:cNvSpPr/>
+          <p:nvPr/>
+        </p:nvSpPr>
+        <p:spPr>
+          <a:xfrm>
             <a:off x="0" y="4800600"/>
             <a:ext cx="9144000" cy="342900"/>
           </a:xfrm>
@@ -15267,7 +15712,7 @@
       </p:sp>
       <p:sp>
         <p:nvSpPr>
-          <p:cNvPr id="19" name="Text 17"/>
+          <p:cNvPr id="23" name="Text 21"/>
           <p:cNvSpPr/>
           <p:nvPr/>
         </p:nvSpPr>
@@ -15306,7 +15751,7 @@
       </p:sp>
       <p:sp>
         <p:nvSpPr>
-          <p:cNvPr id="20" name="Text 18"/>
+          <p:cNvPr id="24" name="Text 22"/>
           <p:cNvSpPr/>
           <p:nvPr/>
         </p:nvSpPr>

--- a/納品レポート/ホテル別レポート/daiichi_ikebukuro_口コミ分析レポート.pptx
+++ b/納品レポート/ホテル別レポート/daiichi_ikebukuro_口コミ分析レポート.pptx
@@ -560,7 +560,7 @@
               <c:numCache>
                 <c:ptCount val="3"/>
                 <c:pt idx="0">
-                  <c:v>74</c:v>
+                  <c:v>75</c:v>
                 </c:pt>
                 <c:pt idx="1">
                   <c:v>3</c:v>
@@ -775,7 +775,7 @@
                 <c:formatCode>General</c:formatCode>
                 <c:ptCount val="6"/>
                 <c:pt idx="0">
-                  <c:v>59</c:v>
+                  <c:v>60</c:v>
                 </c:pt>
                 <c:pt idx="1">
                   <c:v>12</c:v>
@@ -2741,7 +2741,7 @@
                 <a:ea typeface="Arial" pitchFamily="34" charset="-122"/>
                 <a:cs typeface="Arial" pitchFamily="34" charset="-120"/>
               </a:rPr>
-              <a:t>レビュー総数：79件（5サイト）</a:t>
+              <a:t>レビュー総数：80件（5サイト）</a:t>
             </a:r>
             <a:endParaRPr lang="en-US" sz="1000" dirty="0"/>
           </a:p>
@@ -3307,7 +3307,7 @@
                           <a:ea typeface="Arial" pitchFamily="34" charset="-122"/>
                           <a:cs typeface="Arial" pitchFamily="34" charset="-120"/>
                         </a:rPr>
-                        <a:t>9.49点</a:t>
+                        <a:t>9.50点</a:t>
                       </a:r>
                       <a:endParaRPr lang="en-US" sz="1000" dirty="0">
                         <a:latin typeface="Arial" charset="0"/>
@@ -3581,7 +3581,7 @@
                           <a:ea typeface="Arial" pitchFamily="34" charset="-122"/>
                           <a:cs typeface="Arial" pitchFamily="34" charset="-120"/>
                         </a:rPr>
-                        <a:t>93.7%</a:t>
+                        <a:t>93.8%</a:t>
                       </a:r>
                       <a:endParaRPr lang="en-US" sz="1000" dirty="0">
                         <a:latin typeface="Arial" charset="0"/>
@@ -4677,7 +4677,7 @@
                           <a:ea typeface="Arial" pitchFamily="34" charset="-122"/>
                           <a:cs typeface="Arial" pitchFamily="34" charset="-120"/>
                         </a:rPr>
-                        <a:t>約11件/期間</a:t>
+                        <a:t>約10件/期間</a:t>
                       </a:r>
                       <a:endParaRPr lang="en-US" sz="1000" dirty="0">
                         <a:latin typeface="Arial" charset="0"/>
@@ -5316,7 +5316,7 @@
                 <a:ea typeface="Arial" pitchFamily="34" charset="-122"/>
                 <a:cs typeface="Arial" pitchFamily="34" charset="-120"/>
               </a:rPr>
-              <a:t>9.49</a:t>
+              <a:t>9.50</a:t>
             </a:r>
             <a:endParaRPr lang="en-US" sz="3200" dirty="0"/>
           </a:p>
@@ -5441,7 +5441,7 @@
                 <a:ea typeface="Arial" pitchFamily="34" charset="-122"/>
                 <a:cs typeface="Arial" pitchFamily="34" charset="-120"/>
               </a:rPr>
-              <a:t>93.7%</a:t>
+              <a:t>93.8%</a:t>
             </a:r>
             <a:endParaRPr lang="en-US" sz="3200" dirty="0"/>
           </a:p>
@@ -5691,7 +5691,7 @@
                 <a:ea typeface="Arial" pitchFamily="34" charset="-122"/>
                 <a:cs typeface="Arial" pitchFamily="34" charset="-120"/>
               </a:rPr>
-              <a:t>79件</a:t>
+              <a:t>80件</a:t>
             </a:r>
             <a:endParaRPr lang="en-US" sz="3200" dirty="0"/>
           </a:p>
@@ -5839,7 +5839,7 @@
                 <a:ea typeface="Arial" pitchFamily="34" charset="-122"/>
                 <a:cs typeface="Arial" pitchFamily="34" charset="-120"/>
               </a:rPr>
-              <a:t>  立地は非常に便利で、電車や地下鉄の駅にも近いです</a:t>
+              <a:t>  Very nice Location とても良い場所</a:t>
             </a:r>
             <a:endParaRPr lang="en-US" sz="1100" dirty="0"/>
           </a:p>
@@ -6500,7 +6500,7 @@
                 <a:ea typeface="Arial" pitchFamily="34" charset="-122"/>
                 <a:cs typeface="Arial" pitchFamily="34" charset="-120"/>
               </a:rPr>
-              <a:t>9.49</a:t>
+              <a:t>9.50</a:t>
             </a:r>
             <a:endParaRPr lang="en-US" sz="3200" dirty="0"/>
           </a:p>
@@ -6625,7 +6625,7 @@
                 <a:ea typeface="Arial" pitchFamily="34" charset="-122"/>
                 <a:cs typeface="Arial" pitchFamily="34" charset="-120"/>
               </a:rPr>
-              <a:t>93.7%</a:t>
+              <a:t>93.8%</a:t>
             </a:r>
             <a:endParaRPr lang="en-US" sz="3200" dirty="0"/>
           </a:p>
@@ -6875,7 +6875,7 @@
                 <a:ea typeface="Arial" pitchFamily="34" charset="-122"/>
                 <a:cs typeface="Arial" pitchFamily="34" charset="-120"/>
               </a:rPr>
-              <a:t>79件</a:t>
+              <a:t>80件</a:t>
             </a:r>
             <a:endParaRPr lang="en-US" sz="3200" dirty="0"/>
           </a:p>
@@ -8196,7 +8196,7 @@
                           <a:ea typeface="Arial" pitchFamily="34" charset="-122"/>
                           <a:cs typeface="Arial" pitchFamily="34" charset="-120"/>
                         </a:rPr>
-                        <a:t>46</a:t>
+                        <a:t>47</a:t>
                       </a:r>
                       <a:endParaRPr lang="en-US" sz="900" dirty="0">
                         <a:latin typeface="Arial" charset="0"/>
@@ -9834,7 +9834,7 @@
                 <a:ea typeface="Arial" pitchFamily="34" charset="-122"/>
                 <a:cs typeface="Arial" pitchFamily="34" charset="-120"/>
               </a:rPr>
-              <a:t>74件（93.7%）</a:t>
+              <a:t>75件（93.8%）</a:t>
             </a:r>
             <a:endParaRPr lang="en-US" sz="1100" dirty="0"/>
           </a:p>
@@ -10442,7 +10442,7 @@
                 <a:ea typeface="Arial" pitchFamily="34" charset="-122"/>
                 <a:cs typeface="Arial" pitchFamily="34" charset="-120"/>
               </a:rPr>
-              <a:t>立地は非常に便利で、電車や地下鉄の駅にも近いです</a:t>
+              <a:t>Very nice Location とても良い場所</a:t>
             </a:r>
             <a:endParaRPr lang="en-US" sz="900" dirty="0"/>
           </a:p>
@@ -10481,7 +10481,7 @@
                 <a:ea typeface="Arial" pitchFamily="34" charset="-122"/>
                 <a:cs typeface="Arial" pitchFamily="34" charset="-120"/>
               </a:rPr>
-              <a:t>「立地は非常に便利で、サービスも良く、セルフサービスの荷物預かり所は融通が利く」</a:t>
+              <a:t>「立地は非常に便利で、電車や地下鉄の駅にも近いです」</a:t>
             </a:r>
             <a:endParaRPr lang="en-US" sz="900" dirty="0"/>
           </a:p>
@@ -12354,7 +12354,7 @@
                           <a:ea typeface="Arial" pitchFamily="34" charset="-122"/>
                           <a:cs typeface="Arial" pitchFamily="34" charset="-120"/>
                         </a:rPr>
-                        <a:t>11件</a:t>
+                        <a:t>10件</a:t>
                       </a:r>
                       <a:endParaRPr lang="en-US" sz="900" dirty="0">
                         <a:latin typeface="Arial" charset="0"/>

--- a/納品レポート/ホテル別レポート/daiichi_ikebukuro_口コミ分析レポート.pptx
+++ b/納品レポート/ホテル別レポート/daiichi_ikebukuro_口コミ分析レポート.pptx
@@ -214,7 +214,7 @@
                   <c:v>9.21</c:v>
                 </c:pt>
                 <c:pt idx="3">
-                  <c:v>9.18</c:v>
+                  <c:v>9</c:v>
                 </c:pt>
                 <c:pt idx="4">
                   <c:v>4</c:v>
@@ -563,7 +563,7 @@
                   <c:v>77</c:v>
                 </c:pt>
                 <c:pt idx="1">
-                  <c:v>5</c:v>
+                  <c:v>6</c:v>
                 </c:pt>
                 <c:pt idx="2">
                   <c:v>2</c:v>
@@ -787,7 +787,7 @@
                   <c:v>3</c:v>
                 </c:pt>
                 <c:pt idx="4">
-                  <c:v>2</c:v>
+                  <c:v>3</c:v>
                 </c:pt>
                 <c:pt idx="5">
                   <c:v>2</c:v>
@@ -2741,7 +2741,7 @@
                 <a:ea typeface="Arial" pitchFamily="34" charset="-122"/>
                 <a:cs typeface="Arial" pitchFamily="34" charset="-120"/>
               </a:rPr>
-              <a:t>レビュー総数：84件（5サイト）</a:t>
+              <a:t>レビュー総数：85件（5サイト）</a:t>
             </a:r>
             <a:endParaRPr lang="en-US" sz="1000" dirty="0"/>
           </a:p>
@@ -2761,7 +2761,7 @@
                 <a:ea typeface="Arial" pitchFamily="34" charset="-122"/>
                 <a:cs typeface="Arial" pitchFamily="34" charset="-120"/>
               </a:rPr>
-              <a:t>作成日：2026年4月6日</a:t>
+              <a:t>作成日：2026年4月7日</a:t>
             </a:r>
             <a:endParaRPr lang="en-US" sz="1000" dirty="0"/>
           </a:p>
@@ -3307,7 +3307,7 @@
                           <a:ea typeface="Arial" pitchFamily="34" charset="-122"/>
                           <a:cs typeface="Arial" pitchFamily="34" charset="-120"/>
                         </a:rPr>
-                        <a:t>9.44点</a:t>
+                        <a:t>9.40点</a:t>
                       </a:r>
                       <a:endParaRPr lang="en-US" sz="1000" dirty="0">
                         <a:latin typeface="Arial" charset="0"/>
@@ -3581,7 +3581,7 @@
                           <a:ea typeface="Arial" pitchFamily="34" charset="-122"/>
                           <a:cs typeface="Arial" pitchFamily="34" charset="-120"/>
                         </a:rPr>
-                        <a:t>91.7%</a:t>
+                        <a:t>90.6%</a:t>
                       </a:r>
                       <a:endParaRPr lang="en-US" sz="1000" dirty="0">
                         <a:latin typeface="Arial" charset="0"/>
@@ -3649,7 +3649,7 @@
                           <a:ea typeface="Arial" pitchFamily="34" charset="-122"/>
                           <a:cs typeface="Arial" pitchFamily="34" charset="-120"/>
                         </a:rPr>
-                        <a:t>94%以上</a:t>
+                        <a:t>93%以上</a:t>
                       </a:r>
                       <a:endParaRPr lang="en-US" sz="1000" dirty="0">
                         <a:latin typeface="Arial" charset="0"/>
@@ -4677,7 +4677,7 @@
                           <a:ea typeface="Arial" pitchFamily="34" charset="-122"/>
                           <a:cs typeface="Arial" pitchFamily="34" charset="-120"/>
                         </a:rPr>
-                        <a:t>約11件/期間</a:t>
+                        <a:t>約12件/期間</a:t>
                       </a:r>
                       <a:endParaRPr lang="en-US" sz="1000" dirty="0">
                         <a:latin typeface="Arial" charset="0"/>
@@ -4745,7 +4745,7 @@
                           <a:ea typeface="Arial" pitchFamily="34" charset="-122"/>
                           <a:cs typeface="Arial" pitchFamily="34" charset="-120"/>
                         </a:rPr>
-                        <a:t>5件以下</a:t>
+                        <a:t>6件以下</a:t>
                       </a:r>
                       <a:endParaRPr lang="en-US" sz="1000" dirty="0">
                         <a:latin typeface="Arial" charset="0"/>
@@ -5316,7 +5316,7 @@
                 <a:ea typeface="Arial" pitchFamily="34" charset="-122"/>
                 <a:cs typeface="Arial" pitchFamily="34" charset="-120"/>
               </a:rPr>
-              <a:t>9.44</a:t>
+              <a:t>9.40</a:t>
             </a:r>
             <a:endParaRPr lang="en-US" sz="3200" dirty="0"/>
           </a:p>
@@ -5441,7 +5441,7 @@
                 <a:ea typeface="Arial" pitchFamily="34" charset="-122"/>
                 <a:cs typeface="Arial" pitchFamily="34" charset="-120"/>
               </a:rPr>
-              <a:t>91.7%</a:t>
+              <a:t>90.6%</a:t>
             </a:r>
             <a:endParaRPr lang="en-US" sz="3200" dirty="0"/>
           </a:p>
@@ -5691,7 +5691,7 @@
                 <a:ea typeface="Arial" pitchFamily="34" charset="-122"/>
                 <a:cs typeface="Arial" pitchFamily="34" charset="-120"/>
               </a:rPr>
-              <a:t>84件</a:t>
+              <a:t>85件</a:t>
             </a:r>
             <a:endParaRPr lang="en-US" sz="3200" dirty="0"/>
           </a:p>
@@ -5919,7 +5919,7 @@
                 <a:ea typeface="Arial" pitchFamily="34" charset="-122"/>
                 <a:cs typeface="Arial" pitchFamily="34" charset="-120"/>
               </a:rPr>
-              <a:t>  周辺は活気があり、コンビニエンスストアも1階にあるなど、生活に必要な施設も充実しています</a:t>
+              <a:t>  階下にはファミリーマートの一蘭ラーメンがあり、徒歩約5分です</a:t>
             </a:r>
             <a:endParaRPr lang="en-US" sz="1100" dirty="0"/>
           </a:p>
@@ -6500,7 +6500,7 @@
                 <a:ea typeface="Arial" pitchFamily="34" charset="-122"/>
                 <a:cs typeface="Arial" pitchFamily="34" charset="-120"/>
               </a:rPr>
-              <a:t>9.44</a:t>
+              <a:t>9.40</a:t>
             </a:r>
             <a:endParaRPr lang="en-US" sz="3200" dirty="0"/>
           </a:p>
@@ -6625,7 +6625,7 @@
                 <a:ea typeface="Arial" pitchFamily="34" charset="-122"/>
                 <a:cs typeface="Arial" pitchFamily="34" charset="-120"/>
               </a:rPr>
-              <a:t>91.7%</a:t>
+              <a:t>90.6%</a:t>
             </a:r>
             <a:endParaRPr lang="en-US" sz="3200" dirty="0"/>
           </a:p>
@@ -6875,7 +6875,7 @@
                 <a:ea typeface="Arial" pitchFamily="34" charset="-122"/>
                 <a:cs typeface="Arial" pitchFamily="34" charset="-120"/>
               </a:rPr>
-              <a:t>84件</a:t>
+              <a:t>85件</a:t>
             </a:r>
             <a:endParaRPr lang="en-US" sz="3200" dirty="0"/>
           </a:p>
@@ -8880,7 +8880,7 @@
                           <a:ea typeface="Arial" pitchFamily="34" charset="-122"/>
                           <a:cs typeface="Arial" pitchFamily="34" charset="-120"/>
                         </a:rPr>
-                        <a:t>17</a:t>
+                        <a:t>18</a:t>
                       </a:r>
                       <a:endParaRPr lang="en-US" sz="900" dirty="0">
                         <a:latin typeface="Arial" charset="0"/>
@@ -8948,7 +8948,7 @@
                           <a:ea typeface="Arial" pitchFamily="34" charset="-122"/>
                           <a:cs typeface="Arial" pitchFamily="34" charset="-120"/>
                         </a:rPr>
-                        <a:t>4.59</a:t>
+                        <a:t>4.5</a:t>
                       </a:r>
                       <a:endParaRPr lang="en-US" sz="900" dirty="0">
                         <a:latin typeface="Arial" charset="0"/>
@@ -9084,7 +9084,7 @@
                           <a:ea typeface="Arial" pitchFamily="34" charset="-122"/>
                           <a:cs typeface="Arial" pitchFamily="34" charset="-120"/>
                         </a:rPr>
-                        <a:t>9.18</a:t>
+                        <a:t>9</a:t>
                       </a:r>
                       <a:endParaRPr lang="en-US" sz="900" dirty="0">
                         <a:latin typeface="Arial" charset="0"/>
@@ -9834,7 +9834,7 @@
                 <a:ea typeface="Arial" pitchFamily="34" charset="-122"/>
                 <a:cs typeface="Arial" pitchFamily="34" charset="-120"/>
               </a:rPr>
-              <a:t>77件（91.7%）</a:t>
+              <a:t>77件（90.6%）</a:t>
             </a:r>
             <a:endParaRPr lang="en-US" sz="1100" dirty="0"/>
           </a:p>
@@ -9932,7 +9932,7 @@
                 <a:ea typeface="Arial" pitchFamily="34" charset="-122"/>
                 <a:cs typeface="Arial" pitchFamily="34" charset="-120"/>
               </a:rPr>
-              <a:t>5件（6.0%）</a:t>
+              <a:t>6件（7.1%）</a:t>
             </a:r>
             <a:endParaRPr lang="en-US" sz="1100" dirty="0"/>
           </a:p>
@@ -10888,7 +10888,7 @@
                 <a:ea typeface="Arial" pitchFamily="34" charset="-122"/>
                 <a:cs typeface="Arial" pitchFamily="34" charset="-120"/>
               </a:rPr>
-              <a:t>周辺は活気があり、コンビニエンスストアも1階にあるなど、生活に必要な施設も充実しています</a:t>
+              <a:t>階下にはファミリーマートの一蘭ラーメンがあり、徒歩約5分です</a:t>
             </a:r>
             <a:endParaRPr lang="en-US" sz="900" dirty="0"/>
           </a:p>
@@ -10927,7 +10927,7 @@
                 <a:ea typeface="Arial" pitchFamily="34" charset="-122"/>
                 <a:cs typeface="Arial" pitchFamily="34" charset="-120"/>
               </a:rPr>
-              <a:t>「立地が非常に良いホテルで、ショッピングやレストランにも近く、スタッフもとても親切です」</a:t>
+              <a:t>「周辺は活気があり、コンビニエンスストアも1階にあるなど、生活に必要な施設も充実しています」</a:t>
             </a:r>
             <a:endParaRPr lang="en-US" sz="900" dirty="0"/>
           </a:p>
@@ -12354,7 +12354,7 @@
                           <a:ea typeface="Arial" pitchFamily="34" charset="-122"/>
                           <a:cs typeface="Arial" pitchFamily="34" charset="-120"/>
                         </a:rPr>
-                        <a:t>11件</a:t>
+                        <a:t>12件</a:t>
                       </a:r>
                       <a:endParaRPr lang="en-US" sz="900" dirty="0">
                         <a:latin typeface="Arial" charset="0"/>
@@ -12902,7 +12902,7 @@
                           <a:ea typeface="Arial" pitchFamily="34" charset="-122"/>
                           <a:cs typeface="Arial" pitchFamily="34" charset="-120"/>
                         </a:rPr>
-                        <a:t>7件</a:t>
+                        <a:t>8件</a:t>
                       </a:r>
                       <a:endParaRPr lang="en-US" sz="900" dirty="0">
                         <a:latin typeface="Arial" charset="0"/>
@@ -13450,7 +13450,7 @@
                           <a:ea typeface="Arial" pitchFamily="34" charset="-122"/>
                           <a:cs typeface="Arial" pitchFamily="34" charset="-120"/>
                         </a:rPr>
-                        <a:t>4件</a:t>
+                        <a:t>5件</a:t>
                       </a:r>
                       <a:endParaRPr lang="en-US" sz="900" dirty="0">
                         <a:latin typeface="Arial" charset="0"/>
@@ -13588,7 +13588,7 @@
                           <a:ea typeface="Arial" pitchFamily="34" charset="-122"/>
                           <a:cs typeface="Arial" pitchFamily="34" charset="-120"/>
                         </a:rPr>
-                        <a:t>窓・採光</a:t>
+                        <a:t>清掃不備</a:t>
                       </a:r>
                       <a:endParaRPr lang="en-US" sz="900" dirty="0">
                         <a:latin typeface="Arial" charset="0"/>
@@ -13656,7 +13656,7 @@
                           <a:ea typeface="Arial" pitchFamily="34" charset="-122"/>
                           <a:cs typeface="Arial" pitchFamily="34" charset="-120"/>
                         </a:rPr>
-                        <a:t>เตียงขนาดกำลังดี มีแอร์แยก หน้าต่างเปิดได้ เดินทางสะดวกอย...</a:t>
+                        <a:t>中の水はひどく汚れていましたが、排水されておらず、どれくらい放置されていたのかと思うとゾッとしました…</a:t>
                       </a:r>
                       <a:endParaRPr lang="en-US" sz="900" dirty="0">
                         <a:latin typeface="Arial" charset="0"/>
@@ -13724,7 +13724,7 @@
                           <a:ea typeface="Arial" pitchFamily="34" charset="-122"/>
                           <a:cs typeface="Arial" pitchFamily="34" charset="-120"/>
                         </a:rPr>
-                        <a:t>2件</a:t>
+                        <a:t>3件</a:t>
                       </a:r>
                       <a:endParaRPr lang="en-US" sz="900" dirty="0">
                         <a:latin typeface="Arial" charset="0"/>
@@ -13862,7 +13862,7 @@
                           <a:ea typeface="Arial" pitchFamily="34" charset="-122"/>
                           <a:cs typeface="Arial" pitchFamily="34" charset="-120"/>
                         </a:rPr>
-                        <a:t>対応・サービスの不満</a:t>
+                        <a:t>窓・採光</a:t>
                       </a:r>
                       <a:endParaRPr lang="en-US" sz="900" dirty="0">
                         <a:latin typeface="Arial" charset="0"/>
@@ -13930,7 +13930,7 @@
                           <a:ea typeface="Arial" pitchFamily="34" charset="-122"/>
                           <a:cs typeface="Arial" pitchFamily="34" charset="-120"/>
                         </a:rPr>
-                        <a:t>24小時前台，英文OK、態度親切</a:t>
+                        <a:t>เตียงขนาดกำลังดี มีแอร์แยก หน้าต่างเปิดได้ เดินทางสะดวกอย...</a:t>
                       </a:r>
                       <a:endParaRPr lang="en-US" sz="900" dirty="0">
                         <a:latin typeface="Arial" charset="0"/>
@@ -14136,7 +14136,7 @@
                           <a:ea typeface="Arial" pitchFamily="34" charset="-122"/>
                           <a:cs typeface="Arial" pitchFamily="34" charset="-120"/>
                         </a:rPr>
-                        <a:t>清掃不備</a:t>
+                        <a:t>対応・サービスの不満</a:t>
                       </a:r>
                       <a:endParaRPr lang="en-US" sz="900" dirty="0">
                         <a:latin typeface="Arial" charset="0"/>
@@ -14204,7 +14204,7 @@
                           <a:ea typeface="Arial" pitchFamily="34" charset="-122"/>
                           <a:cs typeface="Arial" pitchFamily="34" charset="-120"/>
                         </a:rPr>
-                        <a:t>中の水はひどく汚れていましたが、排水されておらず、どれくらい放置されていたのかと思うとゾッとしました…</a:t>
+                        <a:t>24小時前台，英文OK、態度親切</a:t>
                       </a:r>
                       <a:endParaRPr lang="en-US" sz="900" dirty="0">
                         <a:latin typeface="Arial" charset="0"/>

--- a/納品レポート/ホテル別レポート/daiichi_ikebukuro_口コミ分析レポート.pptx
+++ b/納品レポート/ホテル別レポート/daiichi_ikebukuro_口コミ分析レポート.pptx
@@ -2761,7 +2761,7 @@
                 <a:ea typeface="Arial" pitchFamily="34" charset="-122"/>
                 <a:cs typeface="Arial" pitchFamily="34" charset="-120"/>
               </a:rPr>
-              <a:t>作成日：2026年4月7日</a:t>
+              <a:t>作成日：2026年4月8日</a:t>
             </a:r>
             <a:endParaRPr lang="en-US" sz="1000" dirty="0"/>
           </a:p>
@@ -5879,7 +5879,7 @@
                 <a:ea typeface="Arial" pitchFamily="34" charset="-122"/>
                 <a:cs typeface="Arial" pitchFamily="34" charset="-120"/>
               </a:rPr>
-              <a:t>  受付スタッフは親切で丁寧で、チェックインもスムーズでした</a:t>
+              <a:t>  受付スタッフは親切で丁寧な対応をしてくれ、チェックインもスムーズでした</a:t>
             </a:r>
             <a:endParaRPr lang="en-US" sz="1100" dirty="0"/>
           </a:p>
@@ -10665,7 +10665,7 @@
                 <a:ea typeface="Arial" pitchFamily="34" charset="-122"/>
                 <a:cs typeface="Arial" pitchFamily="34" charset="-120"/>
               </a:rPr>
-              <a:t>受付スタッフは親切で丁寧で、チェックインもスムーズでした</a:t>
+              <a:t>受付スタッフは親切で丁寧な対応をしてくれ、チェックインもスムーズでした</a:t>
             </a:r>
             <a:endParaRPr lang="en-US" sz="900" dirty="0"/>
           </a:p>
@@ -13108,7 +13108,7 @@
                           <a:ea typeface="Arial" pitchFamily="34" charset="-122"/>
                           <a:cs typeface="Arial" pitchFamily="34" charset="-120"/>
                         </a:rPr>
-                        <a:t>設備は少し古いが、それでもまたここに泊まりたい</a:t>
+                        <a:t>設備は少し古いですが、それでもまたここに泊まりたいと思います</a:t>
                       </a:r>
                       <a:endParaRPr lang="en-US" sz="900" dirty="0">
                         <a:latin typeface="Arial" charset="0"/>

--- a/納品レポート/ホテル別レポート/daiichi_ikebukuro_口コミ分析レポート.pptx
+++ b/納品レポート/ホテル別レポート/daiichi_ikebukuro_口コミ分析レポート.pptx
@@ -2761,7 +2761,7 @@
                 <a:ea typeface="Arial" pitchFamily="34" charset="-122"/>
                 <a:cs typeface="Arial" pitchFamily="34" charset="-120"/>
               </a:rPr>
-              <a:t>作成日：2026年4月10日</a:t>
+              <a:t>作成日：2026年4月11日</a:t>
             </a:r>
             <a:endParaRPr lang="en-US" sz="1000" dirty="0"/>
           </a:p>

--- a/納品レポート/ホテル別レポート/daiichi_ikebukuro_口コミ分析レポート.pptx
+++ b/納品レポート/ホテル別レポート/daiichi_ikebukuro_口コミ分析レポート.pptx
@@ -2761,7 +2761,7 @@
                 <a:ea typeface="Arial" pitchFamily="34" charset="-122"/>
                 <a:cs typeface="Arial" pitchFamily="34" charset="-120"/>
               </a:rPr>
-              <a:t>作成日：2026年4月11日</a:t>
+              <a:t>作成日：2026年4月13日</a:t>
             </a:r>
             <a:endParaRPr lang="en-US" sz="1000" dirty="0"/>
           </a:p>

--- a/納品レポート/ホテル別レポート/daiichi_ikebukuro_口コミ分析レポート.pptx
+++ b/納品レポート/ホテル別レポート/daiichi_ikebukuro_口コミ分析レポート.pptx
@@ -2761,7 +2761,7 @@
                 <a:ea typeface="Arial" pitchFamily="34" charset="-122"/>
                 <a:cs typeface="Arial" pitchFamily="34" charset="-120"/>
               </a:rPr>
-              <a:t>作成日：2026年4月13日</a:t>
+              <a:t>作成日：2026年4月15日</a:t>
             </a:r>
             <a:endParaRPr lang="en-US" sz="1000" dirty="0"/>
           </a:p>
@@ -4609,7 +4609,7 @@
                           <a:ea typeface="Arial" pitchFamily="34" charset="-122"/>
                           <a:cs typeface="Arial" pitchFamily="34" charset="-120"/>
                         </a:rPr>
-                        <a:t>部屋の狭さクレーム</a:t>
+                        <a:t>エアコン・空調クレーム</a:t>
                       </a:r>
                       <a:endParaRPr lang="en-US" sz="1000" dirty="0">
                         <a:latin typeface="Arial" charset="0"/>
@@ -6047,6 +6047,46 @@
                 <a:ea typeface="Arial" pitchFamily="34" charset="-122"/>
                 <a:cs typeface="Arial" pitchFamily="34" charset="-120"/>
               </a:rPr>
+              <a:t>エアコン・空調 </a:t>
+            </a:r>
+            <a:endParaRPr lang="en-US" sz="1100" dirty="0"/>
+          </a:p>
+          <a:p>
+            <a:pPr indent="0" marL="0">
+              <a:spcAft>
+                <a:spcPts val="200"/>
+              </a:spcAft>
+              <a:buNone/>
+            </a:pPr>
+            <a:r>
+              <a:rPr lang="en-US" sz="900" dirty="0">
+                <a:solidFill>
+                  <a:srgbClr val="64748B"/>
+                </a:solidFill>
+                <a:latin typeface="Arial" pitchFamily="34" charset="0"/>
+                <a:ea typeface="Arial" pitchFamily="34" charset="-122"/>
+                <a:cs typeface="Arial" pitchFamily="34" charset="-120"/>
+              </a:rPr>
+              <a:t>  Is a very good location hotel, so close to shopping and d...</a:t>
+            </a:r>
+            <a:endParaRPr lang="en-US" sz="1100" dirty="0"/>
+          </a:p>
+          <a:p>
+            <a:pPr indent="0" marL="0">
+              <a:spcAft>
+                <a:spcPts val="200"/>
+              </a:spcAft>
+              <a:buNone/>
+            </a:pPr>
+            <a:r>
+              <a:rPr lang="en-US" sz="1100" b="1" dirty="0">
+                <a:solidFill>
+                  <a:srgbClr val="334155"/>
+                </a:solidFill>
+                <a:latin typeface="Arial" pitchFamily="34" charset="0"/>
+                <a:ea typeface="Arial" pitchFamily="34" charset="-122"/>
+                <a:cs typeface="Arial" pitchFamily="34" charset="-120"/>
+              </a:rPr>
               <a:t>部屋の狭さ </a:t>
             </a:r>
             <a:endParaRPr lang="en-US" sz="1100" dirty="0"/>
@@ -6068,46 +6108,6 @@
                 <a:cs typeface="Arial" pitchFamily="34" charset="-120"/>
               </a:rPr>
               <a:t>  部屋は狭いですが、許容範囲です</a:t>
-            </a:r>
-            <a:endParaRPr lang="en-US" sz="1100" dirty="0"/>
-          </a:p>
-          <a:p>
-            <a:pPr indent="0" marL="0">
-              <a:spcAft>
-                <a:spcPts val="200"/>
-              </a:spcAft>
-              <a:buNone/>
-            </a:pPr>
-            <a:r>
-              <a:rPr lang="en-US" sz="1100" b="1" dirty="0">
-                <a:solidFill>
-                  <a:srgbClr val="334155"/>
-                </a:solidFill>
-                <a:latin typeface="Arial" pitchFamily="34" charset="0"/>
-                <a:ea typeface="Arial" pitchFamily="34" charset="-122"/>
-                <a:cs typeface="Arial" pitchFamily="34" charset="-120"/>
-              </a:rPr>
-              <a:t>エアコン・空調 </a:t>
-            </a:r>
-            <a:endParaRPr lang="en-US" sz="1100" dirty="0"/>
-          </a:p>
-          <a:p>
-            <a:pPr indent="0" marL="0">
-              <a:spcAft>
-                <a:spcPts val="200"/>
-              </a:spcAft>
-              <a:buNone/>
-            </a:pPr>
-            <a:r>
-              <a:rPr lang="en-US" sz="900" dirty="0">
-                <a:solidFill>
-                  <a:srgbClr val="64748B"/>
-                </a:solidFill>
-                <a:latin typeface="Arial" pitchFamily="34" charset="0"/>
-                <a:ea typeface="Arial" pitchFamily="34" charset="-122"/>
-                <a:cs typeface="Arial" pitchFamily="34" charset="-120"/>
-              </a:rPr>
-              <a:t>  Is a very good location hotel, so close to shopping and d...</a:t>
             </a:r>
             <a:endParaRPr lang="en-US" sz="1100" dirty="0"/>
           </a:p>
@@ -12218,7 +12218,7 @@
                           <a:ea typeface="Arial" pitchFamily="34" charset="-122"/>
                           <a:cs typeface="Arial" pitchFamily="34" charset="-120"/>
                         </a:rPr>
-                        <a:t>部屋の狭さ</a:t>
+                        <a:t>エアコン・空調</a:t>
                       </a:r>
                       <a:endParaRPr lang="en-US" sz="900" dirty="0">
                         <a:latin typeface="Arial" charset="0"/>
@@ -12286,7 +12286,7 @@
                           <a:ea typeface="Arial" pitchFamily="34" charset="-122"/>
                           <a:cs typeface="Arial" pitchFamily="34" charset="-120"/>
                         </a:rPr>
-                        <a:t>部屋は狭いですが、許容範囲です</a:t>
+                        <a:t>Is a very good location hotel, so close to shopping and d...</a:t>
                       </a:r>
                       <a:endParaRPr lang="en-US" sz="900" dirty="0">
                         <a:latin typeface="Arial" charset="0"/>
@@ -12492,7 +12492,7 @@
                           <a:ea typeface="Arial" pitchFamily="34" charset="-122"/>
                           <a:cs typeface="Arial" pitchFamily="34" charset="-120"/>
                         </a:rPr>
-                        <a:t>エアコン・空調</a:t>
+                        <a:t>部屋の狭さ</a:t>
                       </a:r>
                       <a:endParaRPr lang="en-US" sz="900" dirty="0">
                         <a:latin typeface="Arial" charset="0"/>
@@ -12560,7 +12560,7 @@
                           <a:ea typeface="Arial" pitchFamily="34" charset="-122"/>
                           <a:cs typeface="Arial" pitchFamily="34" charset="-120"/>
                         </a:rPr>
-                        <a:t>Is a very good location hotel, so close to shopping and d...</a:t>
+                        <a:t>部屋は狭いですが、許容範囲です</a:t>
                       </a:r>
                       <a:endParaRPr lang="en-US" sz="900" dirty="0">
                         <a:latin typeface="Arial" charset="0"/>
@@ -12628,7 +12628,7 @@
                           <a:ea typeface="Arial" pitchFamily="34" charset="-122"/>
                           <a:cs typeface="Arial" pitchFamily="34" charset="-120"/>
                         </a:rPr>
-                        <a:t>10件</a:t>
+                        <a:t>9件</a:t>
                       </a:r>
                       <a:endParaRPr lang="en-US" sz="900" dirty="0">
                         <a:latin typeface="Arial" charset="0"/>

--- a/納品レポート/ホテル別レポート/daiichi_ikebukuro_口コミ分析レポート.pptx
+++ b/納品レポート/ホテル別レポート/daiichi_ikebukuro_口コミ分析レポート.pptx
@@ -2761,7 +2761,7 @@
                 <a:ea typeface="Arial" pitchFamily="34" charset="-122"/>
                 <a:cs typeface="Arial" pitchFamily="34" charset="-120"/>
               </a:rPr>
-              <a:t>作成日：2026年4月16日</a:t>
+              <a:t>作成日：2026年4月20日</a:t>
             </a:r>
             <a:endParaRPr lang="en-US" sz="1000" dirty="0"/>
           </a:p>
@@ -4609,7 +4609,7 @@
                           <a:ea typeface="Arial" pitchFamily="34" charset="-122"/>
                           <a:cs typeface="Arial" pitchFamily="34" charset="-120"/>
                         </a:rPr>
-                        <a:t>エアコン・空調クレーム</a:t>
+                        <a:t>部屋の狭さクレーム</a:t>
                       </a:r>
                       <a:endParaRPr lang="en-US" sz="1000" dirty="0">
                         <a:latin typeface="Arial" charset="0"/>
@@ -6047,6 +6047,46 @@
                 <a:ea typeface="Arial" pitchFamily="34" charset="-122"/>
                 <a:cs typeface="Arial" pitchFamily="34" charset="-120"/>
               </a:rPr>
+              <a:t>部屋の狭さ </a:t>
+            </a:r>
+            <a:endParaRPr lang="en-US" sz="1100" dirty="0"/>
+          </a:p>
+          <a:p>
+            <a:pPr indent="0" marL="0">
+              <a:spcAft>
+                <a:spcPts val="200"/>
+              </a:spcAft>
+              <a:buNone/>
+            </a:pPr>
+            <a:r>
+              <a:rPr lang="en-US" sz="900" dirty="0">
+                <a:solidFill>
+                  <a:srgbClr val="64748B"/>
+                </a:solidFill>
+                <a:latin typeface="Arial" pitchFamily="34" charset="0"/>
+                <a:ea typeface="Arial" pitchFamily="34" charset="-122"/>
+                <a:cs typeface="Arial" pitchFamily="34" charset="-120"/>
+              </a:rPr>
+              <a:t>  部屋は狭いですが、許容範囲です</a:t>
+            </a:r>
+            <a:endParaRPr lang="en-US" sz="1100" dirty="0"/>
+          </a:p>
+          <a:p>
+            <a:pPr indent="0" marL="0">
+              <a:spcAft>
+                <a:spcPts val="200"/>
+              </a:spcAft>
+              <a:buNone/>
+            </a:pPr>
+            <a:r>
+              <a:rPr lang="en-US" sz="1100" b="1" dirty="0">
+                <a:solidFill>
+                  <a:srgbClr val="334155"/>
+                </a:solidFill>
+                <a:latin typeface="Arial" pitchFamily="34" charset="0"/>
+                <a:ea typeface="Arial" pitchFamily="34" charset="-122"/>
+                <a:cs typeface="Arial" pitchFamily="34" charset="-120"/>
+              </a:rPr>
               <a:t>エアコン・空調 </a:t>
             </a:r>
             <a:endParaRPr lang="en-US" sz="1100" dirty="0"/>
@@ -6068,46 +6108,6 @@
                 <a:cs typeface="Arial" pitchFamily="34" charset="-120"/>
               </a:rPr>
               <a:t>  Is a very good location hotel, so close to shopping and d...</a:t>
-            </a:r>
-            <a:endParaRPr lang="en-US" sz="1100" dirty="0"/>
-          </a:p>
-          <a:p>
-            <a:pPr indent="0" marL="0">
-              <a:spcAft>
-                <a:spcPts val="200"/>
-              </a:spcAft>
-              <a:buNone/>
-            </a:pPr>
-            <a:r>
-              <a:rPr lang="en-US" sz="1100" b="1" dirty="0">
-                <a:solidFill>
-                  <a:srgbClr val="334155"/>
-                </a:solidFill>
-                <a:latin typeface="Arial" pitchFamily="34" charset="0"/>
-                <a:ea typeface="Arial" pitchFamily="34" charset="-122"/>
-                <a:cs typeface="Arial" pitchFamily="34" charset="-120"/>
-              </a:rPr>
-              <a:t>部屋の狭さ </a:t>
-            </a:r>
-            <a:endParaRPr lang="en-US" sz="1100" dirty="0"/>
-          </a:p>
-          <a:p>
-            <a:pPr indent="0" marL="0">
-              <a:spcAft>
-                <a:spcPts val="200"/>
-              </a:spcAft>
-              <a:buNone/>
-            </a:pPr>
-            <a:r>
-              <a:rPr lang="en-US" sz="900" dirty="0">
-                <a:solidFill>
-                  <a:srgbClr val="64748B"/>
-                </a:solidFill>
-                <a:latin typeface="Arial" pitchFamily="34" charset="0"/>
-                <a:ea typeface="Arial" pitchFamily="34" charset="-122"/>
-                <a:cs typeface="Arial" pitchFamily="34" charset="-120"/>
-              </a:rPr>
-              <a:t>  部屋は狭いですが、許容範囲です</a:t>
             </a:r>
             <a:endParaRPr lang="en-US" sz="1100" dirty="0"/>
           </a:p>
@@ -12218,7 +12218,7 @@
                           <a:ea typeface="Arial" pitchFamily="34" charset="-122"/>
                           <a:cs typeface="Arial" pitchFamily="34" charset="-120"/>
                         </a:rPr>
-                        <a:t>エアコン・空調</a:t>
+                        <a:t>部屋の狭さ</a:t>
                       </a:r>
                       <a:endParaRPr lang="en-US" sz="900" dirty="0">
                         <a:latin typeface="Arial" charset="0"/>
@@ -12286,7 +12286,7 @@
                           <a:ea typeface="Arial" pitchFamily="34" charset="-122"/>
                           <a:cs typeface="Arial" pitchFamily="34" charset="-120"/>
                         </a:rPr>
-                        <a:t>Is a very good location hotel, so close to shopping and d...</a:t>
+                        <a:t>部屋は狭いですが、許容範囲です</a:t>
                       </a:r>
                       <a:endParaRPr lang="en-US" sz="900" dirty="0">
                         <a:latin typeface="Arial" charset="0"/>
@@ -12492,7 +12492,7 @@
                           <a:ea typeface="Arial" pitchFamily="34" charset="-122"/>
                           <a:cs typeface="Arial" pitchFamily="34" charset="-120"/>
                         </a:rPr>
-                        <a:t>部屋の狭さ</a:t>
+                        <a:t>エアコン・空調</a:t>
                       </a:r>
                       <a:endParaRPr lang="en-US" sz="900" dirty="0">
                         <a:latin typeface="Arial" charset="0"/>
@@ -12560,7 +12560,7 @@
                           <a:ea typeface="Arial" pitchFamily="34" charset="-122"/>
                           <a:cs typeface="Arial" pitchFamily="34" charset="-120"/>
                         </a:rPr>
-                        <a:t>部屋は狭いですが、許容範囲です</a:t>
+                        <a:t>Is a very good location hotel, so close to shopping and d...</a:t>
                       </a:r>
                       <a:endParaRPr lang="en-US" sz="900" dirty="0">
                         <a:latin typeface="Arial" charset="0"/>
@@ -12628,7 +12628,7 @@
                           <a:ea typeface="Arial" pitchFamily="34" charset="-122"/>
                           <a:cs typeface="Arial" pitchFamily="34" charset="-120"/>
                         </a:rPr>
-                        <a:t>9件</a:t>
+                        <a:t>10件</a:t>
                       </a:r>
                       <a:endParaRPr lang="en-US" sz="900" dirty="0">
                         <a:latin typeface="Arial" charset="0"/>

--- a/納品レポート/ホテル別レポート/daiichi_ikebukuro_口コミ分析レポート.pptx
+++ b/納品レポート/ホテル別レポート/daiichi_ikebukuro_口コミ分析レポート.pptx
@@ -2761,7 +2761,7 @@
                 <a:ea typeface="Arial" pitchFamily="34" charset="-122"/>
                 <a:cs typeface="Arial" pitchFamily="34" charset="-120"/>
               </a:rPr>
-              <a:t>作成日：2026年4月20日</a:t>
+              <a:t>作成日：2026年4月21日</a:t>
             </a:r>
             <a:endParaRPr lang="en-US" sz="1000" dirty="0"/>
           </a:p>

--- a/納品レポート/ホテル別レポート/daiichi_ikebukuro_口コミ分析レポート.pptx
+++ b/納品レポート/ホテル別レポート/daiichi_ikebukuro_口コミ分析レポート.pptx
@@ -2761,7 +2761,7 @@
                 <a:ea typeface="Arial" pitchFamily="34" charset="-122"/>
                 <a:cs typeface="Arial" pitchFamily="34" charset="-120"/>
               </a:rPr>
-              <a:t>作成日：2026年4月21日</a:t>
+              <a:t>作成日：2026年4月22日</a:t>
             </a:r>
             <a:endParaRPr lang="en-US" sz="1000" dirty="0"/>
           </a:p>
